--- a/docs/content/05-teaching-resources/slides/network-cabling/01-signal-theory-and-data-transmission.pptx
+++ b/docs/content/05-teaching-resources/slides/network-cabling/01-signal-theory-and-data-transmission.pptx
@@ -15,6 +15,14 @@
     <p:sldId id="263" r:id="rId15"/>
     <p:sldId id="264" r:id="rId16"/>
     <p:sldId id="265" r:id="rId17"/>
+    <p:sldId id="266" r:id="rId18"/>
+    <p:sldId id="267" r:id="rId19"/>
+    <p:sldId id="268" r:id="rId20"/>
+    <p:sldId id="269" r:id="rId21"/>
+    <p:sldId id="270" r:id="rId22"/>
+    <p:sldId id="271" r:id="rId23"/>
+    <p:sldId id="272" r:id="rId24"/>
+    <p:sldId id="273" r:id="rId25"/>
   </p:sldIdLst>
   <p:sldSz cx="12191695" cy="6858000" type="screen4x3"/>
   <p:notesSz cx="6858000" cy="9144000"/>
@@ -511,7 +519,22 @@
           <a:lstStyle/>
           <a:p>
             <a:r>
-              <a:t>Poor handling faults: dirty or damaged connectors (unreliable or no link), bending too tightly, and poor-quality cable or connectors.</a:t>
+              <a:t>Answers:</a:t>
+            </a:r>
+          </a:p>
+          <a:p>
+            <a:r>
+              <a:t>1. Stops and retries after a random delay.</a:t>
+            </a:r>
+          </a:p>
+          <a:p>
+            <a:r>
+              <a:t>2. CSMA/CA.</a:t>
+            </a:r>
+          </a:p>
+          <a:p>
+            <a:r>
+              <a:t>3. Let data be reassembled in the right order.</a:t>
             </a:r>
           </a:p>
         </p:txBody>
@@ -581,7 +604,22 @@
           <a:lstStyle/>
           <a:p>
             <a:r>
-              <a:t>Worked example: 12 V across 4 ohms gives 3 A. Double the resistance and the current halves.</a:t>
+              <a:t>Answers:</a:t>
+            </a:r>
+          </a:p>
+          <a:p>
+            <a:r>
+              <a:t>1. Total internal reflection.</a:t>
+            </a:r>
+          </a:p>
+          <a:p>
+            <a:r>
+              <a:t>2. Single-mode.</a:t>
+            </a:r>
+          </a:p>
+          <a:p>
+            <a:r>
+              <a:t>3. Different light paths arrive at slightly different times.</a:t>
             </a:r>
           </a:p>
         </p:txBody>
@@ -651,7 +689,7 @@
           <a:lstStyle/>
           <a:p>
             <a:r>
-              <a:t>Give students a few minutes to answer on mini whiteboards or paper, then reveal the answers on the next slide.</a:t>
+              <a:t>Poor handling faults: dirty or damaged connectors (unreliable or no link), bending too tightly, and poor-quality cable or connectors.</a:t>
             </a:r>
           </a:p>
         </p:txBody>
@@ -721,7 +759,22 @@
           <a:lstStyle/>
           <a:p>
             <a:r>
-              <a:t>Talk through any answers the class found difficult.</a:t>
+              <a:t>Answers:</a:t>
+            </a:r>
+          </a:p>
+          <a:p>
+            <a:r>
+              <a:t>1. Decibels (dB).</a:t>
+            </a:r>
+          </a:p>
+          <a:p>
+            <a:r>
+              <a:t>2. Any two: absorption, scattering, bending.</a:t>
+            </a:r>
+          </a:p>
+          <a:p>
+            <a:r>
+              <a:t>3. Clean and inspect the connectors.</a:t>
             </a:r>
           </a:p>
         </p:txBody>
@@ -747,6 +800,301 @@
 </file>
 
 <file path=ppt/notesSlides/notesSlide5.xml><?xml version="1.0" encoding="utf-8"?>
+<p:notes xmlns:a="http://schemas.openxmlformats.org/drawingml/2006/main" xmlns:p="http://schemas.openxmlformats.org/presentationml/2006/main" xmlns:r="http://schemas.openxmlformats.org/officeDocument/2006/relationships">
+  <p:cSld>
+    <p:spTree>
+      <p:nvGrpSpPr>
+        <p:cNvPr id="1" name=""/>
+        <p:cNvGrpSpPr/>
+        <p:nvPr/>
+      </p:nvGrpSpPr>
+      <p:grpSpPr>
+        <a:xfrm>
+          <a:off x="0" y="0"/>
+          <a:ext cx="0" cy="0"/>
+          <a:chOff x="0" y="0"/>
+          <a:chExt cx="0" cy="0"/>
+        </a:xfrm>
+      </p:grpSpPr>
+      <p:sp>
+        <p:nvSpPr>
+          <p:cNvPr id="2" name="Slide Image Placeholder 1"/>
+          <p:cNvSpPr>
+            <a:spLocks noGrp="1"/>
+          </p:cNvSpPr>
+          <p:nvPr>
+            <p:ph type="sldImg" idx="2"/>
+          </p:nvPr>
+        </p:nvSpPr>
+        <p:spPr/>
+      </p:sp>
+      <p:sp>
+        <p:nvSpPr>
+          <p:cNvPr id="3" name="Notes Placeholder 2"/>
+          <p:cNvSpPr>
+            <a:spLocks noGrp="1"/>
+          </p:cNvSpPr>
+          <p:nvPr>
+            <p:ph type="body" idx="3" sz="quarter"/>
+          </p:nvPr>
+        </p:nvSpPr>
+        <p:spPr/>
+        <p:txBody>
+          <a:bodyPr/>
+          <a:lstStyle/>
+          <a:p>
+            <a:r>
+              <a:t>Worked example: 12 V across 4 ohms gives 3 A. Double the resistance and the current halves.</a:t>
+            </a:r>
+          </a:p>
+        </p:txBody>
+      </p:sp>
+      <p:sp>
+        <p:nvSpPr>
+          <p:cNvPr id="4" name="Slide Number Placeholder 3"/>
+          <p:cNvSpPr>
+            <a:spLocks noGrp="1"/>
+          </p:cNvSpPr>
+          <p:nvPr>
+            <p:ph type="sldNum" idx="5" sz="quarter"/>
+          </p:nvPr>
+        </p:nvSpPr>
+        <p:spPr/>
+      </p:sp>
+    </p:spTree>
+  </p:cSld>
+  <p:clrMapOvr>
+    <a:masterClrMapping/>
+  </p:clrMapOvr>
+</p:notes>
+</file>
+
+<file path=ppt/notesSlides/notesSlide6.xml><?xml version="1.0" encoding="utf-8"?>
+<p:notes xmlns:a="http://schemas.openxmlformats.org/drawingml/2006/main" xmlns:p="http://schemas.openxmlformats.org/presentationml/2006/main" xmlns:r="http://schemas.openxmlformats.org/officeDocument/2006/relationships">
+  <p:cSld>
+    <p:spTree>
+      <p:nvGrpSpPr>
+        <p:cNvPr id="1" name=""/>
+        <p:cNvGrpSpPr/>
+        <p:nvPr/>
+      </p:nvGrpSpPr>
+      <p:grpSpPr>
+        <a:xfrm>
+          <a:off x="0" y="0"/>
+          <a:ext cx="0" cy="0"/>
+          <a:chOff x="0" y="0"/>
+          <a:chExt cx="0" cy="0"/>
+        </a:xfrm>
+      </p:grpSpPr>
+      <p:sp>
+        <p:nvSpPr>
+          <p:cNvPr id="2" name="Slide Image Placeholder 1"/>
+          <p:cNvSpPr>
+            <a:spLocks noGrp="1"/>
+          </p:cNvSpPr>
+          <p:nvPr>
+            <p:ph type="sldImg" idx="2"/>
+          </p:nvPr>
+        </p:nvSpPr>
+        <p:spPr/>
+      </p:sp>
+      <p:sp>
+        <p:nvSpPr>
+          <p:cNvPr id="3" name="Notes Placeholder 2"/>
+          <p:cNvSpPr>
+            <a:spLocks noGrp="1"/>
+          </p:cNvSpPr>
+          <p:nvPr>
+            <p:ph type="body" idx="3" sz="quarter"/>
+          </p:nvPr>
+        </p:nvSpPr>
+        <p:spPr/>
+        <p:txBody>
+          <a:bodyPr/>
+          <a:lstStyle/>
+          <a:p>
+            <a:r>
+              <a:t>Answers:</a:t>
+            </a:r>
+          </a:p>
+          <a:p>
+            <a:r>
+              <a:t>1. V = I x R.</a:t>
+            </a:r>
+          </a:p>
+          <a:p>
+            <a:r>
+              <a:t>2. It decreases.</a:t>
+            </a:r>
+          </a:p>
+          <a:p>
+            <a:r>
+              <a:t>3. 100 m.</a:t>
+            </a:r>
+          </a:p>
+        </p:txBody>
+      </p:sp>
+      <p:sp>
+        <p:nvSpPr>
+          <p:cNvPr id="4" name="Slide Number Placeholder 3"/>
+          <p:cNvSpPr>
+            <a:spLocks noGrp="1"/>
+          </p:cNvSpPr>
+          <p:nvPr>
+            <p:ph type="sldNum" idx="5" sz="quarter"/>
+          </p:nvPr>
+        </p:nvSpPr>
+        <p:spPr/>
+      </p:sp>
+    </p:spTree>
+  </p:cSld>
+  <p:clrMapOvr>
+    <a:masterClrMapping/>
+  </p:clrMapOvr>
+</p:notes>
+</file>
+
+<file path=ppt/notesSlides/notesSlide7.xml><?xml version="1.0" encoding="utf-8"?>
+<p:notes xmlns:a="http://schemas.openxmlformats.org/drawingml/2006/main" xmlns:p="http://schemas.openxmlformats.org/presentationml/2006/main" xmlns:r="http://schemas.openxmlformats.org/officeDocument/2006/relationships">
+  <p:cSld>
+    <p:spTree>
+      <p:nvGrpSpPr>
+        <p:cNvPr id="1" name=""/>
+        <p:cNvGrpSpPr/>
+        <p:nvPr/>
+      </p:nvGrpSpPr>
+      <p:grpSpPr>
+        <a:xfrm>
+          <a:off x="0" y="0"/>
+          <a:ext cx="0" cy="0"/>
+          <a:chOff x="0" y="0"/>
+          <a:chExt cx="0" cy="0"/>
+        </a:xfrm>
+      </p:grpSpPr>
+      <p:sp>
+        <p:nvSpPr>
+          <p:cNvPr id="2" name="Slide Image Placeholder 1"/>
+          <p:cNvSpPr>
+            <a:spLocks noGrp="1"/>
+          </p:cNvSpPr>
+          <p:nvPr>
+            <p:ph type="sldImg" idx="2"/>
+          </p:nvPr>
+        </p:nvSpPr>
+        <p:spPr/>
+      </p:sp>
+      <p:sp>
+        <p:nvSpPr>
+          <p:cNvPr id="3" name="Notes Placeholder 2"/>
+          <p:cNvSpPr>
+            <a:spLocks noGrp="1"/>
+          </p:cNvSpPr>
+          <p:nvPr>
+            <p:ph type="body" idx="3" sz="quarter"/>
+          </p:nvPr>
+        </p:nvSpPr>
+        <p:spPr/>
+        <p:txBody>
+          <a:bodyPr/>
+          <a:lstStyle/>
+          <a:p>
+            <a:r>
+              <a:t>Give students a few minutes to answer on mini whiteboards or paper, then reveal the answers on the next slide.</a:t>
+            </a:r>
+          </a:p>
+        </p:txBody>
+      </p:sp>
+      <p:sp>
+        <p:nvSpPr>
+          <p:cNvPr id="4" name="Slide Number Placeholder 3"/>
+          <p:cNvSpPr>
+            <a:spLocks noGrp="1"/>
+          </p:cNvSpPr>
+          <p:nvPr>
+            <p:ph type="sldNum" idx="5" sz="quarter"/>
+          </p:nvPr>
+        </p:nvSpPr>
+        <p:spPr/>
+      </p:sp>
+    </p:spTree>
+  </p:cSld>
+  <p:clrMapOvr>
+    <a:masterClrMapping/>
+  </p:clrMapOvr>
+</p:notes>
+</file>
+
+<file path=ppt/notesSlides/notesSlide8.xml><?xml version="1.0" encoding="utf-8"?>
+<p:notes xmlns:a="http://schemas.openxmlformats.org/drawingml/2006/main" xmlns:p="http://schemas.openxmlformats.org/presentationml/2006/main" xmlns:r="http://schemas.openxmlformats.org/officeDocument/2006/relationships">
+  <p:cSld>
+    <p:spTree>
+      <p:nvGrpSpPr>
+        <p:cNvPr id="1" name=""/>
+        <p:cNvGrpSpPr/>
+        <p:nvPr/>
+      </p:nvGrpSpPr>
+      <p:grpSpPr>
+        <a:xfrm>
+          <a:off x="0" y="0"/>
+          <a:ext cx="0" cy="0"/>
+          <a:chOff x="0" y="0"/>
+          <a:chExt cx="0" cy="0"/>
+        </a:xfrm>
+      </p:grpSpPr>
+      <p:sp>
+        <p:nvSpPr>
+          <p:cNvPr id="2" name="Slide Image Placeholder 1"/>
+          <p:cNvSpPr>
+            <a:spLocks noGrp="1"/>
+          </p:cNvSpPr>
+          <p:nvPr>
+            <p:ph type="sldImg" idx="2"/>
+          </p:nvPr>
+        </p:nvSpPr>
+        <p:spPr/>
+      </p:sp>
+      <p:sp>
+        <p:nvSpPr>
+          <p:cNvPr id="3" name="Notes Placeholder 2"/>
+          <p:cNvSpPr>
+            <a:spLocks noGrp="1"/>
+          </p:cNvSpPr>
+          <p:nvPr>
+            <p:ph type="body" idx="3" sz="quarter"/>
+          </p:nvPr>
+        </p:nvSpPr>
+        <p:spPr/>
+        <p:txBody>
+          <a:bodyPr/>
+          <a:lstStyle/>
+          <a:p>
+            <a:r>
+              <a:t>Talk through any answers the class found difficult.</a:t>
+            </a:r>
+          </a:p>
+        </p:txBody>
+      </p:sp>
+      <p:sp>
+        <p:nvSpPr>
+          <p:cNvPr id="4" name="Slide Number Placeholder 3"/>
+          <p:cNvSpPr>
+            <a:spLocks noGrp="1"/>
+          </p:cNvSpPr>
+          <p:nvPr>
+            <p:ph type="sldNum" idx="5" sz="quarter"/>
+          </p:nvPr>
+        </p:nvSpPr>
+        <p:spPr/>
+      </p:sp>
+    </p:spTree>
+  </p:cSld>
+  <p:clrMapOvr>
+    <a:masterClrMapping/>
+  </p:clrMapOvr>
+</p:notes>
+</file>
+
+<file path=ppt/notesSlides/notesSlide9.xml><?xml version="1.0" encoding="utf-8"?>
 <p:notes xmlns:a="http://schemas.openxmlformats.org/drawingml/2006/main" xmlns:p="http://schemas.openxmlformats.org/presentationml/2006/main" xmlns:r="http://schemas.openxmlformats.org/officeDocument/2006/relationships">
   <p:cSld>
     <p:spTree>
@@ -4122,6 +4470,4549 @@
     <p:bg>
       <p:bgPr>
         <a:solidFill>
+          <a:srgbClr val="FFFFFF"/>
+        </a:solidFill>
+        <a:effectLst/>
+      </p:bgPr>
+    </p:bg>
+    <p:spTree>
+      <p:nvGrpSpPr>
+        <p:cNvPr id="1" name=""/>
+        <p:cNvGrpSpPr/>
+        <p:nvPr/>
+      </p:nvGrpSpPr>
+      <p:grpSpPr/>
+      <p:sp>
+        <p:nvSpPr>
+          <p:cNvPr id="2" name="TextBox 1"/>
+          <p:cNvSpPr txBox="1"/>
+          <p:nvPr/>
+        </p:nvSpPr>
+        <p:spPr>
+          <a:xfrm>
+            <a:off x="548640" y="320040"/>
+            <a:ext cx="11094415" cy="274320"/>
+          </a:xfrm>
+          <a:prstGeom prst="rect">
+            <a:avLst/>
+          </a:prstGeom>
+          <a:noFill/>
+        </p:spPr>
+        <p:txBody>
+          <a:bodyPr wrap="square" anchor="t" lIns="0" rIns="0" tIns="0" bIns="0"/>
+          <a:lstStyle/>
+          <a:p>
+            <a:pPr algn="l"/>
+            <a:r>
+              <a:rPr sz="1100" b="1" i="0">
+                <a:solidFill>
+                  <a:srgbClr val="54595D"/>
+                </a:solidFill>
+                <a:latin typeface="Calibri"/>
+              </a:rPr>
+              <a:t>NETWORK CABLING  ·  Network Cabling Content Area 2</a:t>
+            </a:r>
+          </a:p>
+        </p:txBody>
+      </p:sp>
+      <p:sp>
+        <p:nvSpPr>
+          <p:cNvPr id="3" name="TextBox 2"/>
+          <p:cNvSpPr txBox="1"/>
+          <p:nvPr/>
+        </p:nvSpPr>
+        <p:spPr>
+          <a:xfrm>
+            <a:off x="548640" y="566928"/>
+            <a:ext cx="11094415" cy="822960"/>
+          </a:xfrm>
+          <a:prstGeom prst="rect">
+            <a:avLst/>
+          </a:prstGeom>
+          <a:noFill/>
+        </p:spPr>
+        <p:txBody>
+          <a:bodyPr wrap="square" anchor="ctr" lIns="0" rIns="0" tIns="0" bIns="0"/>
+          <a:lstStyle/>
+          <a:p>
+            <a:pPr algn="l"/>
+            <a:r>
+              <a:rPr sz="3200" b="1" i="0">
+                <a:solidFill>
+                  <a:srgbClr val="03306E"/>
+                </a:solidFill>
+                <a:latin typeface="Cambria"/>
+              </a:rPr>
+              <a:t>Attenuation: losing signal over distance</a:t>
+            </a:r>
+          </a:p>
+        </p:txBody>
+      </p:sp>
+      <p:sp>
+        <p:nvSpPr>
+          <p:cNvPr id="4" name="TextBox 3"/>
+          <p:cNvSpPr txBox="1"/>
+          <p:nvPr/>
+        </p:nvSpPr>
+        <p:spPr>
+          <a:xfrm>
+            <a:off x="548640" y="6446520"/>
+            <a:ext cx="8229600" cy="274320"/>
+          </a:xfrm>
+          <a:prstGeom prst="rect">
+            <a:avLst/>
+          </a:prstGeom>
+          <a:noFill/>
+        </p:spPr>
+        <p:txBody>
+          <a:bodyPr wrap="square" anchor="t" lIns="0" rIns="0" tIns="0" bIns="0"/>
+          <a:lstStyle/>
+          <a:p>
+            <a:pPr algn="l"/>
+            <a:r>
+              <a:rPr sz="1000" b="0" i="0">
+                <a:solidFill>
+                  <a:srgbClr val="54595D"/>
+                </a:solidFill>
+                <a:latin typeface="Calibri"/>
+              </a:rPr>
+              <a:t>Digital Support and Security T Level  ·  Signal Theory and Data Transmission</a:t>
+            </a:r>
+          </a:p>
+        </p:txBody>
+      </p:sp>
+      <p:sp>
+        <p:nvSpPr>
+          <p:cNvPr id="5" name="TextBox 4"/>
+          <p:cNvSpPr txBox="1"/>
+          <p:nvPr/>
+        </p:nvSpPr>
+        <p:spPr>
+          <a:xfrm>
+            <a:off x="10728655" y="6446520"/>
+            <a:ext cx="914400" cy="274320"/>
+          </a:xfrm>
+          <a:prstGeom prst="rect">
+            <a:avLst/>
+          </a:prstGeom>
+          <a:noFill/>
+        </p:spPr>
+        <p:txBody>
+          <a:bodyPr wrap="square" anchor="t" lIns="0" rIns="0" tIns="0" bIns="0"/>
+          <a:lstStyle/>
+          <a:p>
+            <a:pPr algn="r"/>
+            <a:r>
+              <a:rPr sz="1000" b="0" i="0">
+                <a:solidFill>
+                  <a:srgbClr val="54595D"/>
+                </a:solidFill>
+                <a:latin typeface="Calibri"/>
+              </a:rPr>
+              <a:t>10</a:t>
+            </a:r>
+          </a:p>
+        </p:txBody>
+      </p:sp>
+      <p:sp>
+        <p:nvSpPr>
+          <p:cNvPr id="6" name="Rounded Rectangle 5"/>
+          <p:cNvSpPr/>
+          <p:nvPr/>
+        </p:nvSpPr>
+        <p:spPr>
+          <a:xfrm>
+            <a:off x="548640" y="1600200"/>
+            <a:ext cx="5410047" cy="2148840"/>
+          </a:xfrm>
+          <a:prstGeom prst="roundRect">
+            <a:avLst>
+              <a:gd name="adj" fmla="val 6000"/>
+            </a:avLst>
+          </a:prstGeom>
+          <a:solidFill>
+            <a:srgbClr val="EAF3FF"/>
+          </a:solidFill>
+          <a:ln>
+            <a:noFill/>
+          </a:ln>
+          <a:effectLst/>
+        </p:spPr>
+        <p:style>
+          <a:lnRef idx="1">
+            <a:schemeClr val="accent1"/>
+          </a:lnRef>
+          <a:fillRef idx="3">
+            <a:schemeClr val="accent1"/>
+          </a:fillRef>
+          <a:effectRef idx="2">
+            <a:schemeClr val="accent1"/>
+          </a:effectRef>
+          <a:fontRef idx="minor">
+            <a:schemeClr val="lt1"/>
+          </a:fontRef>
+        </p:style>
+        <p:txBody>
+          <a:bodyPr rtlCol="0" anchor="ctr"/>
+          <a:lstStyle/>
+          <a:p/>
+        </p:txBody>
+      </p:sp>
+      <p:sp>
+        <p:nvSpPr>
+          <p:cNvPr id="7" name="Oval 6"/>
+          <p:cNvSpPr/>
+          <p:nvPr/>
+        </p:nvSpPr>
+        <p:spPr>
+          <a:xfrm>
+            <a:off x="777240" y="1828800"/>
+            <a:ext cx="457200" cy="457200"/>
+          </a:xfrm>
+          <a:prstGeom prst="ellipse">
+            <a:avLst/>
+          </a:prstGeom>
+          <a:solidFill>
+            <a:srgbClr val="F2B705"/>
+          </a:solidFill>
+          <a:ln>
+            <a:noFill/>
+          </a:ln>
+          <a:effectLst/>
+        </p:spPr>
+        <p:style>
+          <a:lnRef idx="1">
+            <a:schemeClr val="accent1"/>
+          </a:lnRef>
+          <a:fillRef idx="3">
+            <a:schemeClr val="accent1"/>
+          </a:fillRef>
+          <a:effectRef idx="2">
+            <a:schemeClr val="accent1"/>
+          </a:effectRef>
+          <a:fontRef idx="minor">
+            <a:schemeClr val="lt1"/>
+          </a:fontRef>
+        </p:style>
+        <p:txBody>
+          <a:bodyPr rtlCol="0" anchor="ctr" lIns="0" rIns="0" tIns="0" bIns="0"/>
+          <a:lstStyle/>
+          <a:p>
+            <a:pPr algn="ctr"/>
+            <a:r>
+              <a:rPr sz="1500" b="1">
+                <a:solidFill>
+                  <a:srgbClr val="202122"/>
+                </a:solidFill>
+                <a:latin typeface="Calibri"/>
+              </a:rPr>
+              <a:t>1</a:t>
+            </a:r>
+          </a:p>
+        </p:txBody>
+      </p:sp>
+      <p:sp>
+        <p:nvSpPr>
+          <p:cNvPr id="8" name="TextBox 7"/>
+          <p:cNvSpPr txBox="1"/>
+          <p:nvPr/>
+        </p:nvSpPr>
+        <p:spPr>
+          <a:xfrm>
+            <a:off x="1371600" y="1801368"/>
+            <a:ext cx="4404207" cy="512064"/>
+          </a:xfrm>
+          <a:prstGeom prst="rect">
+            <a:avLst/>
+          </a:prstGeom>
+          <a:noFill/>
+        </p:spPr>
+        <p:txBody>
+          <a:bodyPr wrap="square" anchor="ctr" lIns="0" rIns="0" tIns="0" bIns="0"/>
+          <a:lstStyle/>
+          <a:p>
+            <a:pPr algn="l"/>
+            <a:r>
+              <a:rPr sz="1900" b="1" i="0">
+                <a:solidFill>
+                  <a:srgbClr val="03306E"/>
+                </a:solidFill>
+                <a:latin typeface="Calibri"/>
+              </a:rPr>
+              <a:t>Measured in dB</a:t>
+            </a:r>
+          </a:p>
+        </p:txBody>
+      </p:sp>
+      <p:sp>
+        <p:nvSpPr>
+          <p:cNvPr id="9" name="TextBox 8"/>
+          <p:cNvSpPr txBox="1"/>
+          <p:nvPr/>
+        </p:nvSpPr>
+        <p:spPr>
+          <a:xfrm>
+            <a:off x="777240" y="2468880"/>
+            <a:ext cx="4952847" cy="1143000"/>
+          </a:xfrm>
+          <a:prstGeom prst="rect">
+            <a:avLst/>
+          </a:prstGeom>
+          <a:noFill/>
+        </p:spPr>
+        <p:txBody>
+          <a:bodyPr wrap="square" anchor="t" lIns="0" rIns="0" tIns="0" bIns="0"/>
+          <a:lstStyle/>
+          <a:p>
+            <a:pPr algn="l"/>
+            <a:r>
+              <a:rPr sz="2000" b="0" i="0">
+                <a:solidFill>
+                  <a:srgbClr val="202122"/>
+                </a:solidFill>
+                <a:latin typeface="Calibri"/>
+              </a:rPr>
+              <a:t>Loss of signal strength along the cable.</a:t>
+            </a:r>
+          </a:p>
+        </p:txBody>
+      </p:sp>
+      <p:sp>
+        <p:nvSpPr>
+          <p:cNvPr id="10" name="Rounded Rectangle 9"/>
+          <p:cNvSpPr/>
+          <p:nvPr/>
+        </p:nvSpPr>
+        <p:spPr>
+          <a:xfrm>
+            <a:off x="6233007" y="1600200"/>
+            <a:ext cx="5410047" cy="2148840"/>
+          </a:xfrm>
+          <a:prstGeom prst="roundRect">
+            <a:avLst>
+              <a:gd name="adj" fmla="val 6000"/>
+            </a:avLst>
+          </a:prstGeom>
+          <a:solidFill>
+            <a:srgbClr val="EAF3FF"/>
+          </a:solidFill>
+          <a:ln>
+            <a:noFill/>
+          </a:ln>
+          <a:effectLst/>
+        </p:spPr>
+        <p:style>
+          <a:lnRef idx="1">
+            <a:schemeClr val="accent1"/>
+          </a:lnRef>
+          <a:fillRef idx="3">
+            <a:schemeClr val="accent1"/>
+          </a:fillRef>
+          <a:effectRef idx="2">
+            <a:schemeClr val="accent1"/>
+          </a:effectRef>
+          <a:fontRef idx="minor">
+            <a:schemeClr val="lt1"/>
+          </a:fontRef>
+        </p:style>
+        <p:txBody>
+          <a:bodyPr rtlCol="0" anchor="ctr"/>
+          <a:lstStyle/>
+          <a:p/>
+        </p:txBody>
+      </p:sp>
+      <p:sp>
+        <p:nvSpPr>
+          <p:cNvPr id="11" name="Oval 10"/>
+          <p:cNvSpPr/>
+          <p:nvPr/>
+        </p:nvSpPr>
+        <p:spPr>
+          <a:xfrm>
+            <a:off x="6461607" y="1828800"/>
+            <a:ext cx="457200" cy="457200"/>
+          </a:xfrm>
+          <a:prstGeom prst="ellipse">
+            <a:avLst/>
+          </a:prstGeom>
+          <a:solidFill>
+            <a:srgbClr val="F2B705"/>
+          </a:solidFill>
+          <a:ln>
+            <a:noFill/>
+          </a:ln>
+          <a:effectLst/>
+        </p:spPr>
+        <p:style>
+          <a:lnRef idx="1">
+            <a:schemeClr val="accent1"/>
+          </a:lnRef>
+          <a:fillRef idx="3">
+            <a:schemeClr val="accent1"/>
+          </a:fillRef>
+          <a:effectRef idx="2">
+            <a:schemeClr val="accent1"/>
+          </a:effectRef>
+          <a:fontRef idx="minor">
+            <a:schemeClr val="lt1"/>
+          </a:fontRef>
+        </p:style>
+        <p:txBody>
+          <a:bodyPr rtlCol="0" anchor="ctr" lIns="0" rIns="0" tIns="0" bIns="0"/>
+          <a:lstStyle/>
+          <a:p>
+            <a:pPr algn="ctr"/>
+            <a:r>
+              <a:rPr sz="1500" b="1">
+                <a:solidFill>
+                  <a:srgbClr val="202122"/>
+                </a:solidFill>
+                <a:latin typeface="Calibri"/>
+              </a:rPr>
+              <a:t>2</a:t>
+            </a:r>
+          </a:p>
+        </p:txBody>
+      </p:sp>
+      <p:sp>
+        <p:nvSpPr>
+          <p:cNvPr id="12" name="TextBox 11"/>
+          <p:cNvSpPr txBox="1"/>
+          <p:nvPr/>
+        </p:nvSpPr>
+        <p:spPr>
+          <a:xfrm>
+            <a:off x="7055967" y="1801368"/>
+            <a:ext cx="4404207" cy="512064"/>
+          </a:xfrm>
+          <a:prstGeom prst="rect">
+            <a:avLst/>
+          </a:prstGeom>
+          <a:noFill/>
+        </p:spPr>
+        <p:txBody>
+          <a:bodyPr wrap="square" anchor="ctr" lIns="0" rIns="0" tIns="0" bIns="0"/>
+          <a:lstStyle/>
+          <a:p>
+            <a:pPr algn="l"/>
+            <a:r>
+              <a:rPr sz="1900" b="1" i="0">
+                <a:solidFill>
+                  <a:srgbClr val="03306E"/>
+                </a:solidFill>
+                <a:latin typeface="Calibri"/>
+              </a:rPr>
+              <a:t>Absorption</a:t>
+            </a:r>
+          </a:p>
+        </p:txBody>
+      </p:sp>
+      <p:sp>
+        <p:nvSpPr>
+          <p:cNvPr id="13" name="TextBox 12"/>
+          <p:cNvSpPr txBox="1"/>
+          <p:nvPr/>
+        </p:nvSpPr>
+        <p:spPr>
+          <a:xfrm>
+            <a:off x="6461607" y="2468880"/>
+            <a:ext cx="4952847" cy="1143000"/>
+          </a:xfrm>
+          <a:prstGeom prst="rect">
+            <a:avLst/>
+          </a:prstGeom>
+          <a:noFill/>
+        </p:spPr>
+        <p:txBody>
+          <a:bodyPr wrap="square" anchor="t" lIns="0" rIns="0" tIns="0" bIns="0"/>
+          <a:lstStyle/>
+          <a:p>
+            <a:pPr algn="l"/>
+            <a:r>
+              <a:rPr sz="2000" b="0" i="0">
+                <a:solidFill>
+                  <a:srgbClr val="202122"/>
+                </a:solidFill>
+                <a:latin typeface="Calibri"/>
+              </a:rPr>
+              <a:t>Light absorbed by particles in the glass; worse over distance.</a:t>
+            </a:r>
+          </a:p>
+        </p:txBody>
+      </p:sp>
+      <p:sp>
+        <p:nvSpPr>
+          <p:cNvPr id="14" name="Rounded Rectangle 13"/>
+          <p:cNvSpPr/>
+          <p:nvPr/>
+        </p:nvSpPr>
+        <p:spPr>
+          <a:xfrm>
+            <a:off x="548640" y="4023360"/>
+            <a:ext cx="5410047" cy="2148840"/>
+          </a:xfrm>
+          <a:prstGeom prst="roundRect">
+            <a:avLst>
+              <a:gd name="adj" fmla="val 6000"/>
+            </a:avLst>
+          </a:prstGeom>
+          <a:solidFill>
+            <a:srgbClr val="EAF3FF"/>
+          </a:solidFill>
+          <a:ln>
+            <a:noFill/>
+          </a:ln>
+          <a:effectLst/>
+        </p:spPr>
+        <p:style>
+          <a:lnRef idx="1">
+            <a:schemeClr val="accent1"/>
+          </a:lnRef>
+          <a:fillRef idx="3">
+            <a:schemeClr val="accent1"/>
+          </a:fillRef>
+          <a:effectRef idx="2">
+            <a:schemeClr val="accent1"/>
+          </a:effectRef>
+          <a:fontRef idx="minor">
+            <a:schemeClr val="lt1"/>
+          </a:fontRef>
+        </p:style>
+        <p:txBody>
+          <a:bodyPr rtlCol="0" anchor="ctr"/>
+          <a:lstStyle/>
+          <a:p/>
+        </p:txBody>
+      </p:sp>
+      <p:sp>
+        <p:nvSpPr>
+          <p:cNvPr id="15" name="Oval 14"/>
+          <p:cNvSpPr/>
+          <p:nvPr/>
+        </p:nvSpPr>
+        <p:spPr>
+          <a:xfrm>
+            <a:off x="777240" y="4251960"/>
+            <a:ext cx="457200" cy="457200"/>
+          </a:xfrm>
+          <a:prstGeom prst="ellipse">
+            <a:avLst/>
+          </a:prstGeom>
+          <a:solidFill>
+            <a:srgbClr val="F2B705"/>
+          </a:solidFill>
+          <a:ln>
+            <a:noFill/>
+          </a:ln>
+          <a:effectLst/>
+        </p:spPr>
+        <p:style>
+          <a:lnRef idx="1">
+            <a:schemeClr val="accent1"/>
+          </a:lnRef>
+          <a:fillRef idx="3">
+            <a:schemeClr val="accent1"/>
+          </a:fillRef>
+          <a:effectRef idx="2">
+            <a:schemeClr val="accent1"/>
+          </a:effectRef>
+          <a:fontRef idx="minor">
+            <a:schemeClr val="lt1"/>
+          </a:fontRef>
+        </p:style>
+        <p:txBody>
+          <a:bodyPr rtlCol="0" anchor="ctr" lIns="0" rIns="0" tIns="0" bIns="0"/>
+          <a:lstStyle/>
+          <a:p>
+            <a:pPr algn="ctr"/>
+            <a:r>
+              <a:rPr sz="1500" b="1">
+                <a:solidFill>
+                  <a:srgbClr val="202122"/>
+                </a:solidFill>
+                <a:latin typeface="Calibri"/>
+              </a:rPr>
+              <a:t>3</a:t>
+            </a:r>
+          </a:p>
+        </p:txBody>
+      </p:sp>
+      <p:sp>
+        <p:nvSpPr>
+          <p:cNvPr id="16" name="TextBox 15"/>
+          <p:cNvSpPr txBox="1"/>
+          <p:nvPr/>
+        </p:nvSpPr>
+        <p:spPr>
+          <a:xfrm>
+            <a:off x="1371600" y="4224528"/>
+            <a:ext cx="4404207" cy="512064"/>
+          </a:xfrm>
+          <a:prstGeom prst="rect">
+            <a:avLst/>
+          </a:prstGeom>
+          <a:noFill/>
+        </p:spPr>
+        <p:txBody>
+          <a:bodyPr wrap="square" anchor="ctr" lIns="0" rIns="0" tIns="0" bIns="0"/>
+          <a:lstStyle/>
+          <a:p>
+            <a:pPr algn="l"/>
+            <a:r>
+              <a:rPr sz="1900" b="1" i="0">
+                <a:solidFill>
+                  <a:srgbClr val="03306E"/>
+                </a:solidFill>
+                <a:latin typeface="Calibri"/>
+              </a:rPr>
+              <a:t>Scattering</a:t>
+            </a:r>
+          </a:p>
+        </p:txBody>
+      </p:sp>
+      <p:sp>
+        <p:nvSpPr>
+          <p:cNvPr id="17" name="TextBox 16"/>
+          <p:cNvSpPr txBox="1"/>
+          <p:nvPr/>
+        </p:nvSpPr>
+        <p:spPr>
+          <a:xfrm>
+            <a:off x="777240" y="4892040"/>
+            <a:ext cx="4952847" cy="1143000"/>
+          </a:xfrm>
+          <a:prstGeom prst="rect">
+            <a:avLst/>
+          </a:prstGeom>
+          <a:noFill/>
+        </p:spPr>
+        <p:txBody>
+          <a:bodyPr wrap="square" anchor="t" lIns="0" rIns="0" tIns="0" bIns="0"/>
+          <a:lstStyle/>
+          <a:p>
+            <a:pPr algn="l"/>
+            <a:r>
+              <a:rPr sz="2000" b="0" i="0">
+                <a:solidFill>
+                  <a:srgbClr val="202122"/>
+                </a:solidFill>
+                <a:latin typeface="Calibri"/>
+              </a:rPr>
+              <a:t>Light hits particles and is lost into the cladding.</a:t>
+            </a:r>
+          </a:p>
+        </p:txBody>
+      </p:sp>
+      <p:sp>
+        <p:nvSpPr>
+          <p:cNvPr id="18" name="Rounded Rectangle 17"/>
+          <p:cNvSpPr/>
+          <p:nvPr/>
+        </p:nvSpPr>
+        <p:spPr>
+          <a:xfrm>
+            <a:off x="6233007" y="4023360"/>
+            <a:ext cx="5410047" cy="2148840"/>
+          </a:xfrm>
+          <a:prstGeom prst="roundRect">
+            <a:avLst>
+              <a:gd name="adj" fmla="val 6000"/>
+            </a:avLst>
+          </a:prstGeom>
+          <a:solidFill>
+            <a:srgbClr val="EAF3FF"/>
+          </a:solidFill>
+          <a:ln>
+            <a:noFill/>
+          </a:ln>
+          <a:effectLst/>
+        </p:spPr>
+        <p:style>
+          <a:lnRef idx="1">
+            <a:schemeClr val="accent1"/>
+          </a:lnRef>
+          <a:fillRef idx="3">
+            <a:schemeClr val="accent1"/>
+          </a:fillRef>
+          <a:effectRef idx="2">
+            <a:schemeClr val="accent1"/>
+          </a:effectRef>
+          <a:fontRef idx="minor">
+            <a:schemeClr val="lt1"/>
+          </a:fontRef>
+        </p:style>
+        <p:txBody>
+          <a:bodyPr rtlCol="0" anchor="ctr"/>
+          <a:lstStyle/>
+          <a:p/>
+        </p:txBody>
+      </p:sp>
+      <p:sp>
+        <p:nvSpPr>
+          <p:cNvPr id="19" name="Oval 18"/>
+          <p:cNvSpPr/>
+          <p:nvPr/>
+        </p:nvSpPr>
+        <p:spPr>
+          <a:xfrm>
+            <a:off x="6461607" y="4251960"/>
+            <a:ext cx="457200" cy="457200"/>
+          </a:xfrm>
+          <a:prstGeom prst="ellipse">
+            <a:avLst/>
+          </a:prstGeom>
+          <a:solidFill>
+            <a:srgbClr val="F2B705"/>
+          </a:solidFill>
+          <a:ln>
+            <a:noFill/>
+          </a:ln>
+          <a:effectLst/>
+        </p:spPr>
+        <p:style>
+          <a:lnRef idx="1">
+            <a:schemeClr val="accent1"/>
+          </a:lnRef>
+          <a:fillRef idx="3">
+            <a:schemeClr val="accent1"/>
+          </a:fillRef>
+          <a:effectRef idx="2">
+            <a:schemeClr val="accent1"/>
+          </a:effectRef>
+          <a:fontRef idx="minor">
+            <a:schemeClr val="lt1"/>
+          </a:fontRef>
+        </p:style>
+        <p:txBody>
+          <a:bodyPr rtlCol="0" anchor="ctr" lIns="0" rIns="0" tIns="0" bIns="0"/>
+          <a:lstStyle/>
+          <a:p>
+            <a:pPr algn="ctr"/>
+            <a:r>
+              <a:rPr sz="1500" b="1">
+                <a:solidFill>
+                  <a:srgbClr val="202122"/>
+                </a:solidFill>
+                <a:latin typeface="Calibri"/>
+              </a:rPr>
+              <a:t>4</a:t>
+            </a:r>
+          </a:p>
+        </p:txBody>
+      </p:sp>
+      <p:sp>
+        <p:nvSpPr>
+          <p:cNvPr id="20" name="TextBox 19"/>
+          <p:cNvSpPr txBox="1"/>
+          <p:nvPr/>
+        </p:nvSpPr>
+        <p:spPr>
+          <a:xfrm>
+            <a:off x="7055967" y="4224528"/>
+            <a:ext cx="4404207" cy="512064"/>
+          </a:xfrm>
+          <a:prstGeom prst="rect">
+            <a:avLst/>
+          </a:prstGeom>
+          <a:noFill/>
+        </p:spPr>
+        <p:txBody>
+          <a:bodyPr wrap="square" anchor="ctr" lIns="0" rIns="0" tIns="0" bIns="0"/>
+          <a:lstStyle/>
+          <a:p>
+            <a:pPr algn="l"/>
+            <a:r>
+              <a:rPr sz="1900" b="1" i="0">
+                <a:solidFill>
+                  <a:srgbClr val="03306E"/>
+                </a:solidFill>
+                <a:latin typeface="Calibri"/>
+              </a:rPr>
+              <a:t>Bending</a:t>
+            </a:r>
+          </a:p>
+        </p:txBody>
+      </p:sp>
+      <p:sp>
+        <p:nvSpPr>
+          <p:cNvPr id="21" name="TextBox 20"/>
+          <p:cNvSpPr txBox="1"/>
+          <p:nvPr/>
+        </p:nvSpPr>
+        <p:spPr>
+          <a:xfrm>
+            <a:off x="6461607" y="4892040"/>
+            <a:ext cx="4952847" cy="1143000"/>
+          </a:xfrm>
+          <a:prstGeom prst="rect">
+            <a:avLst/>
+          </a:prstGeom>
+          <a:noFill/>
+        </p:spPr>
+        <p:txBody>
+          <a:bodyPr wrap="square" anchor="t" lIns="0" rIns="0" tIns="0" bIns="0"/>
+          <a:lstStyle/>
+          <a:p>
+            <a:pPr algn="l"/>
+            <a:r>
+              <a:rPr sz="2000" b="0" i="0">
+                <a:solidFill>
+                  <a:srgbClr val="202122"/>
+                </a:solidFill>
+                <a:latin typeface="Calibri"/>
+              </a:rPr>
+              <a:t>Macrobends and microbends let light escape.</a:t>
+            </a:r>
+          </a:p>
+        </p:txBody>
+      </p:sp>
+    </p:spTree>
+  </p:cSld>
+  <p:clrMapOvr>
+    <a:masterClrMapping/>
+  </p:clrMapOvr>
+</p:sld>
+</file>
+
+<file path=ppt/slides/slide11.xml><?xml version="1.0" encoding="utf-8"?>
+<p:sld xmlns:a="http://schemas.openxmlformats.org/drawingml/2006/main" xmlns:p="http://schemas.openxmlformats.org/presentationml/2006/main" xmlns:r="http://schemas.openxmlformats.org/officeDocument/2006/relationships">
+  <p:cSld>
+    <p:bg>
+      <p:bgPr>
+        <a:solidFill>
+          <a:srgbClr val="FFFFFF"/>
+        </a:solidFill>
+        <a:effectLst/>
+      </p:bgPr>
+    </p:bg>
+    <p:spTree>
+      <p:nvGrpSpPr>
+        <p:cNvPr id="1" name=""/>
+        <p:cNvGrpSpPr/>
+        <p:nvPr/>
+      </p:nvGrpSpPr>
+      <p:grpSpPr/>
+      <p:sp>
+        <p:nvSpPr>
+          <p:cNvPr id="2" name="TextBox 1"/>
+          <p:cNvSpPr txBox="1"/>
+          <p:nvPr/>
+        </p:nvSpPr>
+        <p:spPr>
+          <a:xfrm>
+            <a:off x="548640" y="320040"/>
+            <a:ext cx="11094415" cy="274320"/>
+          </a:xfrm>
+          <a:prstGeom prst="rect">
+            <a:avLst/>
+          </a:prstGeom>
+          <a:noFill/>
+        </p:spPr>
+        <p:txBody>
+          <a:bodyPr wrap="square" anchor="t" lIns="0" rIns="0" tIns="0" bIns="0"/>
+          <a:lstStyle/>
+          <a:p>
+            <a:pPr algn="l"/>
+            <a:r>
+              <a:rPr sz="1100" b="1" i="0">
+                <a:solidFill>
+                  <a:srgbClr val="54595D"/>
+                </a:solidFill>
+                <a:latin typeface="Calibri"/>
+              </a:rPr>
+              <a:t>NETWORK CABLING  ·  Network Cabling Content Area 2</a:t>
+            </a:r>
+          </a:p>
+        </p:txBody>
+      </p:sp>
+      <p:sp>
+        <p:nvSpPr>
+          <p:cNvPr id="3" name="TextBox 2"/>
+          <p:cNvSpPr txBox="1"/>
+          <p:nvPr/>
+        </p:nvSpPr>
+        <p:spPr>
+          <a:xfrm>
+            <a:off x="548640" y="566928"/>
+            <a:ext cx="11094415" cy="822960"/>
+          </a:xfrm>
+          <a:prstGeom prst="rect">
+            <a:avLst/>
+          </a:prstGeom>
+          <a:noFill/>
+        </p:spPr>
+        <p:txBody>
+          <a:bodyPr wrap="square" anchor="ctr" lIns="0" rIns="0" tIns="0" bIns="0"/>
+          <a:lstStyle/>
+          <a:p>
+            <a:pPr algn="l"/>
+            <a:r>
+              <a:rPr sz="3100" b="1" i="0">
+                <a:solidFill>
+                  <a:srgbClr val="03306E"/>
+                </a:solidFill>
+                <a:latin typeface="Cambria"/>
+              </a:rPr>
+              <a:t>Quick check: Attenuation: losing signal over distance</a:t>
+            </a:r>
+          </a:p>
+        </p:txBody>
+      </p:sp>
+      <p:sp>
+        <p:nvSpPr>
+          <p:cNvPr id="4" name="TextBox 3"/>
+          <p:cNvSpPr txBox="1"/>
+          <p:nvPr/>
+        </p:nvSpPr>
+        <p:spPr>
+          <a:xfrm>
+            <a:off x="548640" y="6446520"/>
+            <a:ext cx="8229600" cy="274320"/>
+          </a:xfrm>
+          <a:prstGeom prst="rect">
+            <a:avLst/>
+          </a:prstGeom>
+          <a:noFill/>
+        </p:spPr>
+        <p:txBody>
+          <a:bodyPr wrap="square" anchor="t" lIns="0" rIns="0" tIns="0" bIns="0"/>
+          <a:lstStyle/>
+          <a:p>
+            <a:pPr algn="l"/>
+            <a:r>
+              <a:rPr sz="1000" b="0" i="0">
+                <a:solidFill>
+                  <a:srgbClr val="54595D"/>
+                </a:solidFill>
+                <a:latin typeface="Calibri"/>
+              </a:rPr>
+              <a:t>Digital Support and Security T Level  ·  Signal Theory and Data Transmission</a:t>
+            </a:r>
+          </a:p>
+        </p:txBody>
+      </p:sp>
+      <p:sp>
+        <p:nvSpPr>
+          <p:cNvPr id="5" name="TextBox 4"/>
+          <p:cNvSpPr txBox="1"/>
+          <p:nvPr/>
+        </p:nvSpPr>
+        <p:spPr>
+          <a:xfrm>
+            <a:off x="10728655" y="6446520"/>
+            <a:ext cx="914400" cy="274320"/>
+          </a:xfrm>
+          <a:prstGeom prst="rect">
+            <a:avLst/>
+          </a:prstGeom>
+          <a:noFill/>
+        </p:spPr>
+        <p:txBody>
+          <a:bodyPr wrap="square" anchor="t" lIns="0" rIns="0" tIns="0" bIns="0"/>
+          <a:lstStyle/>
+          <a:p>
+            <a:pPr algn="r"/>
+            <a:r>
+              <a:rPr sz="1000" b="0" i="0">
+                <a:solidFill>
+                  <a:srgbClr val="54595D"/>
+                </a:solidFill>
+                <a:latin typeface="Calibri"/>
+              </a:rPr>
+              <a:t>11</a:t>
+            </a:r>
+          </a:p>
+        </p:txBody>
+      </p:sp>
+      <p:sp>
+        <p:nvSpPr>
+          <p:cNvPr id="6" name="Oval 5"/>
+          <p:cNvSpPr/>
+          <p:nvPr/>
+        </p:nvSpPr>
+        <p:spPr>
+          <a:xfrm>
+            <a:off x="548640" y="1691640"/>
+            <a:ext cx="502920" cy="502920"/>
+          </a:xfrm>
+          <a:prstGeom prst="ellipse">
+            <a:avLst/>
+          </a:prstGeom>
+          <a:solidFill>
+            <a:srgbClr val="F2B705"/>
+          </a:solidFill>
+          <a:ln>
+            <a:noFill/>
+          </a:ln>
+          <a:effectLst/>
+        </p:spPr>
+        <p:style>
+          <a:lnRef idx="1">
+            <a:schemeClr val="accent1"/>
+          </a:lnRef>
+          <a:fillRef idx="3">
+            <a:schemeClr val="accent1"/>
+          </a:fillRef>
+          <a:effectRef idx="2">
+            <a:schemeClr val="accent1"/>
+          </a:effectRef>
+          <a:fontRef idx="minor">
+            <a:schemeClr val="lt1"/>
+          </a:fontRef>
+        </p:style>
+        <p:txBody>
+          <a:bodyPr rtlCol="0" anchor="ctr" lIns="0" rIns="0" tIns="0" bIns="0"/>
+          <a:lstStyle/>
+          <a:p>
+            <a:pPr algn="ctr"/>
+            <a:r>
+              <a:rPr sz="1600" b="1">
+                <a:solidFill>
+                  <a:srgbClr val="202122"/>
+                </a:solidFill>
+                <a:latin typeface="Calibri"/>
+              </a:rPr>
+              <a:t>1</a:t>
+            </a:r>
+          </a:p>
+        </p:txBody>
+      </p:sp>
+      <p:sp>
+        <p:nvSpPr>
+          <p:cNvPr id="7" name="TextBox 6"/>
+          <p:cNvSpPr txBox="1"/>
+          <p:nvPr/>
+        </p:nvSpPr>
+        <p:spPr>
+          <a:xfrm>
+            <a:off x="1371600" y="1645920"/>
+            <a:ext cx="10271455" cy="1188720"/>
+          </a:xfrm>
+          <a:prstGeom prst="rect">
+            <a:avLst/>
+          </a:prstGeom>
+          <a:noFill/>
+        </p:spPr>
+        <p:txBody>
+          <a:bodyPr wrap="square" anchor="t" lIns="0" rIns="0" tIns="0" bIns="0"/>
+          <a:lstStyle/>
+          <a:p>
+            <a:pPr algn="l"/>
+            <a:r>
+              <a:rPr sz="2400" b="0" i="0">
+                <a:solidFill>
+                  <a:srgbClr val="202122"/>
+                </a:solidFill>
+                <a:latin typeface="Calibri"/>
+              </a:rPr>
+              <a:t>What unit is attenuation measured in?</a:t>
+            </a:r>
+          </a:p>
+        </p:txBody>
+      </p:sp>
+      <p:sp>
+        <p:nvSpPr>
+          <p:cNvPr id="8" name="Oval 7"/>
+          <p:cNvSpPr/>
+          <p:nvPr/>
+        </p:nvSpPr>
+        <p:spPr>
+          <a:xfrm>
+            <a:off x="548640" y="3108960"/>
+            <a:ext cx="502920" cy="502920"/>
+          </a:xfrm>
+          <a:prstGeom prst="ellipse">
+            <a:avLst/>
+          </a:prstGeom>
+          <a:solidFill>
+            <a:srgbClr val="F2B705"/>
+          </a:solidFill>
+          <a:ln>
+            <a:noFill/>
+          </a:ln>
+          <a:effectLst/>
+        </p:spPr>
+        <p:style>
+          <a:lnRef idx="1">
+            <a:schemeClr val="accent1"/>
+          </a:lnRef>
+          <a:fillRef idx="3">
+            <a:schemeClr val="accent1"/>
+          </a:fillRef>
+          <a:effectRef idx="2">
+            <a:schemeClr val="accent1"/>
+          </a:effectRef>
+          <a:fontRef idx="minor">
+            <a:schemeClr val="lt1"/>
+          </a:fontRef>
+        </p:style>
+        <p:txBody>
+          <a:bodyPr rtlCol="0" anchor="ctr" lIns="0" rIns="0" tIns="0" bIns="0"/>
+          <a:lstStyle/>
+          <a:p>
+            <a:pPr algn="ctr"/>
+            <a:r>
+              <a:rPr sz="1600" b="1">
+                <a:solidFill>
+                  <a:srgbClr val="202122"/>
+                </a:solidFill>
+                <a:latin typeface="Calibri"/>
+              </a:rPr>
+              <a:t>2</a:t>
+            </a:r>
+          </a:p>
+        </p:txBody>
+      </p:sp>
+      <p:sp>
+        <p:nvSpPr>
+          <p:cNvPr id="9" name="TextBox 8"/>
+          <p:cNvSpPr txBox="1"/>
+          <p:nvPr/>
+        </p:nvSpPr>
+        <p:spPr>
+          <a:xfrm>
+            <a:off x="1371600" y="3063240"/>
+            <a:ext cx="10271455" cy="1188720"/>
+          </a:xfrm>
+          <a:prstGeom prst="rect">
+            <a:avLst/>
+          </a:prstGeom>
+          <a:noFill/>
+        </p:spPr>
+        <p:txBody>
+          <a:bodyPr wrap="square" anchor="t" lIns="0" rIns="0" tIns="0" bIns="0"/>
+          <a:lstStyle/>
+          <a:p>
+            <a:pPr algn="l"/>
+            <a:r>
+              <a:rPr sz="2400" b="0" i="0">
+                <a:solidFill>
+                  <a:srgbClr val="202122"/>
+                </a:solidFill>
+                <a:latin typeface="Calibri"/>
+              </a:rPr>
+              <a:t>Name two causes of attenuation in fibre.</a:t>
+            </a:r>
+          </a:p>
+        </p:txBody>
+      </p:sp>
+      <p:sp>
+        <p:nvSpPr>
+          <p:cNvPr id="10" name="Oval 9"/>
+          <p:cNvSpPr/>
+          <p:nvPr/>
+        </p:nvSpPr>
+        <p:spPr>
+          <a:xfrm>
+            <a:off x="548640" y="4526280"/>
+            <a:ext cx="502920" cy="502920"/>
+          </a:xfrm>
+          <a:prstGeom prst="ellipse">
+            <a:avLst/>
+          </a:prstGeom>
+          <a:solidFill>
+            <a:srgbClr val="F2B705"/>
+          </a:solidFill>
+          <a:ln>
+            <a:noFill/>
+          </a:ln>
+          <a:effectLst/>
+        </p:spPr>
+        <p:style>
+          <a:lnRef idx="1">
+            <a:schemeClr val="accent1"/>
+          </a:lnRef>
+          <a:fillRef idx="3">
+            <a:schemeClr val="accent1"/>
+          </a:fillRef>
+          <a:effectRef idx="2">
+            <a:schemeClr val="accent1"/>
+          </a:effectRef>
+          <a:fontRef idx="minor">
+            <a:schemeClr val="lt1"/>
+          </a:fontRef>
+        </p:style>
+        <p:txBody>
+          <a:bodyPr rtlCol="0" anchor="ctr" lIns="0" rIns="0" tIns="0" bIns="0"/>
+          <a:lstStyle/>
+          <a:p>
+            <a:pPr algn="ctr"/>
+            <a:r>
+              <a:rPr sz="1600" b="1">
+                <a:solidFill>
+                  <a:srgbClr val="202122"/>
+                </a:solidFill>
+                <a:latin typeface="Calibri"/>
+              </a:rPr>
+              <a:t>3</a:t>
+            </a:r>
+          </a:p>
+        </p:txBody>
+      </p:sp>
+      <p:sp>
+        <p:nvSpPr>
+          <p:cNvPr id="11" name="TextBox 10"/>
+          <p:cNvSpPr txBox="1"/>
+          <p:nvPr/>
+        </p:nvSpPr>
+        <p:spPr>
+          <a:xfrm>
+            <a:off x="1371600" y="4480560"/>
+            <a:ext cx="10271455" cy="1188720"/>
+          </a:xfrm>
+          <a:prstGeom prst="rect">
+            <a:avLst/>
+          </a:prstGeom>
+          <a:noFill/>
+        </p:spPr>
+        <p:txBody>
+          <a:bodyPr wrap="square" anchor="t" lIns="0" rIns="0" tIns="0" bIns="0"/>
+          <a:lstStyle/>
+          <a:p>
+            <a:pPr algn="l"/>
+            <a:r>
+              <a:rPr sz="2400" b="0" i="0">
+                <a:solidFill>
+                  <a:srgbClr val="202122"/>
+                </a:solidFill>
+                <a:latin typeface="Calibri"/>
+              </a:rPr>
+              <a:t>What should you do before connecting fibre?</a:t>
+            </a:r>
+          </a:p>
+        </p:txBody>
+      </p:sp>
+      <p:sp>
+        <p:nvSpPr>
+          <p:cNvPr id="12" name="TextBox 11"/>
+          <p:cNvSpPr txBox="1"/>
+          <p:nvPr/>
+        </p:nvSpPr>
+        <p:spPr>
+          <a:xfrm>
+            <a:off x="548640" y="5852160"/>
+            <a:ext cx="11094415" cy="365760"/>
+          </a:xfrm>
+          <a:prstGeom prst="rect">
+            <a:avLst/>
+          </a:prstGeom>
+          <a:noFill/>
+        </p:spPr>
+        <p:txBody>
+          <a:bodyPr wrap="square" anchor="t" lIns="0" rIns="0" tIns="0" bIns="0"/>
+          <a:lstStyle/>
+          <a:p>
+            <a:pPr algn="l"/>
+            <a:r>
+              <a:rPr sz="1300" b="0" i="1">
+                <a:solidFill>
+                  <a:srgbClr val="54595D"/>
+                </a:solidFill>
+                <a:latin typeface="Calibri"/>
+              </a:rPr>
+              <a:t>Answer on mini whiteboards or in your book. Answers are in the speaker notes.</a:t>
+            </a:r>
+          </a:p>
+        </p:txBody>
+      </p:sp>
+    </p:spTree>
+  </p:cSld>
+  <p:clrMapOvr>
+    <a:masterClrMapping/>
+  </p:clrMapOvr>
+</p:sld>
+</file>
+
+<file path=ppt/slides/slide12.xml><?xml version="1.0" encoding="utf-8"?>
+<p:sld xmlns:a="http://schemas.openxmlformats.org/drawingml/2006/main" xmlns:p="http://schemas.openxmlformats.org/presentationml/2006/main" xmlns:r="http://schemas.openxmlformats.org/officeDocument/2006/relationships">
+  <p:cSld>
+    <p:bg>
+      <p:bgPr>
+        <a:solidFill>
+          <a:srgbClr val="FFFFFF"/>
+        </a:solidFill>
+        <a:effectLst/>
+      </p:bgPr>
+    </p:bg>
+    <p:spTree>
+      <p:nvGrpSpPr>
+        <p:cNvPr id="1" name=""/>
+        <p:cNvGrpSpPr/>
+        <p:nvPr/>
+      </p:nvGrpSpPr>
+      <p:grpSpPr/>
+      <p:sp>
+        <p:nvSpPr>
+          <p:cNvPr id="2" name="TextBox 1"/>
+          <p:cNvSpPr txBox="1"/>
+          <p:nvPr/>
+        </p:nvSpPr>
+        <p:spPr>
+          <a:xfrm>
+            <a:off x="548640" y="320040"/>
+            <a:ext cx="11094415" cy="274320"/>
+          </a:xfrm>
+          <a:prstGeom prst="rect">
+            <a:avLst/>
+          </a:prstGeom>
+          <a:noFill/>
+        </p:spPr>
+        <p:txBody>
+          <a:bodyPr wrap="square" anchor="t" lIns="0" rIns="0" tIns="0" bIns="0"/>
+          <a:lstStyle/>
+          <a:p>
+            <a:pPr algn="l"/>
+            <a:r>
+              <a:rPr sz="1100" b="1" i="0">
+                <a:solidFill>
+                  <a:srgbClr val="54595D"/>
+                </a:solidFill>
+                <a:latin typeface="Calibri"/>
+              </a:rPr>
+              <a:t>NETWORK CABLING  ·  Network Cabling Content Area 2</a:t>
+            </a:r>
+          </a:p>
+        </p:txBody>
+      </p:sp>
+      <p:sp>
+        <p:nvSpPr>
+          <p:cNvPr id="3" name="TextBox 2"/>
+          <p:cNvSpPr txBox="1"/>
+          <p:nvPr/>
+        </p:nvSpPr>
+        <p:spPr>
+          <a:xfrm>
+            <a:off x="548640" y="566928"/>
+            <a:ext cx="11094415" cy="822960"/>
+          </a:xfrm>
+          <a:prstGeom prst="rect">
+            <a:avLst/>
+          </a:prstGeom>
+          <a:noFill/>
+        </p:spPr>
+        <p:txBody>
+          <a:bodyPr wrap="square" anchor="ctr" lIns="0" rIns="0" tIns="0" bIns="0"/>
+          <a:lstStyle/>
+          <a:p>
+            <a:pPr algn="l"/>
+            <a:r>
+              <a:rPr sz="3200" b="1" i="0">
+                <a:solidFill>
+                  <a:srgbClr val="03306E"/>
+                </a:solidFill>
+                <a:latin typeface="Cambria"/>
+              </a:rPr>
+              <a:t>Ohm's law and copper cabling</a:t>
+            </a:r>
+          </a:p>
+        </p:txBody>
+      </p:sp>
+      <p:sp>
+        <p:nvSpPr>
+          <p:cNvPr id="4" name="TextBox 3"/>
+          <p:cNvSpPr txBox="1"/>
+          <p:nvPr/>
+        </p:nvSpPr>
+        <p:spPr>
+          <a:xfrm>
+            <a:off x="548640" y="6446520"/>
+            <a:ext cx="8229600" cy="274320"/>
+          </a:xfrm>
+          <a:prstGeom prst="rect">
+            <a:avLst/>
+          </a:prstGeom>
+          <a:noFill/>
+        </p:spPr>
+        <p:txBody>
+          <a:bodyPr wrap="square" anchor="t" lIns="0" rIns="0" tIns="0" bIns="0"/>
+          <a:lstStyle/>
+          <a:p>
+            <a:pPr algn="l"/>
+            <a:r>
+              <a:rPr sz="1000" b="0" i="0">
+                <a:solidFill>
+                  <a:srgbClr val="54595D"/>
+                </a:solidFill>
+                <a:latin typeface="Calibri"/>
+              </a:rPr>
+              <a:t>Digital Support and Security T Level  ·  Signal Theory and Data Transmission</a:t>
+            </a:r>
+          </a:p>
+        </p:txBody>
+      </p:sp>
+      <p:sp>
+        <p:nvSpPr>
+          <p:cNvPr id="5" name="TextBox 4"/>
+          <p:cNvSpPr txBox="1"/>
+          <p:nvPr/>
+        </p:nvSpPr>
+        <p:spPr>
+          <a:xfrm>
+            <a:off x="10728655" y="6446520"/>
+            <a:ext cx="914400" cy="274320"/>
+          </a:xfrm>
+          <a:prstGeom prst="rect">
+            <a:avLst/>
+          </a:prstGeom>
+          <a:noFill/>
+        </p:spPr>
+        <p:txBody>
+          <a:bodyPr wrap="square" anchor="t" lIns="0" rIns="0" tIns="0" bIns="0"/>
+          <a:lstStyle/>
+          <a:p>
+            <a:pPr algn="r"/>
+            <a:r>
+              <a:rPr sz="1000" b="0" i="0">
+                <a:solidFill>
+                  <a:srgbClr val="54595D"/>
+                </a:solidFill>
+                <a:latin typeface="Calibri"/>
+              </a:rPr>
+              <a:t>12</a:t>
+            </a:r>
+          </a:p>
+        </p:txBody>
+      </p:sp>
+      <p:sp>
+        <p:nvSpPr>
+          <p:cNvPr id="6" name="TextBox 5"/>
+          <p:cNvSpPr txBox="1"/>
+          <p:nvPr/>
+        </p:nvSpPr>
+        <p:spPr>
+          <a:xfrm>
+            <a:off x="548640" y="1554480"/>
+            <a:ext cx="6720840" cy="4617720"/>
+          </a:xfrm>
+          <a:prstGeom prst="rect">
+            <a:avLst/>
+          </a:prstGeom>
+          <a:noFill/>
+        </p:spPr>
+        <p:txBody>
+          <a:bodyPr wrap="square" lIns="0" rIns="0" tIns="0" bIns="0">
+            <a:spAutoFit/>
+          </a:bodyPr>
+          <a:lstStyle/>
+          <a:p>
+            <a:pPr>
+              <a:spcAft>
+                <a:spcPts val="1320"/>
+              </a:spcAft>
+            </a:pPr>
+            <a:r>
+              <a:rPr sz="2200" b="0">
+                <a:solidFill>
+                  <a:srgbClr val="202122"/>
+                </a:solidFill>
+                <a:latin typeface="Calibri"/>
+              </a:rPr>
+              <a:t>Ohm's law links voltage (V), current (I) and resistance (R): V = I x R.</a:t>
+            </a:r>
+          </a:p>
+          <a:p>
+            <a:pPr>
+              <a:spcAft>
+                <a:spcPts val="1320"/>
+              </a:spcAft>
+            </a:pPr>
+            <a:r>
+              <a:rPr sz="2200" b="0">
+                <a:solidFill>
+                  <a:srgbClr val="202122"/>
+                </a:solidFill>
+                <a:latin typeface="Calibri"/>
+              </a:rPr>
+              <a:t>For a given voltage, more resistance means less current. In a cable, resistance increases with length, and effectively with signal frequency; thinner conductors also have higher resistance.</a:t>
+            </a:r>
+          </a:p>
+          <a:p>
+            <a:pPr>
+              <a:spcAft>
+                <a:spcPts val="1320"/>
+              </a:spcAft>
+            </a:pPr>
+            <a:r>
+              <a:rPr sz="2200" b="0">
+                <a:solidFill>
+                  <a:srgbClr val="202122"/>
+                </a:solidFill>
+                <a:latin typeface="Calibri"/>
+              </a:rPr>
+              <a:t>As a copper cable gets longer, the signal weakens until the receiver can't read it reliably. That's why copper Ethernet has a limit: 90 m for the permanent link plus up to 10 m of patch leads, 100 m in total.</a:t>
+            </a:r>
+          </a:p>
+        </p:txBody>
+      </p:sp>
+      <p:sp>
+        <p:nvSpPr>
+          <p:cNvPr id="7" name="Rounded Rectangle 6"/>
+          <p:cNvSpPr/>
+          <p:nvPr/>
+        </p:nvSpPr>
+        <p:spPr>
+          <a:xfrm>
+            <a:off x="7772400" y="1554480"/>
+            <a:ext cx="3867912" cy="4526280"/>
+          </a:xfrm>
+          <a:prstGeom prst="roundRect">
+            <a:avLst>
+              <a:gd name="adj" fmla="val 8000"/>
+            </a:avLst>
+          </a:prstGeom>
+          <a:solidFill>
+            <a:srgbClr val="03306E"/>
+          </a:solidFill>
+          <a:ln>
+            <a:noFill/>
+          </a:ln>
+          <a:effectLst/>
+        </p:spPr>
+        <p:style>
+          <a:lnRef idx="1">
+            <a:schemeClr val="accent1"/>
+          </a:lnRef>
+          <a:fillRef idx="3">
+            <a:schemeClr val="accent1"/>
+          </a:fillRef>
+          <a:effectRef idx="2">
+            <a:schemeClr val="accent1"/>
+          </a:effectRef>
+          <a:fontRef idx="minor">
+            <a:schemeClr val="lt1"/>
+          </a:fontRef>
+        </p:style>
+        <p:txBody>
+          <a:bodyPr rtlCol="0" anchor="ctr"/>
+          <a:lstStyle/>
+          <a:p/>
+        </p:txBody>
+      </p:sp>
+      <p:sp>
+        <p:nvSpPr>
+          <p:cNvPr id="8" name="Oval 7"/>
+          <p:cNvSpPr/>
+          <p:nvPr/>
+        </p:nvSpPr>
+        <p:spPr>
+          <a:xfrm>
+            <a:off x="8046720" y="1828800"/>
+            <a:ext cx="548640" cy="548640"/>
+          </a:xfrm>
+          <a:prstGeom prst="ellipse">
+            <a:avLst/>
+          </a:prstGeom>
+          <a:solidFill>
+            <a:srgbClr val="F2B705"/>
+          </a:solidFill>
+          <a:ln>
+            <a:noFill/>
+          </a:ln>
+          <a:effectLst/>
+        </p:spPr>
+        <p:style>
+          <a:lnRef idx="1">
+            <a:schemeClr val="accent1"/>
+          </a:lnRef>
+          <a:fillRef idx="3">
+            <a:schemeClr val="accent1"/>
+          </a:fillRef>
+          <a:effectRef idx="2">
+            <a:schemeClr val="accent1"/>
+          </a:effectRef>
+          <a:fontRef idx="minor">
+            <a:schemeClr val="lt1"/>
+          </a:fontRef>
+        </p:style>
+        <p:txBody>
+          <a:bodyPr rtlCol="0" anchor="ctr" lIns="0" rIns="0" tIns="0" bIns="0"/>
+          <a:lstStyle/>
+          <a:p>
+            <a:pPr algn="ctr"/>
+            <a:r>
+              <a:rPr sz="1300" b="1">
+                <a:solidFill>
+                  <a:srgbClr val="202122"/>
+                </a:solidFill>
+                <a:latin typeface="Calibri"/>
+              </a:rPr>
+              <a:t>e.g.</a:t>
+            </a:r>
+          </a:p>
+        </p:txBody>
+      </p:sp>
+      <p:sp>
+        <p:nvSpPr>
+          <p:cNvPr id="9" name="TextBox 8"/>
+          <p:cNvSpPr txBox="1"/>
+          <p:nvPr/>
+        </p:nvSpPr>
+        <p:spPr>
+          <a:xfrm>
+            <a:off x="8046720" y="2560320"/>
+            <a:ext cx="3291840" cy="365760"/>
+          </a:xfrm>
+          <a:prstGeom prst="rect">
+            <a:avLst/>
+          </a:prstGeom>
+          <a:noFill/>
+        </p:spPr>
+        <p:txBody>
+          <a:bodyPr wrap="square" anchor="t" lIns="0" rIns="0" tIns="0" bIns="0"/>
+          <a:lstStyle/>
+          <a:p>
+            <a:pPr algn="l"/>
+            <a:r>
+              <a:rPr sz="1300" b="1" i="0">
+                <a:solidFill>
+                  <a:srgbClr val="A9C8F0"/>
+                </a:solidFill>
+                <a:latin typeface="Calibri"/>
+              </a:rPr>
+              <a:t>EXAMPLE</a:t>
+            </a:r>
+          </a:p>
+        </p:txBody>
+      </p:sp>
+      <p:sp>
+        <p:nvSpPr>
+          <p:cNvPr id="10" name="TextBox 9"/>
+          <p:cNvSpPr txBox="1"/>
+          <p:nvPr/>
+        </p:nvSpPr>
+        <p:spPr>
+          <a:xfrm>
+            <a:off x="8046720" y="2971800"/>
+            <a:ext cx="3291840" cy="2971800"/>
+          </a:xfrm>
+          <a:prstGeom prst="rect">
+            <a:avLst/>
+          </a:prstGeom>
+          <a:noFill/>
+        </p:spPr>
+        <p:txBody>
+          <a:bodyPr wrap="square" anchor="t" lIns="0" rIns="0" tIns="0" bIns="0"/>
+          <a:lstStyle/>
+          <a:p>
+            <a:pPr algn="l"/>
+            <a:r>
+              <a:rPr sz="1900" b="0" i="0">
+                <a:solidFill>
+                  <a:srgbClr val="FFFFFF"/>
+                </a:solidFill>
+                <a:latin typeface="Cambria"/>
+              </a:rPr>
+              <a:t>12 V across 4 ohms gives 12 / 4 = 3 A. Double the resistance to 8 ohms and the current halves to 1.5 A.</a:t>
+            </a:r>
+          </a:p>
+        </p:txBody>
+      </p:sp>
+    </p:spTree>
+  </p:cSld>
+  <p:clrMapOvr>
+    <a:masterClrMapping/>
+  </p:clrMapOvr>
+</p:sld>
+</file>
+
+<file path=ppt/slides/slide13.xml><?xml version="1.0" encoding="utf-8"?>
+<p:sld xmlns:a="http://schemas.openxmlformats.org/drawingml/2006/main" xmlns:p="http://schemas.openxmlformats.org/presentationml/2006/main" xmlns:r="http://schemas.openxmlformats.org/officeDocument/2006/relationships">
+  <p:cSld>
+    <p:bg>
+      <p:bgPr>
+        <a:solidFill>
+          <a:srgbClr val="FFFFFF"/>
+        </a:solidFill>
+        <a:effectLst/>
+      </p:bgPr>
+    </p:bg>
+    <p:spTree>
+      <p:nvGrpSpPr>
+        <p:cNvPr id="1" name=""/>
+        <p:cNvGrpSpPr/>
+        <p:nvPr/>
+      </p:nvGrpSpPr>
+      <p:grpSpPr/>
+      <p:sp>
+        <p:nvSpPr>
+          <p:cNvPr id="2" name="TextBox 1"/>
+          <p:cNvSpPr txBox="1"/>
+          <p:nvPr/>
+        </p:nvSpPr>
+        <p:spPr>
+          <a:xfrm>
+            <a:off x="548640" y="320040"/>
+            <a:ext cx="11094415" cy="274320"/>
+          </a:xfrm>
+          <a:prstGeom prst="rect">
+            <a:avLst/>
+          </a:prstGeom>
+          <a:noFill/>
+        </p:spPr>
+        <p:txBody>
+          <a:bodyPr wrap="square" anchor="t" lIns="0" rIns="0" tIns="0" bIns="0"/>
+          <a:lstStyle/>
+          <a:p>
+            <a:pPr algn="l"/>
+            <a:r>
+              <a:rPr sz="1100" b="1" i="0">
+                <a:solidFill>
+                  <a:srgbClr val="54595D"/>
+                </a:solidFill>
+                <a:latin typeface="Calibri"/>
+              </a:rPr>
+              <a:t>NETWORK CABLING  ·  Network Cabling Content Area 2</a:t>
+            </a:r>
+          </a:p>
+        </p:txBody>
+      </p:sp>
+      <p:sp>
+        <p:nvSpPr>
+          <p:cNvPr id="3" name="TextBox 2"/>
+          <p:cNvSpPr txBox="1"/>
+          <p:nvPr/>
+        </p:nvSpPr>
+        <p:spPr>
+          <a:xfrm>
+            <a:off x="548640" y="566928"/>
+            <a:ext cx="11094415" cy="822960"/>
+          </a:xfrm>
+          <a:prstGeom prst="rect">
+            <a:avLst/>
+          </a:prstGeom>
+          <a:noFill/>
+        </p:spPr>
+        <p:txBody>
+          <a:bodyPr wrap="square" anchor="ctr" lIns="0" rIns="0" tIns="0" bIns="0"/>
+          <a:lstStyle/>
+          <a:p>
+            <a:pPr algn="l"/>
+            <a:r>
+              <a:rPr sz="3200" b="1" i="0">
+                <a:solidFill>
+                  <a:srgbClr val="03306E"/>
+                </a:solidFill>
+                <a:latin typeface="Cambria"/>
+              </a:rPr>
+              <a:t>Ohm's law and copper cabling</a:t>
+            </a:r>
+          </a:p>
+        </p:txBody>
+      </p:sp>
+      <p:sp>
+        <p:nvSpPr>
+          <p:cNvPr id="4" name="TextBox 3"/>
+          <p:cNvSpPr txBox="1"/>
+          <p:nvPr/>
+        </p:nvSpPr>
+        <p:spPr>
+          <a:xfrm>
+            <a:off x="548640" y="6446520"/>
+            <a:ext cx="8229600" cy="274320"/>
+          </a:xfrm>
+          <a:prstGeom prst="rect">
+            <a:avLst/>
+          </a:prstGeom>
+          <a:noFill/>
+        </p:spPr>
+        <p:txBody>
+          <a:bodyPr wrap="square" anchor="t" lIns="0" rIns="0" tIns="0" bIns="0"/>
+          <a:lstStyle/>
+          <a:p>
+            <a:pPr algn="l"/>
+            <a:r>
+              <a:rPr sz="1000" b="0" i="0">
+                <a:solidFill>
+                  <a:srgbClr val="54595D"/>
+                </a:solidFill>
+                <a:latin typeface="Calibri"/>
+              </a:rPr>
+              <a:t>Digital Support and Security T Level  ·  Signal Theory and Data Transmission</a:t>
+            </a:r>
+          </a:p>
+        </p:txBody>
+      </p:sp>
+      <p:sp>
+        <p:nvSpPr>
+          <p:cNvPr id="5" name="TextBox 4"/>
+          <p:cNvSpPr txBox="1"/>
+          <p:nvPr/>
+        </p:nvSpPr>
+        <p:spPr>
+          <a:xfrm>
+            <a:off x="10728655" y="6446520"/>
+            <a:ext cx="914400" cy="274320"/>
+          </a:xfrm>
+          <a:prstGeom prst="rect">
+            <a:avLst/>
+          </a:prstGeom>
+          <a:noFill/>
+        </p:spPr>
+        <p:txBody>
+          <a:bodyPr wrap="square" anchor="t" lIns="0" rIns="0" tIns="0" bIns="0"/>
+          <a:lstStyle/>
+          <a:p>
+            <a:pPr algn="r"/>
+            <a:r>
+              <a:rPr sz="1000" b="0" i="0">
+                <a:solidFill>
+                  <a:srgbClr val="54595D"/>
+                </a:solidFill>
+                <a:latin typeface="Calibri"/>
+              </a:rPr>
+              <a:t>13</a:t>
+            </a:r>
+          </a:p>
+        </p:txBody>
+      </p:sp>
+      <p:sp>
+        <p:nvSpPr>
+          <p:cNvPr id="6" name="TextBox 5"/>
+          <p:cNvSpPr txBox="1"/>
+          <p:nvPr/>
+        </p:nvSpPr>
+        <p:spPr>
+          <a:xfrm>
+            <a:off x="548640" y="1600200"/>
+            <a:ext cx="6675120" cy="4572000"/>
+          </a:xfrm>
+          <a:prstGeom prst="rect">
+            <a:avLst/>
+          </a:prstGeom>
+          <a:noFill/>
+        </p:spPr>
+        <p:txBody>
+          <a:bodyPr wrap="square" lIns="0" rIns="0" tIns="0" bIns="0">
+            <a:spAutoFit/>
+          </a:bodyPr>
+          <a:lstStyle/>
+          <a:p>
+            <a:pPr marL="274320" indent="-274320">
+              <a:spcAft>
+                <a:spcPts val="1080"/>
+              </a:spcAft>
+              <a:buClr>
+                <a:srgbClr val="0645AD"/>
+              </a:buClr>
+              <a:buFont typeface="Arial"/>
+              <a:buChar char="•"/>
+            </a:pPr>
+            <a:r>
+              <a:rPr sz="2400" b="1">
+                <a:solidFill>
+                  <a:srgbClr val="202122"/>
+                </a:solidFill>
+                <a:latin typeface="Calibri"/>
+              </a:rPr>
+              <a:t>V = I x R:</a:t>
+            </a:r>
+            <a:r>
+              <a:rPr sz="2400" b="0">
+                <a:solidFill>
+                  <a:srgbClr val="202122"/>
+                </a:solidFill>
+                <a:latin typeface="Calibri"/>
+              </a:rPr>
+              <a:t> voltage equals current times resistance.</a:t>
+            </a:r>
+          </a:p>
+          <a:p>
+            <a:pPr marL="274320" indent="-274320">
+              <a:spcAft>
+                <a:spcPts val="1080"/>
+              </a:spcAft>
+              <a:buClr>
+                <a:srgbClr val="0645AD"/>
+              </a:buClr>
+              <a:buFont typeface="Arial"/>
+              <a:buChar char="•"/>
+            </a:pPr>
+            <a:r>
+              <a:rPr sz="2400" b="0">
+                <a:solidFill>
+                  <a:srgbClr val="202122"/>
+                </a:solidFill>
+                <a:latin typeface="Calibri"/>
+              </a:rPr>
+              <a:t>More voltage gives more current.</a:t>
+            </a:r>
+          </a:p>
+          <a:p>
+            <a:pPr marL="274320" indent="-274320">
+              <a:spcAft>
+                <a:spcPts val="1080"/>
+              </a:spcAft>
+              <a:buClr>
+                <a:srgbClr val="0645AD"/>
+              </a:buClr>
+              <a:buFont typeface="Arial"/>
+              <a:buChar char="•"/>
+            </a:pPr>
+            <a:r>
+              <a:rPr sz="2400" b="0">
+                <a:solidFill>
+                  <a:srgbClr val="202122"/>
+                </a:solidFill>
+                <a:latin typeface="Calibri"/>
+              </a:rPr>
+              <a:t>More resistance gives less current.</a:t>
+            </a:r>
+          </a:p>
+          <a:p>
+            <a:pPr marL="274320" indent="-274320">
+              <a:spcAft>
+                <a:spcPts val="1080"/>
+              </a:spcAft>
+              <a:buClr>
+                <a:srgbClr val="0645AD"/>
+              </a:buClr>
+              <a:buFont typeface="Arial"/>
+              <a:buChar char="•"/>
+            </a:pPr>
+            <a:r>
+              <a:rPr sz="2400" b="0">
+                <a:solidFill>
+                  <a:srgbClr val="202122"/>
+                </a:solidFill>
+                <a:latin typeface="Calibri"/>
+              </a:rPr>
+              <a:t>Resistance rises with cable length, signal frequency and smaller cable size.</a:t>
+            </a:r>
+          </a:p>
+        </p:txBody>
+      </p:sp>
+      <p:sp>
+        <p:nvSpPr>
+          <p:cNvPr id="7" name="Rounded Rectangle 6"/>
+          <p:cNvSpPr/>
+          <p:nvPr/>
+        </p:nvSpPr>
+        <p:spPr>
+          <a:xfrm>
+            <a:off x="7772400" y="1600200"/>
+            <a:ext cx="3867912" cy="4434840"/>
+          </a:xfrm>
+          <a:prstGeom prst="roundRect">
+            <a:avLst>
+              <a:gd name="adj" fmla="val 8000"/>
+            </a:avLst>
+          </a:prstGeom>
+          <a:solidFill>
+            <a:srgbClr val="03306E"/>
+          </a:solidFill>
+          <a:ln>
+            <a:noFill/>
+          </a:ln>
+          <a:effectLst/>
+        </p:spPr>
+        <p:style>
+          <a:lnRef idx="1">
+            <a:schemeClr val="accent1"/>
+          </a:lnRef>
+          <a:fillRef idx="3">
+            <a:schemeClr val="accent1"/>
+          </a:fillRef>
+          <a:effectRef idx="2">
+            <a:schemeClr val="accent1"/>
+          </a:effectRef>
+          <a:fontRef idx="minor">
+            <a:schemeClr val="lt1"/>
+          </a:fontRef>
+        </p:style>
+        <p:txBody>
+          <a:bodyPr rtlCol="0" anchor="ctr"/>
+          <a:lstStyle/>
+          <a:p/>
+        </p:txBody>
+      </p:sp>
+      <p:sp>
+        <p:nvSpPr>
+          <p:cNvPr id="8" name="Oval 7"/>
+          <p:cNvSpPr/>
+          <p:nvPr/>
+        </p:nvSpPr>
+        <p:spPr>
+          <a:xfrm>
+            <a:off x="8046720" y="1874519"/>
+            <a:ext cx="548640" cy="548640"/>
+          </a:xfrm>
+          <a:prstGeom prst="ellipse">
+            <a:avLst/>
+          </a:prstGeom>
+          <a:solidFill>
+            <a:srgbClr val="F2B705"/>
+          </a:solidFill>
+          <a:ln>
+            <a:noFill/>
+          </a:ln>
+          <a:effectLst/>
+        </p:spPr>
+        <p:style>
+          <a:lnRef idx="1">
+            <a:schemeClr val="accent1"/>
+          </a:lnRef>
+          <a:fillRef idx="3">
+            <a:schemeClr val="accent1"/>
+          </a:fillRef>
+          <a:effectRef idx="2">
+            <a:schemeClr val="accent1"/>
+          </a:effectRef>
+          <a:fontRef idx="minor">
+            <a:schemeClr val="lt1"/>
+          </a:fontRef>
+        </p:style>
+        <p:txBody>
+          <a:bodyPr rtlCol="0" anchor="ctr" lIns="0" rIns="0" tIns="0" bIns="0"/>
+          <a:lstStyle/>
+          <a:p>
+            <a:pPr algn="ctr"/>
+            <a:r>
+              <a:rPr sz="2000" b="1">
+                <a:solidFill>
+                  <a:srgbClr val="202122"/>
+                </a:solidFill>
+                <a:latin typeface="Calibri"/>
+              </a:rPr>
+              <a:t>!</a:t>
+            </a:r>
+          </a:p>
+        </p:txBody>
+      </p:sp>
+      <p:sp>
+        <p:nvSpPr>
+          <p:cNvPr id="9" name="TextBox 8"/>
+          <p:cNvSpPr txBox="1"/>
+          <p:nvPr/>
+        </p:nvSpPr>
+        <p:spPr>
+          <a:xfrm>
+            <a:off x="8046720" y="2606040"/>
+            <a:ext cx="3291840" cy="365760"/>
+          </a:xfrm>
+          <a:prstGeom prst="rect">
+            <a:avLst/>
+          </a:prstGeom>
+          <a:noFill/>
+        </p:spPr>
+        <p:txBody>
+          <a:bodyPr wrap="square" anchor="t" lIns="0" rIns="0" tIns="0" bIns="0"/>
+          <a:lstStyle/>
+          <a:p>
+            <a:pPr algn="l"/>
+            <a:r>
+              <a:rPr sz="1300" b="1" i="0">
+                <a:solidFill>
+                  <a:srgbClr val="A9C8F0"/>
+                </a:solidFill>
+                <a:latin typeface="Calibri"/>
+              </a:rPr>
+              <a:t>KEY IDEA</a:t>
+            </a:r>
+          </a:p>
+        </p:txBody>
+      </p:sp>
+      <p:sp>
+        <p:nvSpPr>
+          <p:cNvPr id="10" name="TextBox 9"/>
+          <p:cNvSpPr txBox="1"/>
+          <p:nvPr/>
+        </p:nvSpPr>
+        <p:spPr>
+          <a:xfrm>
+            <a:off x="8046720" y="3017520"/>
+            <a:ext cx="3291840" cy="2926080"/>
+          </a:xfrm>
+          <a:prstGeom prst="rect">
+            <a:avLst/>
+          </a:prstGeom>
+          <a:noFill/>
+        </p:spPr>
+        <p:txBody>
+          <a:bodyPr wrap="square" anchor="t" lIns="0" rIns="0" tIns="0" bIns="0"/>
+          <a:lstStyle/>
+          <a:p>
+            <a:pPr algn="l"/>
+            <a:r>
+              <a:rPr sz="2200" b="0" i="0">
+                <a:solidFill>
+                  <a:srgbClr val="FFFFFF"/>
+                </a:solidFill>
+                <a:latin typeface="Cambria"/>
+              </a:rPr>
+              <a:t>Resistance is why copper has a maximum length: 90 m permanent link and 100 m total channel.</a:t>
+            </a:r>
+          </a:p>
+        </p:txBody>
+      </p:sp>
+    </p:spTree>
+  </p:cSld>
+  <p:clrMapOvr>
+    <a:masterClrMapping/>
+  </p:clrMapOvr>
+</p:sld>
+</file>
+
+<file path=ppt/slides/slide14.xml><?xml version="1.0" encoding="utf-8"?>
+<p:sld xmlns:a="http://schemas.openxmlformats.org/drawingml/2006/main" xmlns:p="http://schemas.openxmlformats.org/presentationml/2006/main" xmlns:r="http://schemas.openxmlformats.org/officeDocument/2006/relationships">
+  <p:cSld>
+    <p:bg>
+      <p:bgPr>
+        <a:solidFill>
+          <a:srgbClr val="FFFFFF"/>
+        </a:solidFill>
+        <a:effectLst/>
+      </p:bgPr>
+    </p:bg>
+    <p:spTree>
+      <p:nvGrpSpPr>
+        <p:cNvPr id="1" name=""/>
+        <p:cNvGrpSpPr/>
+        <p:nvPr/>
+      </p:nvGrpSpPr>
+      <p:grpSpPr/>
+      <p:sp>
+        <p:nvSpPr>
+          <p:cNvPr id="2" name="TextBox 1"/>
+          <p:cNvSpPr txBox="1"/>
+          <p:nvPr/>
+        </p:nvSpPr>
+        <p:spPr>
+          <a:xfrm>
+            <a:off x="548640" y="320040"/>
+            <a:ext cx="11094415" cy="274320"/>
+          </a:xfrm>
+          <a:prstGeom prst="rect">
+            <a:avLst/>
+          </a:prstGeom>
+          <a:noFill/>
+        </p:spPr>
+        <p:txBody>
+          <a:bodyPr wrap="square" anchor="t" lIns="0" rIns="0" tIns="0" bIns="0"/>
+          <a:lstStyle/>
+          <a:p>
+            <a:pPr algn="l"/>
+            <a:r>
+              <a:rPr sz="1100" b="1" i="0">
+                <a:solidFill>
+                  <a:srgbClr val="54595D"/>
+                </a:solidFill>
+                <a:latin typeface="Calibri"/>
+              </a:rPr>
+              <a:t>NETWORK CABLING  ·  Network Cabling Content Area 2</a:t>
+            </a:r>
+          </a:p>
+        </p:txBody>
+      </p:sp>
+      <p:sp>
+        <p:nvSpPr>
+          <p:cNvPr id="3" name="TextBox 2"/>
+          <p:cNvSpPr txBox="1"/>
+          <p:nvPr/>
+        </p:nvSpPr>
+        <p:spPr>
+          <a:xfrm>
+            <a:off x="548640" y="566928"/>
+            <a:ext cx="11094415" cy="822960"/>
+          </a:xfrm>
+          <a:prstGeom prst="rect">
+            <a:avLst/>
+          </a:prstGeom>
+          <a:noFill/>
+        </p:spPr>
+        <p:txBody>
+          <a:bodyPr wrap="square" anchor="ctr" lIns="0" rIns="0" tIns="0" bIns="0"/>
+          <a:lstStyle/>
+          <a:p>
+            <a:pPr algn="l"/>
+            <a:r>
+              <a:rPr sz="3200" b="1" i="0">
+                <a:solidFill>
+                  <a:srgbClr val="03306E"/>
+                </a:solidFill>
+                <a:latin typeface="Cambria"/>
+              </a:rPr>
+              <a:t>Quick check: Ohm's law and copper cabling</a:t>
+            </a:r>
+          </a:p>
+        </p:txBody>
+      </p:sp>
+      <p:sp>
+        <p:nvSpPr>
+          <p:cNvPr id="4" name="TextBox 3"/>
+          <p:cNvSpPr txBox="1"/>
+          <p:nvPr/>
+        </p:nvSpPr>
+        <p:spPr>
+          <a:xfrm>
+            <a:off x="548640" y="6446520"/>
+            <a:ext cx="8229600" cy="274320"/>
+          </a:xfrm>
+          <a:prstGeom prst="rect">
+            <a:avLst/>
+          </a:prstGeom>
+          <a:noFill/>
+        </p:spPr>
+        <p:txBody>
+          <a:bodyPr wrap="square" anchor="t" lIns="0" rIns="0" tIns="0" bIns="0"/>
+          <a:lstStyle/>
+          <a:p>
+            <a:pPr algn="l"/>
+            <a:r>
+              <a:rPr sz="1000" b="0" i="0">
+                <a:solidFill>
+                  <a:srgbClr val="54595D"/>
+                </a:solidFill>
+                <a:latin typeface="Calibri"/>
+              </a:rPr>
+              <a:t>Digital Support and Security T Level  ·  Signal Theory and Data Transmission</a:t>
+            </a:r>
+          </a:p>
+        </p:txBody>
+      </p:sp>
+      <p:sp>
+        <p:nvSpPr>
+          <p:cNvPr id="5" name="TextBox 4"/>
+          <p:cNvSpPr txBox="1"/>
+          <p:nvPr/>
+        </p:nvSpPr>
+        <p:spPr>
+          <a:xfrm>
+            <a:off x="10728655" y="6446520"/>
+            <a:ext cx="914400" cy="274320"/>
+          </a:xfrm>
+          <a:prstGeom prst="rect">
+            <a:avLst/>
+          </a:prstGeom>
+          <a:noFill/>
+        </p:spPr>
+        <p:txBody>
+          <a:bodyPr wrap="square" anchor="t" lIns="0" rIns="0" tIns="0" bIns="0"/>
+          <a:lstStyle/>
+          <a:p>
+            <a:pPr algn="r"/>
+            <a:r>
+              <a:rPr sz="1000" b="0" i="0">
+                <a:solidFill>
+                  <a:srgbClr val="54595D"/>
+                </a:solidFill>
+                <a:latin typeface="Calibri"/>
+              </a:rPr>
+              <a:t>14</a:t>
+            </a:r>
+          </a:p>
+        </p:txBody>
+      </p:sp>
+      <p:sp>
+        <p:nvSpPr>
+          <p:cNvPr id="6" name="Oval 5"/>
+          <p:cNvSpPr/>
+          <p:nvPr/>
+        </p:nvSpPr>
+        <p:spPr>
+          <a:xfrm>
+            <a:off x="548640" y="1691640"/>
+            <a:ext cx="502920" cy="502920"/>
+          </a:xfrm>
+          <a:prstGeom prst="ellipse">
+            <a:avLst/>
+          </a:prstGeom>
+          <a:solidFill>
+            <a:srgbClr val="F2B705"/>
+          </a:solidFill>
+          <a:ln>
+            <a:noFill/>
+          </a:ln>
+          <a:effectLst/>
+        </p:spPr>
+        <p:style>
+          <a:lnRef idx="1">
+            <a:schemeClr val="accent1"/>
+          </a:lnRef>
+          <a:fillRef idx="3">
+            <a:schemeClr val="accent1"/>
+          </a:fillRef>
+          <a:effectRef idx="2">
+            <a:schemeClr val="accent1"/>
+          </a:effectRef>
+          <a:fontRef idx="minor">
+            <a:schemeClr val="lt1"/>
+          </a:fontRef>
+        </p:style>
+        <p:txBody>
+          <a:bodyPr rtlCol="0" anchor="ctr" lIns="0" rIns="0" tIns="0" bIns="0"/>
+          <a:lstStyle/>
+          <a:p>
+            <a:pPr algn="ctr"/>
+            <a:r>
+              <a:rPr sz="1600" b="1">
+                <a:solidFill>
+                  <a:srgbClr val="202122"/>
+                </a:solidFill>
+                <a:latin typeface="Calibri"/>
+              </a:rPr>
+              <a:t>1</a:t>
+            </a:r>
+          </a:p>
+        </p:txBody>
+      </p:sp>
+      <p:sp>
+        <p:nvSpPr>
+          <p:cNvPr id="7" name="TextBox 6"/>
+          <p:cNvSpPr txBox="1"/>
+          <p:nvPr/>
+        </p:nvSpPr>
+        <p:spPr>
+          <a:xfrm>
+            <a:off x="1371600" y="1645920"/>
+            <a:ext cx="10271455" cy="1188720"/>
+          </a:xfrm>
+          <a:prstGeom prst="rect">
+            <a:avLst/>
+          </a:prstGeom>
+          <a:noFill/>
+        </p:spPr>
+        <p:txBody>
+          <a:bodyPr wrap="square" anchor="t" lIns="0" rIns="0" tIns="0" bIns="0"/>
+          <a:lstStyle/>
+          <a:p>
+            <a:pPr algn="l"/>
+            <a:r>
+              <a:rPr sz="2400" b="0" i="0">
+                <a:solidFill>
+                  <a:srgbClr val="202122"/>
+                </a:solidFill>
+                <a:latin typeface="Calibri"/>
+              </a:rPr>
+              <a:t>State Ohm's law.</a:t>
+            </a:r>
+          </a:p>
+        </p:txBody>
+      </p:sp>
+      <p:sp>
+        <p:nvSpPr>
+          <p:cNvPr id="8" name="Oval 7"/>
+          <p:cNvSpPr/>
+          <p:nvPr/>
+        </p:nvSpPr>
+        <p:spPr>
+          <a:xfrm>
+            <a:off x="548640" y="3108960"/>
+            <a:ext cx="502920" cy="502920"/>
+          </a:xfrm>
+          <a:prstGeom prst="ellipse">
+            <a:avLst/>
+          </a:prstGeom>
+          <a:solidFill>
+            <a:srgbClr val="F2B705"/>
+          </a:solidFill>
+          <a:ln>
+            <a:noFill/>
+          </a:ln>
+          <a:effectLst/>
+        </p:spPr>
+        <p:style>
+          <a:lnRef idx="1">
+            <a:schemeClr val="accent1"/>
+          </a:lnRef>
+          <a:fillRef idx="3">
+            <a:schemeClr val="accent1"/>
+          </a:fillRef>
+          <a:effectRef idx="2">
+            <a:schemeClr val="accent1"/>
+          </a:effectRef>
+          <a:fontRef idx="minor">
+            <a:schemeClr val="lt1"/>
+          </a:fontRef>
+        </p:style>
+        <p:txBody>
+          <a:bodyPr rtlCol="0" anchor="ctr" lIns="0" rIns="0" tIns="0" bIns="0"/>
+          <a:lstStyle/>
+          <a:p>
+            <a:pPr algn="ctr"/>
+            <a:r>
+              <a:rPr sz="1600" b="1">
+                <a:solidFill>
+                  <a:srgbClr val="202122"/>
+                </a:solidFill>
+                <a:latin typeface="Calibri"/>
+              </a:rPr>
+              <a:t>2</a:t>
+            </a:r>
+          </a:p>
+        </p:txBody>
+      </p:sp>
+      <p:sp>
+        <p:nvSpPr>
+          <p:cNvPr id="9" name="TextBox 8"/>
+          <p:cNvSpPr txBox="1"/>
+          <p:nvPr/>
+        </p:nvSpPr>
+        <p:spPr>
+          <a:xfrm>
+            <a:off x="1371600" y="3063240"/>
+            <a:ext cx="10271455" cy="1188720"/>
+          </a:xfrm>
+          <a:prstGeom prst="rect">
+            <a:avLst/>
+          </a:prstGeom>
+          <a:noFill/>
+        </p:spPr>
+        <p:txBody>
+          <a:bodyPr wrap="square" anchor="t" lIns="0" rIns="0" tIns="0" bIns="0"/>
+          <a:lstStyle/>
+          <a:p>
+            <a:pPr algn="l"/>
+            <a:r>
+              <a:rPr sz="2400" b="0" i="0">
+                <a:solidFill>
+                  <a:srgbClr val="202122"/>
+                </a:solidFill>
+                <a:latin typeface="Calibri"/>
+              </a:rPr>
+              <a:t>What happens to current if resistance increases?</a:t>
+            </a:r>
+          </a:p>
+        </p:txBody>
+      </p:sp>
+      <p:sp>
+        <p:nvSpPr>
+          <p:cNvPr id="10" name="Oval 9"/>
+          <p:cNvSpPr/>
+          <p:nvPr/>
+        </p:nvSpPr>
+        <p:spPr>
+          <a:xfrm>
+            <a:off x="548640" y="4526280"/>
+            <a:ext cx="502920" cy="502920"/>
+          </a:xfrm>
+          <a:prstGeom prst="ellipse">
+            <a:avLst/>
+          </a:prstGeom>
+          <a:solidFill>
+            <a:srgbClr val="F2B705"/>
+          </a:solidFill>
+          <a:ln>
+            <a:noFill/>
+          </a:ln>
+          <a:effectLst/>
+        </p:spPr>
+        <p:style>
+          <a:lnRef idx="1">
+            <a:schemeClr val="accent1"/>
+          </a:lnRef>
+          <a:fillRef idx="3">
+            <a:schemeClr val="accent1"/>
+          </a:fillRef>
+          <a:effectRef idx="2">
+            <a:schemeClr val="accent1"/>
+          </a:effectRef>
+          <a:fontRef idx="minor">
+            <a:schemeClr val="lt1"/>
+          </a:fontRef>
+        </p:style>
+        <p:txBody>
+          <a:bodyPr rtlCol="0" anchor="ctr" lIns="0" rIns="0" tIns="0" bIns="0"/>
+          <a:lstStyle/>
+          <a:p>
+            <a:pPr algn="ctr"/>
+            <a:r>
+              <a:rPr sz="1600" b="1">
+                <a:solidFill>
+                  <a:srgbClr val="202122"/>
+                </a:solidFill>
+                <a:latin typeface="Calibri"/>
+              </a:rPr>
+              <a:t>3</a:t>
+            </a:r>
+          </a:p>
+        </p:txBody>
+      </p:sp>
+      <p:sp>
+        <p:nvSpPr>
+          <p:cNvPr id="11" name="TextBox 10"/>
+          <p:cNvSpPr txBox="1"/>
+          <p:nvPr/>
+        </p:nvSpPr>
+        <p:spPr>
+          <a:xfrm>
+            <a:off x="1371600" y="4480560"/>
+            <a:ext cx="10271455" cy="1188720"/>
+          </a:xfrm>
+          <a:prstGeom prst="rect">
+            <a:avLst/>
+          </a:prstGeom>
+          <a:noFill/>
+        </p:spPr>
+        <p:txBody>
+          <a:bodyPr wrap="square" anchor="t" lIns="0" rIns="0" tIns="0" bIns="0"/>
+          <a:lstStyle/>
+          <a:p>
+            <a:pPr algn="l"/>
+            <a:r>
+              <a:rPr sz="2400" b="0" i="0">
+                <a:solidFill>
+                  <a:srgbClr val="202122"/>
+                </a:solidFill>
+                <a:latin typeface="Calibri"/>
+              </a:rPr>
+              <a:t>What is the maximum copper Ethernet channel length?</a:t>
+            </a:r>
+          </a:p>
+        </p:txBody>
+      </p:sp>
+      <p:sp>
+        <p:nvSpPr>
+          <p:cNvPr id="12" name="TextBox 11"/>
+          <p:cNvSpPr txBox="1"/>
+          <p:nvPr/>
+        </p:nvSpPr>
+        <p:spPr>
+          <a:xfrm>
+            <a:off x="548640" y="5852160"/>
+            <a:ext cx="11094415" cy="365760"/>
+          </a:xfrm>
+          <a:prstGeom prst="rect">
+            <a:avLst/>
+          </a:prstGeom>
+          <a:noFill/>
+        </p:spPr>
+        <p:txBody>
+          <a:bodyPr wrap="square" anchor="t" lIns="0" rIns="0" tIns="0" bIns="0"/>
+          <a:lstStyle/>
+          <a:p>
+            <a:pPr algn="l"/>
+            <a:r>
+              <a:rPr sz="1300" b="0" i="1">
+                <a:solidFill>
+                  <a:srgbClr val="54595D"/>
+                </a:solidFill>
+                <a:latin typeface="Calibri"/>
+              </a:rPr>
+              <a:t>Answer on mini whiteboards or in your book. Answers are in the speaker notes.</a:t>
+            </a:r>
+          </a:p>
+        </p:txBody>
+      </p:sp>
+    </p:spTree>
+  </p:cSld>
+  <p:clrMapOvr>
+    <a:masterClrMapping/>
+  </p:clrMapOvr>
+</p:sld>
+</file>
+
+<file path=ppt/slides/slide15.xml><?xml version="1.0" encoding="utf-8"?>
+<p:sld xmlns:a="http://schemas.openxmlformats.org/drawingml/2006/main" xmlns:p="http://schemas.openxmlformats.org/presentationml/2006/main" xmlns:r="http://schemas.openxmlformats.org/officeDocument/2006/relationships">
+  <p:cSld>
+    <p:bg>
+      <p:bgPr>
+        <a:solidFill>
+          <a:srgbClr val="FFFFFF"/>
+        </a:solidFill>
+        <a:effectLst/>
+      </p:bgPr>
+    </p:bg>
+    <p:spTree>
+      <p:nvGrpSpPr>
+        <p:cNvPr id="1" name=""/>
+        <p:cNvGrpSpPr/>
+        <p:nvPr/>
+      </p:nvGrpSpPr>
+      <p:grpSpPr/>
+      <p:sp>
+        <p:nvSpPr>
+          <p:cNvPr id="2" name="TextBox 1"/>
+          <p:cNvSpPr txBox="1"/>
+          <p:nvPr/>
+        </p:nvSpPr>
+        <p:spPr>
+          <a:xfrm>
+            <a:off x="548640" y="320040"/>
+            <a:ext cx="11094415" cy="274320"/>
+          </a:xfrm>
+          <a:prstGeom prst="rect">
+            <a:avLst/>
+          </a:prstGeom>
+          <a:noFill/>
+        </p:spPr>
+        <p:txBody>
+          <a:bodyPr wrap="square" anchor="t" lIns="0" rIns="0" tIns="0" bIns="0"/>
+          <a:lstStyle/>
+          <a:p>
+            <a:pPr algn="l"/>
+            <a:r>
+              <a:rPr sz="1100" b="1" i="0">
+                <a:solidFill>
+                  <a:srgbClr val="54595D"/>
+                </a:solidFill>
+                <a:latin typeface="Calibri"/>
+              </a:rPr>
+              <a:t>NETWORK CABLING  ·  Network Cabling Content Area 2</a:t>
+            </a:r>
+          </a:p>
+        </p:txBody>
+      </p:sp>
+      <p:sp>
+        <p:nvSpPr>
+          <p:cNvPr id="3" name="TextBox 2"/>
+          <p:cNvSpPr txBox="1"/>
+          <p:nvPr/>
+        </p:nvSpPr>
+        <p:spPr>
+          <a:xfrm>
+            <a:off x="548640" y="566928"/>
+            <a:ext cx="11094415" cy="822960"/>
+          </a:xfrm>
+          <a:prstGeom prst="rect">
+            <a:avLst/>
+          </a:prstGeom>
+          <a:noFill/>
+        </p:spPr>
+        <p:txBody>
+          <a:bodyPr wrap="square" anchor="ctr" lIns="0" rIns="0" tIns="0" bIns="0"/>
+          <a:lstStyle/>
+          <a:p>
+            <a:pPr algn="l"/>
+            <a:r>
+              <a:rPr sz="3200" b="1" i="0">
+                <a:solidFill>
+                  <a:srgbClr val="03306E"/>
+                </a:solidFill>
+                <a:latin typeface="Cambria"/>
+              </a:rPr>
+              <a:t>Check your understanding</a:t>
+            </a:r>
+          </a:p>
+        </p:txBody>
+      </p:sp>
+      <p:sp>
+        <p:nvSpPr>
+          <p:cNvPr id="4" name="TextBox 3"/>
+          <p:cNvSpPr txBox="1"/>
+          <p:nvPr/>
+        </p:nvSpPr>
+        <p:spPr>
+          <a:xfrm>
+            <a:off x="548640" y="6446520"/>
+            <a:ext cx="8229600" cy="274320"/>
+          </a:xfrm>
+          <a:prstGeom prst="rect">
+            <a:avLst/>
+          </a:prstGeom>
+          <a:noFill/>
+        </p:spPr>
+        <p:txBody>
+          <a:bodyPr wrap="square" anchor="t" lIns="0" rIns="0" tIns="0" bIns="0"/>
+          <a:lstStyle/>
+          <a:p>
+            <a:pPr algn="l"/>
+            <a:r>
+              <a:rPr sz="1000" b="0" i="0">
+                <a:solidFill>
+                  <a:srgbClr val="54595D"/>
+                </a:solidFill>
+                <a:latin typeface="Calibri"/>
+              </a:rPr>
+              <a:t>Digital Support and Security T Level  ·  Signal Theory and Data Transmission</a:t>
+            </a:r>
+          </a:p>
+        </p:txBody>
+      </p:sp>
+      <p:sp>
+        <p:nvSpPr>
+          <p:cNvPr id="5" name="TextBox 4"/>
+          <p:cNvSpPr txBox="1"/>
+          <p:nvPr/>
+        </p:nvSpPr>
+        <p:spPr>
+          <a:xfrm>
+            <a:off x="10728655" y="6446520"/>
+            <a:ext cx="914400" cy="274320"/>
+          </a:xfrm>
+          <a:prstGeom prst="rect">
+            <a:avLst/>
+          </a:prstGeom>
+          <a:noFill/>
+        </p:spPr>
+        <p:txBody>
+          <a:bodyPr wrap="square" anchor="t" lIns="0" rIns="0" tIns="0" bIns="0"/>
+          <a:lstStyle/>
+          <a:p>
+            <a:pPr algn="r"/>
+            <a:r>
+              <a:rPr sz="1000" b="0" i="0">
+                <a:solidFill>
+                  <a:srgbClr val="54595D"/>
+                </a:solidFill>
+                <a:latin typeface="Calibri"/>
+              </a:rPr>
+              <a:t>15</a:t>
+            </a:r>
+          </a:p>
+        </p:txBody>
+      </p:sp>
+      <p:sp>
+        <p:nvSpPr>
+          <p:cNvPr id="6" name="Oval 5"/>
+          <p:cNvSpPr/>
+          <p:nvPr/>
+        </p:nvSpPr>
+        <p:spPr>
+          <a:xfrm>
+            <a:off x="548640" y="1618488"/>
+            <a:ext cx="411480" cy="411480"/>
+          </a:xfrm>
+          <a:prstGeom prst="ellipse">
+            <a:avLst/>
+          </a:prstGeom>
+          <a:solidFill>
+            <a:srgbClr val="F2B705"/>
+          </a:solidFill>
+          <a:ln>
+            <a:noFill/>
+          </a:ln>
+          <a:effectLst/>
+        </p:spPr>
+        <p:style>
+          <a:lnRef idx="1">
+            <a:schemeClr val="accent1"/>
+          </a:lnRef>
+          <a:fillRef idx="3">
+            <a:schemeClr val="accent1"/>
+          </a:fillRef>
+          <a:effectRef idx="2">
+            <a:schemeClr val="accent1"/>
+          </a:effectRef>
+          <a:fontRef idx="minor">
+            <a:schemeClr val="lt1"/>
+          </a:fontRef>
+        </p:style>
+        <p:txBody>
+          <a:bodyPr rtlCol="0" anchor="ctr" lIns="0" rIns="0" tIns="0" bIns="0"/>
+          <a:lstStyle/>
+          <a:p>
+            <a:pPr algn="ctr"/>
+            <a:r>
+              <a:rPr sz="1400" b="1">
+                <a:solidFill>
+                  <a:srgbClr val="202122"/>
+                </a:solidFill>
+                <a:latin typeface="Calibri"/>
+              </a:rPr>
+              <a:t>1</a:t>
+            </a:r>
+          </a:p>
+        </p:txBody>
+      </p:sp>
+      <p:sp>
+        <p:nvSpPr>
+          <p:cNvPr id="7" name="TextBox 6"/>
+          <p:cNvSpPr txBox="1"/>
+          <p:nvPr/>
+        </p:nvSpPr>
+        <p:spPr>
+          <a:xfrm>
+            <a:off x="1234440" y="1600200"/>
+            <a:ext cx="10408615" cy="791870"/>
+          </a:xfrm>
+          <a:prstGeom prst="rect">
+            <a:avLst/>
+          </a:prstGeom>
+          <a:noFill/>
+        </p:spPr>
+        <p:txBody>
+          <a:bodyPr wrap="square" anchor="t" lIns="0" rIns="0" tIns="0" bIns="0"/>
+          <a:lstStyle/>
+          <a:p>
+            <a:pPr algn="l"/>
+            <a:r>
+              <a:rPr sz="2200" b="0" i="0">
+                <a:solidFill>
+                  <a:srgbClr val="202122"/>
+                </a:solidFill>
+                <a:latin typeface="Calibri"/>
+              </a:rPr>
+              <a:t>What does CSMA/CD stand for?</a:t>
+            </a:r>
+          </a:p>
+        </p:txBody>
+      </p:sp>
+      <p:sp>
+        <p:nvSpPr>
+          <p:cNvPr id="8" name="Oval 7"/>
+          <p:cNvSpPr/>
+          <p:nvPr/>
+        </p:nvSpPr>
+        <p:spPr>
+          <a:xfrm>
+            <a:off x="548640" y="2574950"/>
+            <a:ext cx="411480" cy="411480"/>
+          </a:xfrm>
+          <a:prstGeom prst="ellipse">
+            <a:avLst/>
+          </a:prstGeom>
+          <a:solidFill>
+            <a:srgbClr val="F2B705"/>
+          </a:solidFill>
+          <a:ln>
+            <a:noFill/>
+          </a:ln>
+          <a:effectLst/>
+        </p:spPr>
+        <p:style>
+          <a:lnRef idx="1">
+            <a:schemeClr val="accent1"/>
+          </a:lnRef>
+          <a:fillRef idx="3">
+            <a:schemeClr val="accent1"/>
+          </a:fillRef>
+          <a:effectRef idx="2">
+            <a:schemeClr val="accent1"/>
+          </a:effectRef>
+          <a:fontRef idx="minor">
+            <a:schemeClr val="lt1"/>
+          </a:fontRef>
+        </p:style>
+        <p:txBody>
+          <a:bodyPr rtlCol="0" anchor="ctr" lIns="0" rIns="0" tIns="0" bIns="0"/>
+          <a:lstStyle/>
+          <a:p>
+            <a:pPr algn="ctr"/>
+            <a:r>
+              <a:rPr sz="1400" b="1">
+                <a:solidFill>
+                  <a:srgbClr val="202122"/>
+                </a:solidFill>
+                <a:latin typeface="Calibri"/>
+              </a:rPr>
+              <a:t>2</a:t>
+            </a:r>
+          </a:p>
+        </p:txBody>
+      </p:sp>
+      <p:sp>
+        <p:nvSpPr>
+          <p:cNvPr id="9" name="TextBox 8"/>
+          <p:cNvSpPr txBox="1"/>
+          <p:nvPr/>
+        </p:nvSpPr>
+        <p:spPr>
+          <a:xfrm>
+            <a:off x="1234440" y="2556662"/>
+            <a:ext cx="10408615" cy="791870"/>
+          </a:xfrm>
+          <a:prstGeom prst="rect">
+            <a:avLst/>
+          </a:prstGeom>
+          <a:noFill/>
+        </p:spPr>
+        <p:txBody>
+          <a:bodyPr wrap="square" anchor="t" lIns="0" rIns="0" tIns="0" bIns="0"/>
+          <a:lstStyle/>
+          <a:p>
+            <a:pPr algn="l"/>
+            <a:r>
+              <a:rPr sz="2200" b="0" i="0">
+                <a:solidFill>
+                  <a:srgbClr val="202122"/>
+                </a:solidFill>
+                <a:latin typeface="Calibri"/>
+              </a:rPr>
+              <a:t>What keeps light inside a fibre core?</a:t>
+            </a:r>
+          </a:p>
+        </p:txBody>
+      </p:sp>
+      <p:sp>
+        <p:nvSpPr>
+          <p:cNvPr id="10" name="Oval 9"/>
+          <p:cNvSpPr/>
+          <p:nvPr/>
+        </p:nvSpPr>
+        <p:spPr>
+          <a:xfrm>
+            <a:off x="548640" y="3531412"/>
+            <a:ext cx="411480" cy="411480"/>
+          </a:xfrm>
+          <a:prstGeom prst="ellipse">
+            <a:avLst/>
+          </a:prstGeom>
+          <a:solidFill>
+            <a:srgbClr val="F2B705"/>
+          </a:solidFill>
+          <a:ln>
+            <a:noFill/>
+          </a:ln>
+          <a:effectLst/>
+        </p:spPr>
+        <p:style>
+          <a:lnRef idx="1">
+            <a:schemeClr val="accent1"/>
+          </a:lnRef>
+          <a:fillRef idx="3">
+            <a:schemeClr val="accent1"/>
+          </a:fillRef>
+          <a:effectRef idx="2">
+            <a:schemeClr val="accent1"/>
+          </a:effectRef>
+          <a:fontRef idx="minor">
+            <a:schemeClr val="lt1"/>
+          </a:fontRef>
+        </p:style>
+        <p:txBody>
+          <a:bodyPr rtlCol="0" anchor="ctr" lIns="0" rIns="0" tIns="0" bIns="0"/>
+          <a:lstStyle/>
+          <a:p>
+            <a:pPr algn="ctr"/>
+            <a:r>
+              <a:rPr sz="1400" b="1">
+                <a:solidFill>
+                  <a:srgbClr val="202122"/>
+                </a:solidFill>
+                <a:latin typeface="Calibri"/>
+              </a:rPr>
+              <a:t>3</a:t>
+            </a:r>
+          </a:p>
+        </p:txBody>
+      </p:sp>
+      <p:sp>
+        <p:nvSpPr>
+          <p:cNvPr id="11" name="TextBox 10"/>
+          <p:cNvSpPr txBox="1"/>
+          <p:nvPr/>
+        </p:nvSpPr>
+        <p:spPr>
+          <a:xfrm>
+            <a:off x="1234440" y="3513124"/>
+            <a:ext cx="10408615" cy="791870"/>
+          </a:xfrm>
+          <a:prstGeom prst="rect">
+            <a:avLst/>
+          </a:prstGeom>
+          <a:noFill/>
+        </p:spPr>
+        <p:txBody>
+          <a:bodyPr wrap="square" anchor="t" lIns="0" rIns="0" tIns="0" bIns="0"/>
+          <a:lstStyle/>
+          <a:p>
+            <a:pPr algn="l"/>
+            <a:r>
+              <a:rPr sz="2200" b="0" i="0">
+                <a:solidFill>
+                  <a:srgbClr val="202122"/>
+                </a:solidFill>
+                <a:latin typeface="Calibri"/>
+              </a:rPr>
+              <a:t>Which fibre type suits long distances?</a:t>
+            </a:r>
+          </a:p>
+        </p:txBody>
+      </p:sp>
+      <p:sp>
+        <p:nvSpPr>
+          <p:cNvPr id="12" name="Oval 11"/>
+          <p:cNvSpPr/>
+          <p:nvPr/>
+        </p:nvSpPr>
+        <p:spPr>
+          <a:xfrm>
+            <a:off x="548640" y="4487875"/>
+            <a:ext cx="411480" cy="411480"/>
+          </a:xfrm>
+          <a:prstGeom prst="ellipse">
+            <a:avLst/>
+          </a:prstGeom>
+          <a:solidFill>
+            <a:srgbClr val="F2B705"/>
+          </a:solidFill>
+          <a:ln>
+            <a:noFill/>
+          </a:ln>
+          <a:effectLst/>
+        </p:spPr>
+        <p:style>
+          <a:lnRef idx="1">
+            <a:schemeClr val="accent1"/>
+          </a:lnRef>
+          <a:fillRef idx="3">
+            <a:schemeClr val="accent1"/>
+          </a:fillRef>
+          <a:effectRef idx="2">
+            <a:schemeClr val="accent1"/>
+          </a:effectRef>
+          <a:fontRef idx="minor">
+            <a:schemeClr val="lt1"/>
+          </a:fontRef>
+        </p:style>
+        <p:txBody>
+          <a:bodyPr rtlCol="0" anchor="ctr" lIns="0" rIns="0" tIns="0" bIns="0"/>
+          <a:lstStyle/>
+          <a:p>
+            <a:pPr algn="ctr"/>
+            <a:r>
+              <a:rPr sz="1400" b="1">
+                <a:solidFill>
+                  <a:srgbClr val="202122"/>
+                </a:solidFill>
+                <a:latin typeface="Calibri"/>
+              </a:rPr>
+              <a:t>4</a:t>
+            </a:r>
+          </a:p>
+        </p:txBody>
+      </p:sp>
+      <p:sp>
+        <p:nvSpPr>
+          <p:cNvPr id="13" name="TextBox 12"/>
+          <p:cNvSpPr txBox="1"/>
+          <p:nvPr/>
+        </p:nvSpPr>
+        <p:spPr>
+          <a:xfrm>
+            <a:off x="1234440" y="4469587"/>
+            <a:ext cx="10408615" cy="791870"/>
+          </a:xfrm>
+          <a:prstGeom prst="rect">
+            <a:avLst/>
+          </a:prstGeom>
+          <a:noFill/>
+        </p:spPr>
+        <p:txBody>
+          <a:bodyPr wrap="square" anchor="t" lIns="0" rIns="0" tIns="0" bIns="0"/>
+          <a:lstStyle/>
+          <a:p>
+            <a:pPr algn="l"/>
+            <a:r>
+              <a:rPr sz="2200" b="0" i="0">
+                <a:solidFill>
+                  <a:srgbClr val="202122"/>
+                </a:solidFill>
+                <a:latin typeface="Calibri"/>
+              </a:rPr>
+              <a:t>Name two causes of attenuation.</a:t>
+            </a:r>
+          </a:p>
+        </p:txBody>
+      </p:sp>
+      <p:sp>
+        <p:nvSpPr>
+          <p:cNvPr id="14" name="Oval 13"/>
+          <p:cNvSpPr/>
+          <p:nvPr/>
+        </p:nvSpPr>
+        <p:spPr>
+          <a:xfrm>
+            <a:off x="548640" y="5444337"/>
+            <a:ext cx="411480" cy="411480"/>
+          </a:xfrm>
+          <a:prstGeom prst="ellipse">
+            <a:avLst/>
+          </a:prstGeom>
+          <a:solidFill>
+            <a:srgbClr val="F2B705"/>
+          </a:solidFill>
+          <a:ln>
+            <a:noFill/>
+          </a:ln>
+          <a:effectLst/>
+        </p:spPr>
+        <p:style>
+          <a:lnRef idx="1">
+            <a:schemeClr val="accent1"/>
+          </a:lnRef>
+          <a:fillRef idx="3">
+            <a:schemeClr val="accent1"/>
+          </a:fillRef>
+          <a:effectRef idx="2">
+            <a:schemeClr val="accent1"/>
+          </a:effectRef>
+          <a:fontRef idx="minor">
+            <a:schemeClr val="lt1"/>
+          </a:fontRef>
+        </p:style>
+        <p:txBody>
+          <a:bodyPr rtlCol="0" anchor="ctr" lIns="0" rIns="0" tIns="0" bIns="0"/>
+          <a:lstStyle/>
+          <a:p>
+            <a:pPr algn="ctr"/>
+            <a:r>
+              <a:rPr sz="1400" b="1">
+                <a:solidFill>
+                  <a:srgbClr val="202122"/>
+                </a:solidFill>
+                <a:latin typeface="Calibri"/>
+              </a:rPr>
+              <a:t>5</a:t>
+            </a:r>
+          </a:p>
+        </p:txBody>
+      </p:sp>
+      <p:sp>
+        <p:nvSpPr>
+          <p:cNvPr id="15" name="TextBox 14"/>
+          <p:cNvSpPr txBox="1"/>
+          <p:nvPr/>
+        </p:nvSpPr>
+        <p:spPr>
+          <a:xfrm>
+            <a:off x="1234440" y="5426049"/>
+            <a:ext cx="10408615" cy="791870"/>
+          </a:xfrm>
+          <a:prstGeom prst="rect">
+            <a:avLst/>
+          </a:prstGeom>
+          <a:noFill/>
+        </p:spPr>
+        <p:txBody>
+          <a:bodyPr wrap="square" anchor="t" lIns="0" rIns="0" tIns="0" bIns="0"/>
+          <a:lstStyle/>
+          <a:p>
+            <a:pPr algn="l"/>
+            <a:r>
+              <a:rPr sz="2200" b="0" i="0">
+                <a:solidFill>
+                  <a:srgbClr val="202122"/>
+                </a:solidFill>
+                <a:latin typeface="Calibri"/>
+              </a:rPr>
+              <a:t>Using V = I x R, what current flows with 10 V and 5 ohms?</a:t>
+            </a:r>
+          </a:p>
+        </p:txBody>
+      </p:sp>
+    </p:spTree>
+  </p:cSld>
+  <p:clrMapOvr>
+    <a:masterClrMapping/>
+  </p:clrMapOvr>
+</p:sld>
+</file>
+
+<file path=ppt/slides/slide16.xml><?xml version="1.0" encoding="utf-8"?>
+<p:sld xmlns:a="http://schemas.openxmlformats.org/drawingml/2006/main" xmlns:p="http://schemas.openxmlformats.org/presentationml/2006/main" xmlns:r="http://schemas.openxmlformats.org/officeDocument/2006/relationships">
+  <p:cSld>
+    <p:bg>
+      <p:bgPr>
+        <a:solidFill>
+          <a:srgbClr val="FFFFFF"/>
+        </a:solidFill>
+        <a:effectLst/>
+      </p:bgPr>
+    </p:bg>
+    <p:spTree>
+      <p:nvGrpSpPr>
+        <p:cNvPr id="1" name=""/>
+        <p:cNvGrpSpPr/>
+        <p:nvPr/>
+      </p:nvGrpSpPr>
+      <p:grpSpPr/>
+      <p:sp>
+        <p:nvSpPr>
+          <p:cNvPr id="2" name="TextBox 1"/>
+          <p:cNvSpPr txBox="1"/>
+          <p:nvPr/>
+        </p:nvSpPr>
+        <p:spPr>
+          <a:xfrm>
+            <a:off x="548640" y="320040"/>
+            <a:ext cx="11094415" cy="274320"/>
+          </a:xfrm>
+          <a:prstGeom prst="rect">
+            <a:avLst/>
+          </a:prstGeom>
+          <a:noFill/>
+        </p:spPr>
+        <p:txBody>
+          <a:bodyPr wrap="square" anchor="t" lIns="0" rIns="0" tIns="0" bIns="0"/>
+          <a:lstStyle/>
+          <a:p>
+            <a:pPr algn="l"/>
+            <a:r>
+              <a:rPr sz="1100" b="1" i="0">
+                <a:solidFill>
+                  <a:srgbClr val="54595D"/>
+                </a:solidFill>
+                <a:latin typeface="Calibri"/>
+              </a:rPr>
+              <a:t>NETWORK CABLING  ·  Network Cabling Content Area 2</a:t>
+            </a:r>
+          </a:p>
+        </p:txBody>
+      </p:sp>
+      <p:sp>
+        <p:nvSpPr>
+          <p:cNvPr id="3" name="TextBox 2"/>
+          <p:cNvSpPr txBox="1"/>
+          <p:nvPr/>
+        </p:nvSpPr>
+        <p:spPr>
+          <a:xfrm>
+            <a:off x="548640" y="566928"/>
+            <a:ext cx="11094415" cy="822960"/>
+          </a:xfrm>
+          <a:prstGeom prst="rect">
+            <a:avLst/>
+          </a:prstGeom>
+          <a:noFill/>
+        </p:spPr>
+        <p:txBody>
+          <a:bodyPr wrap="square" anchor="ctr" lIns="0" rIns="0" tIns="0" bIns="0"/>
+          <a:lstStyle/>
+          <a:p>
+            <a:pPr algn="l"/>
+            <a:r>
+              <a:rPr sz="3200" b="1" i="0">
+                <a:solidFill>
+                  <a:srgbClr val="03306E"/>
+                </a:solidFill>
+                <a:latin typeface="Cambria"/>
+              </a:rPr>
+              <a:t>Answers</a:t>
+            </a:r>
+          </a:p>
+        </p:txBody>
+      </p:sp>
+      <p:sp>
+        <p:nvSpPr>
+          <p:cNvPr id="4" name="TextBox 3"/>
+          <p:cNvSpPr txBox="1"/>
+          <p:nvPr/>
+        </p:nvSpPr>
+        <p:spPr>
+          <a:xfrm>
+            <a:off x="548640" y="6446520"/>
+            <a:ext cx="8229600" cy="274320"/>
+          </a:xfrm>
+          <a:prstGeom prst="rect">
+            <a:avLst/>
+          </a:prstGeom>
+          <a:noFill/>
+        </p:spPr>
+        <p:txBody>
+          <a:bodyPr wrap="square" anchor="t" lIns="0" rIns="0" tIns="0" bIns="0"/>
+          <a:lstStyle/>
+          <a:p>
+            <a:pPr algn="l"/>
+            <a:r>
+              <a:rPr sz="1000" b="0" i="0">
+                <a:solidFill>
+                  <a:srgbClr val="54595D"/>
+                </a:solidFill>
+                <a:latin typeface="Calibri"/>
+              </a:rPr>
+              <a:t>Digital Support and Security T Level  ·  Signal Theory and Data Transmission</a:t>
+            </a:r>
+          </a:p>
+        </p:txBody>
+      </p:sp>
+      <p:sp>
+        <p:nvSpPr>
+          <p:cNvPr id="5" name="TextBox 4"/>
+          <p:cNvSpPr txBox="1"/>
+          <p:nvPr/>
+        </p:nvSpPr>
+        <p:spPr>
+          <a:xfrm>
+            <a:off x="10728655" y="6446520"/>
+            <a:ext cx="914400" cy="274320"/>
+          </a:xfrm>
+          <a:prstGeom prst="rect">
+            <a:avLst/>
+          </a:prstGeom>
+          <a:noFill/>
+        </p:spPr>
+        <p:txBody>
+          <a:bodyPr wrap="square" anchor="t" lIns="0" rIns="0" tIns="0" bIns="0"/>
+          <a:lstStyle/>
+          <a:p>
+            <a:pPr algn="r"/>
+            <a:r>
+              <a:rPr sz="1000" b="0" i="0">
+                <a:solidFill>
+                  <a:srgbClr val="54595D"/>
+                </a:solidFill>
+                <a:latin typeface="Calibri"/>
+              </a:rPr>
+              <a:t>16</a:t>
+            </a:r>
+          </a:p>
+        </p:txBody>
+      </p:sp>
+      <p:sp>
+        <p:nvSpPr>
+          <p:cNvPr id="6" name="Oval 5"/>
+          <p:cNvSpPr/>
+          <p:nvPr/>
+        </p:nvSpPr>
+        <p:spPr>
+          <a:xfrm>
+            <a:off x="548640" y="1618488"/>
+            <a:ext cx="411480" cy="411480"/>
+          </a:xfrm>
+          <a:prstGeom prst="ellipse">
+            <a:avLst/>
+          </a:prstGeom>
+          <a:solidFill>
+            <a:srgbClr val="F2B705"/>
+          </a:solidFill>
+          <a:ln>
+            <a:noFill/>
+          </a:ln>
+          <a:effectLst/>
+        </p:spPr>
+        <p:style>
+          <a:lnRef idx="1">
+            <a:schemeClr val="accent1"/>
+          </a:lnRef>
+          <a:fillRef idx="3">
+            <a:schemeClr val="accent1"/>
+          </a:fillRef>
+          <a:effectRef idx="2">
+            <a:schemeClr val="accent1"/>
+          </a:effectRef>
+          <a:fontRef idx="minor">
+            <a:schemeClr val="lt1"/>
+          </a:fontRef>
+        </p:style>
+        <p:txBody>
+          <a:bodyPr rtlCol="0" anchor="ctr" lIns="0" rIns="0" tIns="0" bIns="0"/>
+          <a:lstStyle/>
+          <a:p>
+            <a:pPr algn="ctr"/>
+            <a:r>
+              <a:rPr sz="1400" b="1">
+                <a:solidFill>
+                  <a:srgbClr val="202122"/>
+                </a:solidFill>
+                <a:latin typeface="Calibri"/>
+              </a:rPr>
+              <a:t>1</a:t>
+            </a:r>
+          </a:p>
+        </p:txBody>
+      </p:sp>
+      <p:sp>
+        <p:nvSpPr>
+          <p:cNvPr id="7" name="TextBox 6"/>
+          <p:cNvSpPr txBox="1"/>
+          <p:nvPr/>
+        </p:nvSpPr>
+        <p:spPr>
+          <a:xfrm>
+            <a:off x="1234440" y="1600200"/>
+            <a:ext cx="10408615" cy="791870"/>
+          </a:xfrm>
+          <a:prstGeom prst="rect">
+            <a:avLst/>
+          </a:prstGeom>
+          <a:noFill/>
+        </p:spPr>
+        <p:txBody>
+          <a:bodyPr wrap="square" anchor="t" lIns="0" rIns="0" tIns="0" bIns="0"/>
+          <a:lstStyle/>
+          <a:p>
+            <a:pPr algn="l"/>
+            <a:r>
+              <a:rPr sz="1800" b="0" i="0">
+                <a:solidFill>
+                  <a:srgbClr val="54595D"/>
+                </a:solidFill>
+                <a:latin typeface="Calibri"/>
+              </a:rPr>
+              <a:t>What does CSMA/CD stand for?</a:t>
+            </a:r>
+          </a:p>
+          <a:p>
+            <a:r>
+              <a:rPr sz="1800" b="1">
+                <a:solidFill>
+                  <a:srgbClr val="03306E"/>
+                </a:solidFill>
+                <a:latin typeface="Calibri"/>
+              </a:rPr>
+              <a:t>Carrier Sense Multiple Access with Collision Detection.</a:t>
+            </a:r>
+          </a:p>
+        </p:txBody>
+      </p:sp>
+      <p:sp>
+        <p:nvSpPr>
+          <p:cNvPr id="8" name="Oval 7"/>
+          <p:cNvSpPr/>
+          <p:nvPr/>
+        </p:nvSpPr>
+        <p:spPr>
+          <a:xfrm>
+            <a:off x="548640" y="2574950"/>
+            <a:ext cx="411480" cy="411480"/>
+          </a:xfrm>
+          <a:prstGeom prst="ellipse">
+            <a:avLst/>
+          </a:prstGeom>
+          <a:solidFill>
+            <a:srgbClr val="F2B705"/>
+          </a:solidFill>
+          <a:ln>
+            <a:noFill/>
+          </a:ln>
+          <a:effectLst/>
+        </p:spPr>
+        <p:style>
+          <a:lnRef idx="1">
+            <a:schemeClr val="accent1"/>
+          </a:lnRef>
+          <a:fillRef idx="3">
+            <a:schemeClr val="accent1"/>
+          </a:fillRef>
+          <a:effectRef idx="2">
+            <a:schemeClr val="accent1"/>
+          </a:effectRef>
+          <a:fontRef idx="minor">
+            <a:schemeClr val="lt1"/>
+          </a:fontRef>
+        </p:style>
+        <p:txBody>
+          <a:bodyPr rtlCol="0" anchor="ctr" lIns="0" rIns="0" tIns="0" bIns="0"/>
+          <a:lstStyle/>
+          <a:p>
+            <a:pPr algn="ctr"/>
+            <a:r>
+              <a:rPr sz="1400" b="1">
+                <a:solidFill>
+                  <a:srgbClr val="202122"/>
+                </a:solidFill>
+                <a:latin typeface="Calibri"/>
+              </a:rPr>
+              <a:t>2</a:t>
+            </a:r>
+          </a:p>
+        </p:txBody>
+      </p:sp>
+      <p:sp>
+        <p:nvSpPr>
+          <p:cNvPr id="9" name="TextBox 8"/>
+          <p:cNvSpPr txBox="1"/>
+          <p:nvPr/>
+        </p:nvSpPr>
+        <p:spPr>
+          <a:xfrm>
+            <a:off x="1234440" y="2556662"/>
+            <a:ext cx="10408615" cy="791870"/>
+          </a:xfrm>
+          <a:prstGeom prst="rect">
+            <a:avLst/>
+          </a:prstGeom>
+          <a:noFill/>
+        </p:spPr>
+        <p:txBody>
+          <a:bodyPr wrap="square" anchor="t" lIns="0" rIns="0" tIns="0" bIns="0"/>
+          <a:lstStyle/>
+          <a:p>
+            <a:pPr algn="l"/>
+            <a:r>
+              <a:rPr sz="1800" b="0" i="0">
+                <a:solidFill>
+                  <a:srgbClr val="54595D"/>
+                </a:solidFill>
+                <a:latin typeface="Calibri"/>
+              </a:rPr>
+              <a:t>What keeps light inside a fibre core?</a:t>
+            </a:r>
+          </a:p>
+          <a:p>
+            <a:r>
+              <a:rPr sz="1800" b="1">
+                <a:solidFill>
+                  <a:srgbClr val="03306E"/>
+                </a:solidFill>
+                <a:latin typeface="Calibri"/>
+              </a:rPr>
+              <a:t>Total internal reflection.</a:t>
+            </a:r>
+          </a:p>
+        </p:txBody>
+      </p:sp>
+      <p:sp>
+        <p:nvSpPr>
+          <p:cNvPr id="10" name="Oval 9"/>
+          <p:cNvSpPr/>
+          <p:nvPr/>
+        </p:nvSpPr>
+        <p:spPr>
+          <a:xfrm>
+            <a:off x="548640" y="3531412"/>
+            <a:ext cx="411480" cy="411480"/>
+          </a:xfrm>
+          <a:prstGeom prst="ellipse">
+            <a:avLst/>
+          </a:prstGeom>
+          <a:solidFill>
+            <a:srgbClr val="F2B705"/>
+          </a:solidFill>
+          <a:ln>
+            <a:noFill/>
+          </a:ln>
+          <a:effectLst/>
+        </p:spPr>
+        <p:style>
+          <a:lnRef idx="1">
+            <a:schemeClr val="accent1"/>
+          </a:lnRef>
+          <a:fillRef idx="3">
+            <a:schemeClr val="accent1"/>
+          </a:fillRef>
+          <a:effectRef idx="2">
+            <a:schemeClr val="accent1"/>
+          </a:effectRef>
+          <a:fontRef idx="minor">
+            <a:schemeClr val="lt1"/>
+          </a:fontRef>
+        </p:style>
+        <p:txBody>
+          <a:bodyPr rtlCol="0" anchor="ctr" lIns="0" rIns="0" tIns="0" bIns="0"/>
+          <a:lstStyle/>
+          <a:p>
+            <a:pPr algn="ctr"/>
+            <a:r>
+              <a:rPr sz="1400" b="1">
+                <a:solidFill>
+                  <a:srgbClr val="202122"/>
+                </a:solidFill>
+                <a:latin typeface="Calibri"/>
+              </a:rPr>
+              <a:t>3</a:t>
+            </a:r>
+          </a:p>
+        </p:txBody>
+      </p:sp>
+      <p:sp>
+        <p:nvSpPr>
+          <p:cNvPr id="11" name="TextBox 10"/>
+          <p:cNvSpPr txBox="1"/>
+          <p:nvPr/>
+        </p:nvSpPr>
+        <p:spPr>
+          <a:xfrm>
+            <a:off x="1234440" y="3513124"/>
+            <a:ext cx="10408615" cy="791870"/>
+          </a:xfrm>
+          <a:prstGeom prst="rect">
+            <a:avLst/>
+          </a:prstGeom>
+          <a:noFill/>
+        </p:spPr>
+        <p:txBody>
+          <a:bodyPr wrap="square" anchor="t" lIns="0" rIns="0" tIns="0" bIns="0"/>
+          <a:lstStyle/>
+          <a:p>
+            <a:pPr algn="l"/>
+            <a:r>
+              <a:rPr sz="1800" b="0" i="0">
+                <a:solidFill>
+                  <a:srgbClr val="54595D"/>
+                </a:solidFill>
+                <a:latin typeface="Calibri"/>
+              </a:rPr>
+              <a:t>Which fibre type suits long distances?</a:t>
+            </a:r>
+          </a:p>
+          <a:p>
+            <a:r>
+              <a:rPr sz="1800" b="1">
+                <a:solidFill>
+                  <a:srgbClr val="03306E"/>
+                </a:solidFill>
+                <a:latin typeface="Calibri"/>
+              </a:rPr>
+              <a:t>Single-mode.</a:t>
+            </a:r>
+          </a:p>
+        </p:txBody>
+      </p:sp>
+      <p:sp>
+        <p:nvSpPr>
+          <p:cNvPr id="12" name="Oval 11"/>
+          <p:cNvSpPr/>
+          <p:nvPr/>
+        </p:nvSpPr>
+        <p:spPr>
+          <a:xfrm>
+            <a:off x="548640" y="4487875"/>
+            <a:ext cx="411480" cy="411480"/>
+          </a:xfrm>
+          <a:prstGeom prst="ellipse">
+            <a:avLst/>
+          </a:prstGeom>
+          <a:solidFill>
+            <a:srgbClr val="F2B705"/>
+          </a:solidFill>
+          <a:ln>
+            <a:noFill/>
+          </a:ln>
+          <a:effectLst/>
+        </p:spPr>
+        <p:style>
+          <a:lnRef idx="1">
+            <a:schemeClr val="accent1"/>
+          </a:lnRef>
+          <a:fillRef idx="3">
+            <a:schemeClr val="accent1"/>
+          </a:fillRef>
+          <a:effectRef idx="2">
+            <a:schemeClr val="accent1"/>
+          </a:effectRef>
+          <a:fontRef idx="minor">
+            <a:schemeClr val="lt1"/>
+          </a:fontRef>
+        </p:style>
+        <p:txBody>
+          <a:bodyPr rtlCol="0" anchor="ctr" lIns="0" rIns="0" tIns="0" bIns="0"/>
+          <a:lstStyle/>
+          <a:p>
+            <a:pPr algn="ctr"/>
+            <a:r>
+              <a:rPr sz="1400" b="1">
+                <a:solidFill>
+                  <a:srgbClr val="202122"/>
+                </a:solidFill>
+                <a:latin typeface="Calibri"/>
+              </a:rPr>
+              <a:t>4</a:t>
+            </a:r>
+          </a:p>
+        </p:txBody>
+      </p:sp>
+      <p:sp>
+        <p:nvSpPr>
+          <p:cNvPr id="13" name="TextBox 12"/>
+          <p:cNvSpPr txBox="1"/>
+          <p:nvPr/>
+        </p:nvSpPr>
+        <p:spPr>
+          <a:xfrm>
+            <a:off x="1234440" y="4469587"/>
+            <a:ext cx="10408615" cy="791870"/>
+          </a:xfrm>
+          <a:prstGeom prst="rect">
+            <a:avLst/>
+          </a:prstGeom>
+          <a:noFill/>
+        </p:spPr>
+        <p:txBody>
+          <a:bodyPr wrap="square" anchor="t" lIns="0" rIns="0" tIns="0" bIns="0"/>
+          <a:lstStyle/>
+          <a:p>
+            <a:pPr algn="l"/>
+            <a:r>
+              <a:rPr sz="1800" b="0" i="0">
+                <a:solidFill>
+                  <a:srgbClr val="54595D"/>
+                </a:solidFill>
+                <a:latin typeface="Calibri"/>
+              </a:rPr>
+              <a:t>Name two causes of attenuation.</a:t>
+            </a:r>
+          </a:p>
+          <a:p>
+            <a:r>
+              <a:rPr sz="1800" b="1">
+                <a:solidFill>
+                  <a:srgbClr val="03306E"/>
+                </a:solidFill>
+                <a:latin typeface="Calibri"/>
+              </a:rPr>
+              <a:t>Any two of: absorption, scattering, macrobending, microbending.</a:t>
+            </a:r>
+          </a:p>
+        </p:txBody>
+      </p:sp>
+      <p:sp>
+        <p:nvSpPr>
+          <p:cNvPr id="14" name="Oval 13"/>
+          <p:cNvSpPr/>
+          <p:nvPr/>
+        </p:nvSpPr>
+        <p:spPr>
+          <a:xfrm>
+            <a:off x="548640" y="5444337"/>
+            <a:ext cx="411480" cy="411480"/>
+          </a:xfrm>
+          <a:prstGeom prst="ellipse">
+            <a:avLst/>
+          </a:prstGeom>
+          <a:solidFill>
+            <a:srgbClr val="F2B705"/>
+          </a:solidFill>
+          <a:ln>
+            <a:noFill/>
+          </a:ln>
+          <a:effectLst/>
+        </p:spPr>
+        <p:style>
+          <a:lnRef idx="1">
+            <a:schemeClr val="accent1"/>
+          </a:lnRef>
+          <a:fillRef idx="3">
+            <a:schemeClr val="accent1"/>
+          </a:fillRef>
+          <a:effectRef idx="2">
+            <a:schemeClr val="accent1"/>
+          </a:effectRef>
+          <a:fontRef idx="minor">
+            <a:schemeClr val="lt1"/>
+          </a:fontRef>
+        </p:style>
+        <p:txBody>
+          <a:bodyPr rtlCol="0" anchor="ctr" lIns="0" rIns="0" tIns="0" bIns="0"/>
+          <a:lstStyle/>
+          <a:p>
+            <a:pPr algn="ctr"/>
+            <a:r>
+              <a:rPr sz="1400" b="1">
+                <a:solidFill>
+                  <a:srgbClr val="202122"/>
+                </a:solidFill>
+                <a:latin typeface="Calibri"/>
+              </a:rPr>
+              <a:t>5</a:t>
+            </a:r>
+          </a:p>
+        </p:txBody>
+      </p:sp>
+      <p:sp>
+        <p:nvSpPr>
+          <p:cNvPr id="15" name="TextBox 14"/>
+          <p:cNvSpPr txBox="1"/>
+          <p:nvPr/>
+        </p:nvSpPr>
+        <p:spPr>
+          <a:xfrm>
+            <a:off x="1234440" y="5426049"/>
+            <a:ext cx="10408615" cy="791870"/>
+          </a:xfrm>
+          <a:prstGeom prst="rect">
+            <a:avLst/>
+          </a:prstGeom>
+          <a:noFill/>
+        </p:spPr>
+        <p:txBody>
+          <a:bodyPr wrap="square" anchor="t" lIns="0" rIns="0" tIns="0" bIns="0"/>
+          <a:lstStyle/>
+          <a:p>
+            <a:pPr algn="l"/>
+            <a:r>
+              <a:rPr sz="1800" b="0" i="0">
+                <a:solidFill>
+                  <a:srgbClr val="54595D"/>
+                </a:solidFill>
+                <a:latin typeface="Calibri"/>
+              </a:rPr>
+              <a:t>Using V = I x R, what current flows with 10 V and 5 ohms?</a:t>
+            </a:r>
+          </a:p>
+          <a:p>
+            <a:r>
+              <a:rPr sz="1800" b="1">
+                <a:solidFill>
+                  <a:srgbClr val="03306E"/>
+                </a:solidFill>
+                <a:latin typeface="Calibri"/>
+              </a:rPr>
+              <a:t>2 amps.</a:t>
+            </a:r>
+          </a:p>
+        </p:txBody>
+      </p:sp>
+    </p:spTree>
+  </p:cSld>
+  <p:clrMapOvr>
+    <a:masterClrMapping/>
+  </p:clrMapOvr>
+</p:sld>
+</file>
+
+<file path=ppt/slides/slide17.xml><?xml version="1.0" encoding="utf-8"?>
+<p:sld xmlns:a="http://schemas.openxmlformats.org/drawingml/2006/main" xmlns:p="http://schemas.openxmlformats.org/presentationml/2006/main" xmlns:r="http://schemas.openxmlformats.org/officeDocument/2006/relationships">
+  <p:cSld>
+    <p:bg>
+      <p:bgPr>
+        <a:solidFill>
+          <a:srgbClr val="FFFFFF"/>
+        </a:solidFill>
+        <a:effectLst/>
+      </p:bgPr>
+    </p:bg>
+    <p:spTree>
+      <p:nvGrpSpPr>
+        <p:cNvPr id="1" name=""/>
+        <p:cNvGrpSpPr/>
+        <p:nvPr/>
+      </p:nvGrpSpPr>
+      <p:grpSpPr/>
+      <p:sp>
+        <p:nvSpPr>
+          <p:cNvPr id="2" name="TextBox 1"/>
+          <p:cNvSpPr txBox="1"/>
+          <p:nvPr/>
+        </p:nvSpPr>
+        <p:spPr>
+          <a:xfrm>
+            <a:off x="548640" y="320040"/>
+            <a:ext cx="11094415" cy="274320"/>
+          </a:xfrm>
+          <a:prstGeom prst="rect">
+            <a:avLst/>
+          </a:prstGeom>
+          <a:noFill/>
+        </p:spPr>
+        <p:txBody>
+          <a:bodyPr wrap="square" anchor="t" lIns="0" rIns="0" tIns="0" bIns="0"/>
+          <a:lstStyle/>
+          <a:p>
+            <a:pPr algn="l"/>
+            <a:r>
+              <a:rPr sz="1100" b="1" i="0">
+                <a:solidFill>
+                  <a:srgbClr val="54595D"/>
+                </a:solidFill>
+                <a:latin typeface="Calibri"/>
+              </a:rPr>
+              <a:t>NETWORK CABLING  ·  Network Cabling Content Area 2</a:t>
+            </a:r>
+          </a:p>
+        </p:txBody>
+      </p:sp>
+      <p:sp>
+        <p:nvSpPr>
+          <p:cNvPr id="3" name="TextBox 2"/>
+          <p:cNvSpPr txBox="1"/>
+          <p:nvPr/>
+        </p:nvSpPr>
+        <p:spPr>
+          <a:xfrm>
+            <a:off x="548640" y="566928"/>
+            <a:ext cx="11094415" cy="822960"/>
+          </a:xfrm>
+          <a:prstGeom prst="rect">
+            <a:avLst/>
+          </a:prstGeom>
+          <a:noFill/>
+        </p:spPr>
+        <p:txBody>
+          <a:bodyPr wrap="square" anchor="ctr" lIns="0" rIns="0" tIns="0" bIns="0"/>
+          <a:lstStyle/>
+          <a:p>
+            <a:pPr algn="l"/>
+            <a:r>
+              <a:rPr sz="3200" b="1" i="0">
+                <a:solidFill>
+                  <a:srgbClr val="03306E"/>
+                </a:solidFill>
+                <a:latin typeface="Cambria"/>
+              </a:rPr>
+              <a:t>Activity: Signal loss investigation</a:t>
+            </a:r>
+          </a:p>
+        </p:txBody>
+      </p:sp>
+      <p:sp>
+        <p:nvSpPr>
+          <p:cNvPr id="4" name="TextBox 3"/>
+          <p:cNvSpPr txBox="1"/>
+          <p:nvPr/>
+        </p:nvSpPr>
+        <p:spPr>
+          <a:xfrm>
+            <a:off x="548640" y="6446520"/>
+            <a:ext cx="8229600" cy="274320"/>
+          </a:xfrm>
+          <a:prstGeom prst="rect">
+            <a:avLst/>
+          </a:prstGeom>
+          <a:noFill/>
+        </p:spPr>
+        <p:txBody>
+          <a:bodyPr wrap="square" anchor="t" lIns="0" rIns="0" tIns="0" bIns="0"/>
+          <a:lstStyle/>
+          <a:p>
+            <a:pPr algn="l"/>
+            <a:r>
+              <a:rPr sz="1000" b="0" i="0">
+                <a:solidFill>
+                  <a:srgbClr val="54595D"/>
+                </a:solidFill>
+                <a:latin typeface="Calibri"/>
+              </a:rPr>
+              <a:t>Digital Support and Security T Level  ·  Signal Theory and Data Transmission</a:t>
+            </a:r>
+          </a:p>
+        </p:txBody>
+      </p:sp>
+      <p:sp>
+        <p:nvSpPr>
+          <p:cNvPr id="5" name="TextBox 4"/>
+          <p:cNvSpPr txBox="1"/>
+          <p:nvPr/>
+        </p:nvSpPr>
+        <p:spPr>
+          <a:xfrm>
+            <a:off x="10728655" y="6446520"/>
+            <a:ext cx="914400" cy="274320"/>
+          </a:xfrm>
+          <a:prstGeom prst="rect">
+            <a:avLst/>
+          </a:prstGeom>
+          <a:noFill/>
+        </p:spPr>
+        <p:txBody>
+          <a:bodyPr wrap="square" anchor="t" lIns="0" rIns="0" tIns="0" bIns="0"/>
+          <a:lstStyle/>
+          <a:p>
+            <a:pPr algn="r"/>
+            <a:r>
+              <a:rPr sz="1000" b="0" i="0">
+                <a:solidFill>
+                  <a:srgbClr val="54595D"/>
+                </a:solidFill>
+                <a:latin typeface="Calibri"/>
+              </a:rPr>
+              <a:t>17</a:t>
+            </a:r>
+          </a:p>
+        </p:txBody>
+      </p:sp>
+      <p:sp>
+        <p:nvSpPr>
+          <p:cNvPr id="6" name="Rounded Rectangle 5"/>
+          <p:cNvSpPr/>
+          <p:nvPr/>
+        </p:nvSpPr>
+        <p:spPr>
+          <a:xfrm>
+            <a:off x="548640" y="1508760"/>
+            <a:ext cx="2011680" cy="457200"/>
+          </a:xfrm>
+          <a:prstGeom prst="roundRect">
+            <a:avLst>
+              <a:gd name="adj" fmla="val 50000"/>
+            </a:avLst>
+          </a:prstGeom>
+          <a:solidFill>
+            <a:srgbClr val="F2B705"/>
+          </a:solidFill>
+          <a:ln>
+            <a:noFill/>
+          </a:ln>
+          <a:effectLst/>
+        </p:spPr>
+        <p:style>
+          <a:lnRef idx="1">
+            <a:schemeClr val="accent1"/>
+          </a:lnRef>
+          <a:fillRef idx="3">
+            <a:schemeClr val="accent1"/>
+          </a:fillRef>
+          <a:effectRef idx="2">
+            <a:schemeClr val="accent1"/>
+          </a:effectRef>
+          <a:fontRef idx="minor">
+            <a:schemeClr val="lt1"/>
+          </a:fontRef>
+        </p:style>
+        <p:txBody>
+          <a:bodyPr rtlCol="0" anchor="ctr"/>
+          <a:lstStyle/>
+          <a:p/>
+        </p:txBody>
+      </p:sp>
+      <p:sp>
+        <p:nvSpPr>
+          <p:cNvPr id="7" name="TextBox 6"/>
+          <p:cNvSpPr txBox="1"/>
+          <p:nvPr/>
+        </p:nvSpPr>
+        <p:spPr>
+          <a:xfrm>
+            <a:off x="548640" y="1508760"/>
+            <a:ext cx="2011680" cy="457200"/>
+          </a:xfrm>
+          <a:prstGeom prst="rect">
+            <a:avLst/>
+          </a:prstGeom>
+          <a:noFill/>
+        </p:spPr>
+        <p:txBody>
+          <a:bodyPr wrap="square" anchor="ctr" lIns="0" rIns="0" tIns="0" bIns="0"/>
+          <a:lstStyle/>
+          <a:p>
+            <a:pPr algn="ctr"/>
+            <a:r>
+              <a:rPr sz="1400" b="1" i="0">
+                <a:solidFill>
+                  <a:srgbClr val="202122"/>
+                </a:solidFill>
+                <a:latin typeface="Calibri"/>
+              </a:rPr>
+              <a:t>25 minutes</a:t>
+            </a:r>
+          </a:p>
+        </p:txBody>
+      </p:sp>
+      <p:sp>
+        <p:nvSpPr>
+          <p:cNvPr id="8" name="TextBox 7"/>
+          <p:cNvSpPr txBox="1"/>
+          <p:nvPr/>
+        </p:nvSpPr>
+        <p:spPr>
+          <a:xfrm>
+            <a:off x="2743200" y="1508760"/>
+            <a:ext cx="4754880" cy="457200"/>
+          </a:xfrm>
+          <a:prstGeom prst="rect">
+            <a:avLst/>
+          </a:prstGeom>
+          <a:noFill/>
+        </p:spPr>
+        <p:txBody>
+          <a:bodyPr wrap="square" anchor="ctr" lIns="0" rIns="0" tIns="0" bIns="0"/>
+          <a:lstStyle/>
+          <a:p>
+            <a:pPr algn="l"/>
+            <a:r>
+              <a:rPr sz="1400" b="0" i="1">
+                <a:solidFill>
+                  <a:srgbClr val="54595D"/>
+                </a:solidFill>
+                <a:latin typeface="Calibri"/>
+              </a:rPr>
+              <a:t>Pairs</a:t>
+            </a:r>
+          </a:p>
+        </p:txBody>
+      </p:sp>
+      <p:sp>
+        <p:nvSpPr>
+          <p:cNvPr id="9" name="Oval 8"/>
+          <p:cNvSpPr/>
+          <p:nvPr/>
+        </p:nvSpPr>
+        <p:spPr>
+          <a:xfrm>
+            <a:off x="548640" y="2482596"/>
+            <a:ext cx="384048" cy="384048"/>
+          </a:xfrm>
+          <a:prstGeom prst="ellipse">
+            <a:avLst/>
+          </a:prstGeom>
+          <a:solidFill>
+            <a:srgbClr val="0645AD"/>
+          </a:solidFill>
+          <a:ln>
+            <a:noFill/>
+          </a:ln>
+          <a:effectLst/>
+        </p:spPr>
+        <p:style>
+          <a:lnRef idx="1">
+            <a:schemeClr val="accent1"/>
+          </a:lnRef>
+          <a:fillRef idx="3">
+            <a:schemeClr val="accent1"/>
+          </a:fillRef>
+          <a:effectRef idx="2">
+            <a:schemeClr val="accent1"/>
+          </a:effectRef>
+          <a:fontRef idx="minor">
+            <a:schemeClr val="lt1"/>
+          </a:fontRef>
+        </p:style>
+        <p:txBody>
+          <a:bodyPr rtlCol="0" anchor="ctr" lIns="0" rIns="0" tIns="0" bIns="0"/>
+          <a:lstStyle/>
+          <a:p>
+            <a:pPr algn="ctr"/>
+            <a:r>
+              <a:rPr sz="1300" b="1">
+                <a:solidFill>
+                  <a:srgbClr val="FFFFFF"/>
+                </a:solidFill>
+                <a:latin typeface="Calibri"/>
+              </a:rPr>
+              <a:t>1</a:t>
+            </a:r>
+          </a:p>
+        </p:txBody>
+      </p:sp>
+      <p:sp>
+        <p:nvSpPr>
+          <p:cNvPr id="10" name="TextBox 9"/>
+          <p:cNvSpPr txBox="1"/>
+          <p:nvPr/>
+        </p:nvSpPr>
+        <p:spPr>
+          <a:xfrm>
+            <a:off x="1143000" y="2240280"/>
+            <a:ext cx="5943600" cy="868680"/>
+          </a:xfrm>
+          <a:prstGeom prst="rect">
+            <a:avLst/>
+          </a:prstGeom>
+          <a:noFill/>
+        </p:spPr>
+        <p:txBody>
+          <a:bodyPr wrap="square" anchor="ctr" lIns="0" rIns="0" tIns="0" bIns="0"/>
+          <a:lstStyle/>
+          <a:p>
+            <a:pPr algn="l"/>
+            <a:r>
+              <a:rPr sz="1700" b="0" i="0">
+                <a:solidFill>
+                  <a:srgbClr val="202122"/>
+                </a:solidFill>
+                <a:latin typeface="Calibri"/>
+              </a:rPr>
+              <a:t>Use the fibre loss figures given by your teacher for three links.</a:t>
+            </a:r>
+          </a:p>
+        </p:txBody>
+      </p:sp>
+      <p:sp>
+        <p:nvSpPr>
+          <p:cNvPr id="11" name="Oval 10"/>
+          <p:cNvSpPr/>
+          <p:nvPr/>
+        </p:nvSpPr>
+        <p:spPr>
+          <a:xfrm>
+            <a:off x="548640" y="3461004"/>
+            <a:ext cx="384048" cy="384048"/>
+          </a:xfrm>
+          <a:prstGeom prst="ellipse">
+            <a:avLst/>
+          </a:prstGeom>
+          <a:solidFill>
+            <a:srgbClr val="0645AD"/>
+          </a:solidFill>
+          <a:ln>
+            <a:noFill/>
+          </a:ln>
+          <a:effectLst/>
+        </p:spPr>
+        <p:style>
+          <a:lnRef idx="1">
+            <a:schemeClr val="accent1"/>
+          </a:lnRef>
+          <a:fillRef idx="3">
+            <a:schemeClr val="accent1"/>
+          </a:fillRef>
+          <a:effectRef idx="2">
+            <a:schemeClr val="accent1"/>
+          </a:effectRef>
+          <a:fontRef idx="minor">
+            <a:schemeClr val="lt1"/>
+          </a:fontRef>
+        </p:style>
+        <p:txBody>
+          <a:bodyPr rtlCol="0" anchor="ctr" lIns="0" rIns="0" tIns="0" bIns="0"/>
+          <a:lstStyle/>
+          <a:p>
+            <a:pPr algn="ctr"/>
+            <a:r>
+              <a:rPr sz="1300" b="1">
+                <a:solidFill>
+                  <a:srgbClr val="FFFFFF"/>
+                </a:solidFill>
+                <a:latin typeface="Calibri"/>
+              </a:rPr>
+              <a:t>2</a:t>
+            </a:r>
+          </a:p>
+        </p:txBody>
+      </p:sp>
+      <p:sp>
+        <p:nvSpPr>
+          <p:cNvPr id="12" name="TextBox 11"/>
+          <p:cNvSpPr txBox="1"/>
+          <p:nvPr/>
+        </p:nvSpPr>
+        <p:spPr>
+          <a:xfrm>
+            <a:off x="1143000" y="3218688"/>
+            <a:ext cx="5943600" cy="868680"/>
+          </a:xfrm>
+          <a:prstGeom prst="rect">
+            <a:avLst/>
+          </a:prstGeom>
+          <a:noFill/>
+        </p:spPr>
+        <p:txBody>
+          <a:bodyPr wrap="square" anchor="ctr" lIns="0" rIns="0" tIns="0" bIns="0"/>
+          <a:lstStyle/>
+          <a:p>
+            <a:pPr algn="l"/>
+            <a:r>
+              <a:rPr sz="1700" b="0" i="0">
+                <a:solidFill>
+                  <a:srgbClr val="202122"/>
+                </a:solidFill>
+                <a:latin typeface="Calibri"/>
+              </a:rPr>
+              <a:t>Identify which link has a fault, and the most likely cause.</a:t>
+            </a:r>
+          </a:p>
+        </p:txBody>
+      </p:sp>
+      <p:sp>
+        <p:nvSpPr>
+          <p:cNvPr id="13" name="Oval 12"/>
+          <p:cNvSpPr/>
+          <p:nvPr/>
+        </p:nvSpPr>
+        <p:spPr>
+          <a:xfrm>
+            <a:off x="548640" y="4439412"/>
+            <a:ext cx="384048" cy="384048"/>
+          </a:xfrm>
+          <a:prstGeom prst="ellipse">
+            <a:avLst/>
+          </a:prstGeom>
+          <a:solidFill>
+            <a:srgbClr val="0645AD"/>
+          </a:solidFill>
+          <a:ln>
+            <a:noFill/>
+          </a:ln>
+          <a:effectLst/>
+        </p:spPr>
+        <p:style>
+          <a:lnRef idx="1">
+            <a:schemeClr val="accent1"/>
+          </a:lnRef>
+          <a:fillRef idx="3">
+            <a:schemeClr val="accent1"/>
+          </a:fillRef>
+          <a:effectRef idx="2">
+            <a:schemeClr val="accent1"/>
+          </a:effectRef>
+          <a:fontRef idx="minor">
+            <a:schemeClr val="lt1"/>
+          </a:fontRef>
+        </p:style>
+        <p:txBody>
+          <a:bodyPr rtlCol="0" anchor="ctr" lIns="0" rIns="0" tIns="0" bIns="0"/>
+          <a:lstStyle/>
+          <a:p>
+            <a:pPr algn="ctr"/>
+            <a:r>
+              <a:rPr sz="1300" b="1">
+                <a:solidFill>
+                  <a:srgbClr val="FFFFFF"/>
+                </a:solidFill>
+                <a:latin typeface="Calibri"/>
+              </a:rPr>
+              <a:t>3</a:t>
+            </a:r>
+          </a:p>
+        </p:txBody>
+      </p:sp>
+      <p:sp>
+        <p:nvSpPr>
+          <p:cNvPr id="14" name="TextBox 13"/>
+          <p:cNvSpPr txBox="1"/>
+          <p:nvPr/>
+        </p:nvSpPr>
+        <p:spPr>
+          <a:xfrm>
+            <a:off x="1143000" y="4197096"/>
+            <a:ext cx="5943600" cy="868680"/>
+          </a:xfrm>
+          <a:prstGeom prst="rect">
+            <a:avLst/>
+          </a:prstGeom>
+          <a:noFill/>
+        </p:spPr>
+        <p:txBody>
+          <a:bodyPr wrap="square" anchor="ctr" lIns="0" rIns="0" tIns="0" bIns="0"/>
+          <a:lstStyle/>
+          <a:p>
+            <a:pPr algn="l"/>
+            <a:r>
+              <a:rPr sz="1700" b="0" i="0">
+                <a:solidFill>
+                  <a:srgbClr val="202122"/>
+                </a:solidFill>
+                <a:latin typeface="Calibri"/>
+              </a:rPr>
+              <a:t>Calculate current for three copper examples using Ohm's law.</a:t>
+            </a:r>
+          </a:p>
+        </p:txBody>
+      </p:sp>
+      <p:sp>
+        <p:nvSpPr>
+          <p:cNvPr id="15" name="Oval 14"/>
+          <p:cNvSpPr/>
+          <p:nvPr/>
+        </p:nvSpPr>
+        <p:spPr>
+          <a:xfrm>
+            <a:off x="548640" y="5417820"/>
+            <a:ext cx="384048" cy="384048"/>
+          </a:xfrm>
+          <a:prstGeom prst="ellipse">
+            <a:avLst/>
+          </a:prstGeom>
+          <a:solidFill>
+            <a:srgbClr val="0645AD"/>
+          </a:solidFill>
+          <a:ln>
+            <a:noFill/>
+          </a:ln>
+          <a:effectLst/>
+        </p:spPr>
+        <p:style>
+          <a:lnRef idx="1">
+            <a:schemeClr val="accent1"/>
+          </a:lnRef>
+          <a:fillRef idx="3">
+            <a:schemeClr val="accent1"/>
+          </a:fillRef>
+          <a:effectRef idx="2">
+            <a:schemeClr val="accent1"/>
+          </a:effectRef>
+          <a:fontRef idx="minor">
+            <a:schemeClr val="lt1"/>
+          </a:fontRef>
+        </p:style>
+        <p:txBody>
+          <a:bodyPr rtlCol="0" anchor="ctr" lIns="0" rIns="0" tIns="0" bIns="0"/>
+          <a:lstStyle/>
+          <a:p>
+            <a:pPr algn="ctr"/>
+            <a:r>
+              <a:rPr sz="1300" b="1">
+                <a:solidFill>
+                  <a:srgbClr val="FFFFFF"/>
+                </a:solidFill>
+                <a:latin typeface="Calibri"/>
+              </a:rPr>
+              <a:t>4</a:t>
+            </a:r>
+          </a:p>
+        </p:txBody>
+      </p:sp>
+      <p:sp>
+        <p:nvSpPr>
+          <p:cNvPr id="16" name="TextBox 15"/>
+          <p:cNvSpPr txBox="1"/>
+          <p:nvPr/>
+        </p:nvSpPr>
+        <p:spPr>
+          <a:xfrm>
+            <a:off x="1143000" y="5175504"/>
+            <a:ext cx="5943600" cy="868680"/>
+          </a:xfrm>
+          <a:prstGeom prst="rect">
+            <a:avLst/>
+          </a:prstGeom>
+          <a:noFill/>
+        </p:spPr>
+        <p:txBody>
+          <a:bodyPr wrap="square" anchor="ctr" lIns="0" rIns="0" tIns="0" bIns="0"/>
+          <a:lstStyle/>
+          <a:p>
+            <a:pPr algn="l"/>
+            <a:r>
+              <a:rPr sz="1700" b="0" i="0">
+                <a:solidFill>
+                  <a:srgbClr val="202122"/>
+                </a:solidFill>
+                <a:latin typeface="Calibri"/>
+              </a:rPr>
+              <a:t>Explain why a 150 m copper run would be a problem.</a:t>
+            </a:r>
+          </a:p>
+        </p:txBody>
+      </p:sp>
+      <p:sp>
+        <p:nvSpPr>
+          <p:cNvPr id="17" name="Rounded Rectangle 16"/>
+          <p:cNvSpPr/>
+          <p:nvPr/>
+        </p:nvSpPr>
+        <p:spPr>
+          <a:xfrm>
+            <a:off x="7772400" y="1508760"/>
+            <a:ext cx="3867912" cy="4572000"/>
+          </a:xfrm>
+          <a:prstGeom prst="roundRect">
+            <a:avLst>
+              <a:gd name="adj" fmla="val 8000"/>
+            </a:avLst>
+          </a:prstGeom>
+          <a:solidFill>
+            <a:srgbClr val="EAF3FF"/>
+          </a:solidFill>
+          <a:ln>
+            <a:noFill/>
+          </a:ln>
+          <a:effectLst/>
+        </p:spPr>
+        <p:style>
+          <a:lnRef idx="1">
+            <a:schemeClr val="accent1"/>
+          </a:lnRef>
+          <a:fillRef idx="3">
+            <a:schemeClr val="accent1"/>
+          </a:fillRef>
+          <a:effectRef idx="2">
+            <a:schemeClr val="accent1"/>
+          </a:effectRef>
+          <a:fontRef idx="minor">
+            <a:schemeClr val="lt1"/>
+          </a:fontRef>
+        </p:style>
+        <p:txBody>
+          <a:bodyPr rtlCol="0" anchor="ctr"/>
+          <a:lstStyle/>
+          <a:p/>
+        </p:txBody>
+      </p:sp>
+      <p:sp>
+        <p:nvSpPr>
+          <p:cNvPr id="18" name="TextBox 17"/>
+          <p:cNvSpPr txBox="1"/>
+          <p:nvPr/>
+        </p:nvSpPr>
+        <p:spPr>
+          <a:xfrm>
+            <a:off x="8046720" y="1737360"/>
+            <a:ext cx="3291840" cy="365760"/>
+          </a:xfrm>
+          <a:prstGeom prst="rect">
+            <a:avLst/>
+          </a:prstGeom>
+          <a:noFill/>
+        </p:spPr>
+        <p:txBody>
+          <a:bodyPr wrap="square" anchor="t" lIns="0" rIns="0" tIns="0" bIns="0"/>
+          <a:lstStyle/>
+          <a:p>
+            <a:pPr algn="l"/>
+            <a:r>
+              <a:rPr sz="1300" b="1" i="0">
+                <a:solidFill>
+                  <a:srgbClr val="0645AD"/>
+                </a:solidFill>
+                <a:latin typeface="Calibri"/>
+              </a:rPr>
+              <a:t>SUCCESS CRITERIA</a:t>
+            </a:r>
+          </a:p>
+        </p:txBody>
+      </p:sp>
+      <p:sp>
+        <p:nvSpPr>
+          <p:cNvPr id="19" name="TextBox 18"/>
+          <p:cNvSpPr txBox="1"/>
+          <p:nvPr/>
+        </p:nvSpPr>
+        <p:spPr>
+          <a:xfrm>
+            <a:off x="8046720" y="2240280"/>
+            <a:ext cx="3337560" cy="3657600"/>
+          </a:xfrm>
+          <a:prstGeom prst="rect">
+            <a:avLst/>
+          </a:prstGeom>
+          <a:noFill/>
+        </p:spPr>
+        <p:txBody>
+          <a:bodyPr wrap="square" lIns="0" rIns="0" tIns="0" bIns="0">
+            <a:spAutoFit/>
+          </a:bodyPr>
+          <a:lstStyle/>
+          <a:p>
+            <a:pPr marL="274320" indent="-274320">
+              <a:spcAft>
+                <a:spcPts val="810"/>
+              </a:spcAft>
+              <a:buClr>
+                <a:srgbClr val="0645AD"/>
+              </a:buClr>
+              <a:buFont typeface="Arial"/>
+              <a:buChar char="•"/>
+            </a:pPr>
+            <a:r>
+              <a:rPr sz="1800" b="0">
+                <a:solidFill>
+                  <a:srgbClr val="202122"/>
+                </a:solidFill>
+                <a:latin typeface="Calibri"/>
+              </a:rPr>
+              <a:t>Faulty link found with evidence</a:t>
+            </a:r>
+          </a:p>
+          <a:p>
+            <a:pPr marL="274320" indent="-274320">
+              <a:spcAft>
+                <a:spcPts val="810"/>
+              </a:spcAft>
+              <a:buClr>
+                <a:srgbClr val="0645AD"/>
+              </a:buClr>
+              <a:buFont typeface="Arial"/>
+              <a:buChar char="•"/>
+            </a:pPr>
+            <a:r>
+              <a:rPr sz="1800" b="0">
+                <a:solidFill>
+                  <a:srgbClr val="202122"/>
+                </a:solidFill>
+                <a:latin typeface="Calibri"/>
+              </a:rPr>
+              <a:t>Calculations correct with units</a:t>
+            </a:r>
+          </a:p>
+          <a:p>
+            <a:pPr marL="274320" indent="-274320">
+              <a:spcAft>
+                <a:spcPts val="810"/>
+              </a:spcAft>
+              <a:buClr>
+                <a:srgbClr val="0645AD"/>
+              </a:buClr>
+              <a:buFont typeface="Arial"/>
+              <a:buChar char="•"/>
+            </a:pPr>
+            <a:r>
+              <a:rPr sz="1800" b="0">
+                <a:solidFill>
+                  <a:srgbClr val="202122"/>
+                </a:solidFill>
+                <a:latin typeface="Calibri"/>
+              </a:rPr>
+              <a:t>Maximum length explained using resistance</a:t>
+            </a:r>
+          </a:p>
+        </p:txBody>
+      </p:sp>
+    </p:spTree>
+  </p:cSld>
+  <p:clrMapOvr>
+    <a:masterClrMapping/>
+  </p:clrMapOvr>
+</p:sld>
+</file>
+
+<file path=ppt/slides/slide18.xml><?xml version="1.0" encoding="utf-8"?>
+<p:sld xmlns:a="http://schemas.openxmlformats.org/drawingml/2006/main" xmlns:p="http://schemas.openxmlformats.org/presentationml/2006/main" xmlns:r="http://schemas.openxmlformats.org/officeDocument/2006/relationships">
+  <p:cSld>
+    <p:bg>
+      <p:bgPr>
+        <a:solidFill>
           <a:srgbClr val="03306E"/>
         </a:solidFill>
         <a:effectLst/>
@@ -5445,8 +10336,8 @@
         </p:nvSpPr>
         <p:spPr>
           <a:xfrm>
-            <a:off x="548640" y="1600200"/>
-            <a:ext cx="6675120" cy="4572000"/>
+            <a:off x="548640" y="1554480"/>
+            <a:ext cx="6720840" cy="4617720"/>
           </a:xfrm>
           <a:prstGeom prst="rect">
             <a:avLst/>
@@ -5459,117 +10350,67 @@
           </a:bodyPr>
           <a:lstStyle/>
           <a:p>
-            <a:pPr marL="274320" indent="-274320">
+            <a:pPr>
               <a:spcAft>
-                <a:spcPts val="945"/>
+                <a:spcPts val="1140"/>
               </a:spcAft>
-              <a:buClr>
-                <a:srgbClr val="0645AD"/>
-              </a:buClr>
-              <a:buFont typeface="Arial"/>
-              <a:buChar char="•"/>
             </a:pPr>
             <a:r>
-              <a:rPr sz="2100" b="0">
+              <a:rPr sz="1900" b="0">
                 <a:solidFill>
                   <a:srgbClr val="202122"/>
                 </a:solidFill>
                 <a:latin typeface="Calibri"/>
               </a:rPr>
-              <a:t>Data is represented as bits, bytes and packets.</a:t>
-            </a:r>
-          </a:p>
-          <a:p>
-            <a:pPr marL="274320" indent="-274320">
+              <a:t>Networks carry data as bits, grouped into bytes and packets.</a:t>
+            </a:r>
+          </a:p>
+          <a:p>
+            <a:pPr>
               <a:spcAft>
-                <a:spcPts val="945"/>
+                <a:spcPts val="1140"/>
               </a:spcAft>
-              <a:buClr>
-                <a:srgbClr val="0645AD"/>
-              </a:buClr>
-              <a:buFont typeface="Arial"/>
-              <a:buChar char="•"/>
             </a:pPr>
             <a:r>
-              <a:rPr sz="2100" b="0">
+              <a:rPr sz="1900" b="0">
                 <a:solidFill>
                   <a:srgbClr val="202122"/>
                 </a:solidFill>
                 <a:latin typeface="Calibri"/>
               </a:rPr>
-              <a:t>Transmission is synchronous or asynchronous.</a:t>
-            </a:r>
-          </a:p>
-          <a:p>
-            <a:pPr marL="274320" indent="-274320">
+              <a:t>Transmission can be synchronous, with sender and receiver sharing a clock, or asynchronous, with start and stop bits marking each chunk. Links must detect and correct errors, cope with limited bandwidth and noise, and may compress data.</a:t>
+            </a:r>
+          </a:p>
+          <a:p>
+            <a:pPr>
               <a:spcAft>
-                <a:spcPts val="945"/>
+                <a:spcPts val="1140"/>
               </a:spcAft>
-              <a:buClr>
-                <a:srgbClr val="0645AD"/>
-              </a:buClr>
-              <a:buFont typeface="Arial"/>
-              <a:buChar char="•"/>
             </a:pPr>
             <a:r>
-              <a:rPr sz="2100" b="0">
+              <a:rPr sz="1900" b="0">
                 <a:solidFill>
                   <a:srgbClr val="202122"/>
                 </a:solidFill>
                 <a:latin typeface="Calibri"/>
               </a:rPr>
-              <a:t>Links must handle error detection and correction, bandwidth limits, noise and compression.</a:t>
-            </a:r>
-          </a:p>
-          <a:p>
-            <a:pPr marL="274320" indent="-274320">
+              <a:t>When several devices share a medium, an access method decides who sends. CSMA/CD (wired) listens, sends, and backs off if a collision is detected. CSMA/CA (wireless) tries to avoid collisions before sending.</a:t>
+            </a:r>
+          </a:p>
+          <a:p>
+            <a:pPr>
               <a:spcAft>
-                <a:spcPts val="945"/>
+                <a:spcPts val="1140"/>
               </a:spcAft>
-              <a:buClr>
-                <a:srgbClr val="0645AD"/>
-              </a:buClr>
-              <a:buFont typeface="Arial"/>
-              <a:buChar char="•"/>
             </a:pPr>
             <a:r>
-              <a:rPr sz="2100" b="1">
+              <a:rPr sz="1900" b="0">
                 <a:solidFill>
                   <a:srgbClr val="202122"/>
                 </a:solidFill>
                 <a:latin typeface="Calibri"/>
               </a:rPr>
-              <a:t>Access methods:</a:t>
-            </a:r>
-            <a:r>
-              <a:rPr sz="2100" b="0">
-                <a:solidFill>
-                  <a:srgbClr val="202122"/>
-                </a:solidFill>
-                <a:latin typeface="Calibri"/>
-              </a:rPr>
-              <a:t> CSMA/CD on wired networks, CSMA/CA on wireless.</a:t>
-            </a:r>
-          </a:p>
-          <a:p>
-            <a:pPr marL="274320" indent="-274320">
-              <a:spcAft>
-                <a:spcPts val="945"/>
-              </a:spcAft>
-              <a:buClr>
-                <a:srgbClr val="0645AD"/>
-              </a:buClr>
-              <a:buFont typeface="Arial"/>
-              <a:buChar char="•"/>
-            </a:pPr>
-            <a:r>
-              <a:rPr sz="2100" b="0">
-                <a:solidFill>
-                  <a:srgbClr val="202122"/>
-                </a:solidFill>
-                <a:latin typeface="Calibri"/>
-              </a:rPr>
-              <a:t>The NIC encapsulates data into frames, packets and datagrams with addresses and sequence numbers.</a:t>
+              <a:t>The network interface card wraps data into frames, packets and datagrams with addresses and sequence numbers.</a:t>
             </a:r>
           </a:p>
         </p:txBody>
@@ -5582,8 +10423,8 @@
         </p:nvSpPr>
         <p:spPr>
           <a:xfrm>
-            <a:off x="7772400" y="1600200"/>
-            <a:ext cx="3867912" cy="4434840"/>
+            <a:off x="7772400" y="1554480"/>
+            <a:ext cx="3867912" cy="4526280"/>
           </a:xfrm>
           <a:prstGeom prst="roundRect">
             <a:avLst>
@@ -5626,7 +10467,7 @@
         </p:nvSpPr>
         <p:spPr>
           <a:xfrm>
-            <a:off x="8046720" y="1874519"/>
+            <a:off x="8046720" y="1828800"/>
             <a:ext cx="548640" cy="548640"/>
           </a:xfrm>
           <a:prstGeom prst="ellipse">
@@ -5660,13 +10501,13 @@
           <a:p>
             <a:pPr algn="ctr"/>
             <a:r>
-              <a:rPr sz="2000" b="1">
+              <a:rPr sz="1300" b="1">
                 <a:solidFill>
                   <a:srgbClr val="202122"/>
                 </a:solidFill>
                 <a:latin typeface="Calibri"/>
               </a:rPr>
-              <a:t>!</a:t>
+              <a:t>e.g.</a:t>
             </a:r>
           </a:p>
         </p:txBody>
@@ -5679,7 +10520,7 @@
         </p:nvSpPr>
         <p:spPr>
           <a:xfrm>
-            <a:off x="8046720" y="2606040"/>
+            <a:off x="8046720" y="2560320"/>
             <a:ext cx="3291840" cy="365760"/>
           </a:xfrm>
           <a:prstGeom prst="rect">
@@ -5699,7 +10540,7 @@
                 </a:solidFill>
                 <a:latin typeface="Calibri"/>
               </a:rPr>
-              <a:t>KEY IDEA</a:t>
+              <a:t>EXAMPLE</a:t>
             </a:r>
           </a:p>
         </p:txBody>
@@ -5712,8 +10553,8 @@
         </p:nvSpPr>
         <p:spPr>
           <a:xfrm>
-            <a:off x="8046720" y="3017520"/>
-            <a:ext cx="3291840" cy="2926080"/>
+            <a:off x="8046720" y="2971800"/>
+            <a:ext cx="3291840" cy="2971800"/>
           </a:xfrm>
           <a:prstGeom prst="rect">
             <a:avLst/>
@@ -5726,13 +10567,13 @@
           <a:p>
             <a:pPr algn="l"/>
             <a:r>
-              <a:rPr sz="2200" b="0" i="0">
+              <a:rPr sz="1900" b="0" i="0">
                 <a:solidFill>
                   <a:srgbClr val="FFFFFF"/>
                 </a:solidFill>
                 <a:latin typeface="Cambria"/>
               </a:rPr>
-              <a:t>Addressing: IPv4 (schemes, subnetting, masks) and IPv6 (address types).</a:t>
+              <a:t>On Wi-Fi, devices can't hear every collision, so they wait for a clear channel and a short random time before sending: that's CSMA/CA.</a:t>
             </a:r>
           </a:p>
         </p:txBody>
@@ -5824,7 +10665,7 @@
                 </a:solidFill>
                 <a:latin typeface="Cambria"/>
               </a:rPr>
-              <a:t>How fibre carries light</a:t>
+              <a:t>Principles of data transmission</a:t>
             </a:r>
           </a:p>
         </p:txBody>
@@ -5897,18 +10738,155 @@
       </p:sp>
       <p:sp>
         <p:nvSpPr>
-          <p:cNvPr id="6" name="Rounded Rectangle 5"/>
+          <p:cNvPr id="6" name="TextBox 5"/>
+          <p:cNvSpPr txBox="1"/>
+          <p:nvPr/>
+        </p:nvSpPr>
+        <p:spPr>
+          <a:xfrm>
+            <a:off x="548640" y="1600200"/>
+            <a:ext cx="6675120" cy="4572000"/>
+          </a:xfrm>
+          <a:prstGeom prst="rect">
+            <a:avLst/>
+          </a:prstGeom>
+          <a:noFill/>
+        </p:spPr>
+        <p:txBody>
+          <a:bodyPr wrap="square" lIns="0" rIns="0" tIns="0" bIns="0">
+            <a:spAutoFit/>
+          </a:bodyPr>
+          <a:lstStyle/>
+          <a:p>
+            <a:pPr marL="274320" indent="-274320">
+              <a:spcAft>
+                <a:spcPts val="945"/>
+              </a:spcAft>
+              <a:buClr>
+                <a:srgbClr val="0645AD"/>
+              </a:buClr>
+              <a:buFont typeface="Arial"/>
+              <a:buChar char="•"/>
+            </a:pPr>
+            <a:r>
+              <a:rPr sz="2100" b="0">
+                <a:solidFill>
+                  <a:srgbClr val="202122"/>
+                </a:solidFill>
+                <a:latin typeface="Calibri"/>
+              </a:rPr>
+              <a:t>Data is represented as bits, bytes and packets.</a:t>
+            </a:r>
+          </a:p>
+          <a:p>
+            <a:pPr marL="274320" indent="-274320">
+              <a:spcAft>
+                <a:spcPts val="945"/>
+              </a:spcAft>
+              <a:buClr>
+                <a:srgbClr val="0645AD"/>
+              </a:buClr>
+              <a:buFont typeface="Arial"/>
+              <a:buChar char="•"/>
+            </a:pPr>
+            <a:r>
+              <a:rPr sz="2100" b="0">
+                <a:solidFill>
+                  <a:srgbClr val="202122"/>
+                </a:solidFill>
+                <a:latin typeface="Calibri"/>
+              </a:rPr>
+              <a:t>Transmission is synchronous or asynchronous.</a:t>
+            </a:r>
+          </a:p>
+          <a:p>
+            <a:pPr marL="274320" indent="-274320">
+              <a:spcAft>
+                <a:spcPts val="945"/>
+              </a:spcAft>
+              <a:buClr>
+                <a:srgbClr val="0645AD"/>
+              </a:buClr>
+              <a:buFont typeface="Arial"/>
+              <a:buChar char="•"/>
+            </a:pPr>
+            <a:r>
+              <a:rPr sz="2100" b="0">
+                <a:solidFill>
+                  <a:srgbClr val="202122"/>
+                </a:solidFill>
+                <a:latin typeface="Calibri"/>
+              </a:rPr>
+              <a:t>Links must handle error detection and correction, bandwidth limits, noise and compression.</a:t>
+            </a:r>
+          </a:p>
+          <a:p>
+            <a:pPr marL="274320" indent="-274320">
+              <a:spcAft>
+                <a:spcPts val="945"/>
+              </a:spcAft>
+              <a:buClr>
+                <a:srgbClr val="0645AD"/>
+              </a:buClr>
+              <a:buFont typeface="Arial"/>
+              <a:buChar char="•"/>
+            </a:pPr>
+            <a:r>
+              <a:rPr sz="2100" b="1">
+                <a:solidFill>
+                  <a:srgbClr val="202122"/>
+                </a:solidFill>
+                <a:latin typeface="Calibri"/>
+              </a:rPr>
+              <a:t>Access methods:</a:t>
+            </a:r>
+            <a:r>
+              <a:rPr sz="2100" b="0">
+                <a:solidFill>
+                  <a:srgbClr val="202122"/>
+                </a:solidFill>
+                <a:latin typeface="Calibri"/>
+              </a:rPr>
+              <a:t> CSMA/CD on wired networks, CSMA/CA on wireless.</a:t>
+            </a:r>
+          </a:p>
+          <a:p>
+            <a:pPr marL="274320" indent="-274320">
+              <a:spcAft>
+                <a:spcPts val="945"/>
+              </a:spcAft>
+              <a:buClr>
+                <a:srgbClr val="0645AD"/>
+              </a:buClr>
+              <a:buFont typeface="Arial"/>
+              <a:buChar char="•"/>
+            </a:pPr>
+            <a:r>
+              <a:rPr sz="2100" b="0">
+                <a:solidFill>
+                  <a:srgbClr val="202122"/>
+                </a:solidFill>
+                <a:latin typeface="Calibri"/>
+              </a:rPr>
+              <a:t>The NIC encapsulates data into frames, packets and datagrams with addresses and sequence numbers.</a:t>
+            </a:r>
+          </a:p>
+        </p:txBody>
+      </p:sp>
+      <p:sp>
+        <p:nvSpPr>
+          <p:cNvPr id="7" name="Rounded Rectangle 6"/>
           <p:cNvSpPr/>
           <p:nvPr/>
         </p:nvSpPr>
         <p:spPr>
           <a:xfrm>
-            <a:off x="548640" y="1600200"/>
-            <a:ext cx="5364327" cy="640080"/>
+            <a:off x="7772400" y="1600200"/>
+            <a:ext cx="3867912" cy="4434840"/>
           </a:xfrm>
           <a:prstGeom prst="roundRect">
             <a:avLst>
-              <a:gd name="adj" fmla="val 15000"/>
+              <a:gd name="adj" fmla="val 8000"/>
             </a:avLst>
           </a:prstGeom>
           <a:solidFill>
@@ -5941,55 +10919,20 @@
       </p:sp>
       <p:sp>
         <p:nvSpPr>
-          <p:cNvPr id="7" name="TextBox 6"/>
-          <p:cNvSpPr txBox="1"/>
-          <p:nvPr/>
-        </p:nvSpPr>
-        <p:spPr>
-          <a:xfrm>
-            <a:off x="777240" y="1600200"/>
-            <a:ext cx="4907127" cy="640080"/>
-          </a:xfrm>
-          <a:prstGeom prst="rect">
-            <a:avLst/>
-          </a:prstGeom>
-          <a:noFill/>
-        </p:spPr>
-        <p:txBody>
-          <a:bodyPr wrap="square" anchor="ctr" lIns="0" rIns="0" tIns="0" bIns="0"/>
-          <a:lstStyle/>
-          <a:p>
-            <a:pPr algn="l"/>
-            <a:r>
-              <a:rPr sz="2000" b="1" i="0">
-                <a:solidFill>
-                  <a:srgbClr val="FFFFFF"/>
-                </a:solidFill>
-                <a:latin typeface="Calibri"/>
-              </a:rPr>
-              <a:t>Total internal reflection</a:t>
-            </a:r>
-          </a:p>
-        </p:txBody>
-      </p:sp>
-      <p:sp>
-        <p:nvSpPr>
-          <p:cNvPr id="8" name="Rounded Rectangle 7"/>
+          <p:cNvPr id="8" name="Oval 7"/>
           <p:cNvSpPr/>
           <p:nvPr/>
         </p:nvSpPr>
         <p:spPr>
           <a:xfrm>
-            <a:off x="548640" y="2377440"/>
-            <a:ext cx="5364327" cy="3794760"/>
-          </a:xfrm>
-          <a:prstGeom prst="roundRect">
-            <a:avLst>
-              <a:gd name="adj" fmla="val 4000"/>
-            </a:avLst>
+            <a:off x="8046720" y="1874519"/>
+            <a:ext cx="548640" cy="548640"/>
+          </a:xfrm>
+          <a:prstGeom prst="ellipse">
+            <a:avLst/>
           </a:prstGeom>
           <a:solidFill>
-            <a:srgbClr val="EAF3FF"/>
+            <a:srgbClr val="F2B705"/>
           </a:solidFill>
           <a:ln>
             <a:noFill/>
@@ -6011,9 +10954,20 @@
           </a:fontRef>
         </p:style>
         <p:txBody>
-          <a:bodyPr rtlCol="0" anchor="ctr"/>
-          <a:lstStyle/>
-          <a:p/>
+          <a:bodyPr rtlCol="0" anchor="ctr" lIns="0" rIns="0" tIns="0" bIns="0"/>
+          <a:lstStyle/>
+          <a:p>
+            <a:pPr algn="ctr"/>
+            <a:r>
+              <a:rPr sz="2000" b="1">
+                <a:solidFill>
+                  <a:srgbClr val="202122"/>
+                </a:solidFill>
+                <a:latin typeface="Calibri"/>
+              </a:rPr>
+              <a:t>!</a:t>
+            </a:r>
+          </a:p>
         </p:txBody>
       </p:sp>
       <p:sp>
@@ -6024,284 +10978,60 @@
         </p:nvSpPr>
         <p:spPr>
           <a:xfrm>
-            <a:off x="822959" y="2606040"/>
-            <a:ext cx="4815687" cy="3337560"/>
-          </a:xfrm>
-          <a:prstGeom prst="rect">
-            <a:avLst/>
-          </a:prstGeom>
-          <a:noFill/>
-        </p:spPr>
-        <p:txBody>
-          <a:bodyPr wrap="square" lIns="0" rIns="0" tIns="0" bIns="0">
-            <a:spAutoFit/>
-          </a:bodyPr>
-          <a:lstStyle/>
-          <a:p>
-            <a:pPr marL="274320" indent="-274320">
-              <a:spcAft>
-                <a:spcPts val="990"/>
-              </a:spcAft>
-              <a:buClr>
-                <a:srgbClr val="0645AD"/>
-              </a:buClr>
-              <a:buFont typeface="Arial"/>
-              <a:buChar char="•"/>
-            </a:pPr>
-            <a:r>
-              <a:rPr sz="2200" b="0">
-                <a:solidFill>
-                  <a:srgbClr val="202122"/>
-                </a:solidFill>
-                <a:latin typeface="Calibri"/>
-              </a:rPr>
-              <a:t>Light travels down the glass core</a:t>
-            </a:r>
-          </a:p>
-          <a:p>
-            <a:pPr marL="274320" indent="-274320">
-              <a:spcAft>
-                <a:spcPts val="990"/>
-              </a:spcAft>
-              <a:buClr>
-                <a:srgbClr val="0645AD"/>
-              </a:buClr>
-              <a:buFont typeface="Arial"/>
-              <a:buChar char="•"/>
-            </a:pPr>
-            <a:r>
-              <a:rPr sz="2200" b="0">
-                <a:solidFill>
-                  <a:srgbClr val="202122"/>
-                </a:solidFill>
-                <a:latin typeface="Calibri"/>
-              </a:rPr>
-              <a:t>It reflects off the boundary with the cladding</a:t>
-            </a:r>
-          </a:p>
-          <a:p>
-            <a:pPr marL="274320" indent="-274320">
-              <a:spcAft>
-                <a:spcPts val="990"/>
-              </a:spcAft>
-              <a:buClr>
-                <a:srgbClr val="0645AD"/>
-              </a:buClr>
-              <a:buFont typeface="Arial"/>
-              <a:buChar char="•"/>
-            </a:pPr>
-            <a:r>
-              <a:rPr sz="2200" b="0">
-                <a:solidFill>
-                  <a:srgbClr val="202122"/>
-                </a:solidFill>
-                <a:latin typeface="Calibri"/>
-              </a:rPr>
-              <a:t>Refraction principles keep it inside the core</a:t>
-            </a:r>
-          </a:p>
-        </p:txBody>
-      </p:sp>
-      <p:sp>
-        <p:nvSpPr>
-          <p:cNvPr id="10" name="Rounded Rectangle 9"/>
-          <p:cNvSpPr/>
-          <p:nvPr/>
-        </p:nvSpPr>
-        <p:spPr>
-          <a:xfrm>
-            <a:off x="6278727" y="1600200"/>
-            <a:ext cx="5364327" cy="640080"/>
-          </a:xfrm>
-          <a:prstGeom prst="roundRect">
-            <a:avLst>
-              <a:gd name="adj" fmla="val 15000"/>
-            </a:avLst>
-          </a:prstGeom>
-          <a:solidFill>
-            <a:srgbClr val="0645AD"/>
-          </a:solidFill>
-          <a:ln>
-            <a:noFill/>
-          </a:ln>
-          <a:effectLst/>
-        </p:spPr>
-        <p:style>
-          <a:lnRef idx="1">
-            <a:schemeClr val="accent1"/>
-          </a:lnRef>
-          <a:fillRef idx="3">
-            <a:schemeClr val="accent1"/>
-          </a:fillRef>
-          <a:effectRef idx="2">
-            <a:schemeClr val="accent1"/>
-          </a:effectRef>
-          <a:fontRef idx="minor">
-            <a:schemeClr val="lt1"/>
-          </a:fontRef>
-        </p:style>
-        <p:txBody>
-          <a:bodyPr rtlCol="0" anchor="ctr"/>
-          <a:lstStyle/>
-          <a:p/>
-        </p:txBody>
-      </p:sp>
-      <p:sp>
-        <p:nvSpPr>
-          <p:cNvPr id="11" name="TextBox 10"/>
-          <p:cNvSpPr txBox="1"/>
-          <p:nvPr/>
-        </p:nvSpPr>
-        <p:spPr>
-          <a:xfrm>
-            <a:off x="6507327" y="1600200"/>
-            <a:ext cx="4907127" cy="640080"/>
-          </a:xfrm>
-          <a:prstGeom prst="rect">
-            <a:avLst/>
-          </a:prstGeom>
-          <a:noFill/>
-        </p:spPr>
-        <p:txBody>
-          <a:bodyPr wrap="square" anchor="ctr" lIns="0" rIns="0" tIns="0" bIns="0"/>
+            <a:off x="8046720" y="2606040"/>
+            <a:ext cx="3291840" cy="365760"/>
+          </a:xfrm>
+          <a:prstGeom prst="rect">
+            <a:avLst/>
+          </a:prstGeom>
+          <a:noFill/>
+        </p:spPr>
+        <p:txBody>
+          <a:bodyPr wrap="square" anchor="t" lIns="0" rIns="0" tIns="0" bIns="0"/>
           <a:lstStyle/>
           <a:p>
             <a:pPr algn="l"/>
             <a:r>
-              <a:rPr sz="2000" b="1" i="0">
+              <a:rPr sz="1300" b="1" i="0">
+                <a:solidFill>
+                  <a:srgbClr val="A9C8F0"/>
+                </a:solidFill>
+                <a:latin typeface="Calibri"/>
+              </a:rPr>
+              <a:t>KEY IDEA</a:t>
+            </a:r>
+          </a:p>
+        </p:txBody>
+      </p:sp>
+      <p:sp>
+        <p:nvSpPr>
+          <p:cNvPr id="10" name="TextBox 9"/>
+          <p:cNvSpPr txBox="1"/>
+          <p:nvPr/>
+        </p:nvSpPr>
+        <p:spPr>
+          <a:xfrm>
+            <a:off x="8046720" y="3017520"/>
+            <a:ext cx="3291840" cy="2926080"/>
+          </a:xfrm>
+          <a:prstGeom prst="rect">
+            <a:avLst/>
+          </a:prstGeom>
+          <a:noFill/>
+        </p:spPr>
+        <p:txBody>
+          <a:bodyPr wrap="square" anchor="t" lIns="0" rIns="0" tIns="0" bIns="0"/>
+          <a:lstStyle/>
+          <a:p>
+            <a:pPr algn="l"/>
+            <a:r>
+              <a:rPr sz="2200" b="0" i="0">
                 <a:solidFill>
                   <a:srgbClr val="FFFFFF"/>
                 </a:solidFill>
-                <a:latin typeface="Calibri"/>
-              </a:rPr>
-              <a:t>Single-mode and multi-mode</a:t>
-            </a:r>
-          </a:p>
-        </p:txBody>
-      </p:sp>
-      <p:sp>
-        <p:nvSpPr>
-          <p:cNvPr id="12" name="Rounded Rectangle 11"/>
-          <p:cNvSpPr/>
-          <p:nvPr/>
-        </p:nvSpPr>
-        <p:spPr>
-          <a:xfrm>
-            <a:off x="6278727" y="2377440"/>
-            <a:ext cx="5364327" cy="3794760"/>
-          </a:xfrm>
-          <a:prstGeom prst="roundRect">
-            <a:avLst>
-              <a:gd name="adj" fmla="val 4000"/>
-            </a:avLst>
-          </a:prstGeom>
-          <a:solidFill>
-            <a:srgbClr val="EAF3FF"/>
-          </a:solidFill>
-          <a:ln>
-            <a:noFill/>
-          </a:ln>
-          <a:effectLst/>
-        </p:spPr>
-        <p:style>
-          <a:lnRef idx="1">
-            <a:schemeClr val="accent1"/>
-          </a:lnRef>
-          <a:fillRef idx="3">
-            <a:schemeClr val="accent1"/>
-          </a:fillRef>
-          <a:effectRef idx="2">
-            <a:schemeClr val="accent1"/>
-          </a:effectRef>
-          <a:fontRef idx="minor">
-            <a:schemeClr val="lt1"/>
-          </a:fontRef>
-        </p:style>
-        <p:txBody>
-          <a:bodyPr rtlCol="0" anchor="ctr"/>
-          <a:lstStyle/>
-          <a:p/>
-        </p:txBody>
-      </p:sp>
-      <p:sp>
-        <p:nvSpPr>
-          <p:cNvPr id="13" name="TextBox 12"/>
-          <p:cNvSpPr txBox="1"/>
-          <p:nvPr/>
-        </p:nvSpPr>
-        <p:spPr>
-          <a:xfrm>
-            <a:off x="6553047" y="2606040"/>
-            <a:ext cx="4815687" cy="3337560"/>
-          </a:xfrm>
-          <a:prstGeom prst="rect">
-            <a:avLst/>
-          </a:prstGeom>
-          <a:noFill/>
-        </p:spPr>
-        <p:txBody>
-          <a:bodyPr wrap="square" lIns="0" rIns="0" tIns="0" bIns="0">
-            <a:spAutoFit/>
-          </a:bodyPr>
-          <a:lstStyle/>
-          <a:p>
-            <a:pPr marL="274320" indent="-274320">
-              <a:spcAft>
-                <a:spcPts val="990"/>
-              </a:spcAft>
-              <a:buClr>
-                <a:srgbClr val="0645AD"/>
-              </a:buClr>
-              <a:buFont typeface="Arial"/>
-              <a:buChar char="•"/>
-            </a:pPr>
-            <a:r>
-              <a:rPr sz="2200" b="1">
-                <a:solidFill>
-                  <a:srgbClr val="202122"/>
-                </a:solidFill>
-                <a:latin typeface="Calibri"/>
-              </a:rPr>
-              <a:t>Single-mode:</a:t>
-            </a:r>
-            <a:r>
-              <a:rPr sz="2200" b="0">
-                <a:solidFill>
-                  <a:srgbClr val="202122"/>
-                </a:solidFill>
-                <a:latin typeface="Calibri"/>
-              </a:rPr>
-              <a:t> one ray, narrow core, long distance</a:t>
-            </a:r>
-          </a:p>
-          <a:p>
-            <a:pPr marL="274320" indent="-274320">
-              <a:spcAft>
-                <a:spcPts val="990"/>
-              </a:spcAft>
-              <a:buClr>
-                <a:srgbClr val="0645AD"/>
-              </a:buClr>
-              <a:buFont typeface="Arial"/>
-              <a:buChar char="•"/>
-            </a:pPr>
-            <a:r>
-              <a:rPr sz="2200" b="1">
-                <a:solidFill>
-                  <a:srgbClr val="202122"/>
-                </a:solidFill>
-                <a:latin typeface="Calibri"/>
-              </a:rPr>
-              <a:t>Multi-mode:</a:t>
-            </a:r>
-            <a:r>
-              <a:rPr sz="2200" b="0">
-                <a:solidFill>
-                  <a:srgbClr val="202122"/>
-                </a:solidFill>
-                <a:latin typeface="Calibri"/>
-              </a:rPr>
-              <a:t> many rays, wider core, shorter distance</a:t>
+                <a:latin typeface="Cambria"/>
+              </a:rPr>
+              <a:t>Addressing: IPv4 (schemes, subnetting, masks) and IPv6 (address types).</a:t>
             </a:r>
           </a:p>
         </p:txBody>
@@ -6393,7 +11123,7 @@
                 </a:solidFill>
                 <a:latin typeface="Cambria"/>
               </a:rPr>
-              <a:t>Attenuation: losing signal over distance</a:t>
+              <a:t>Quick check: Principles of data transmission</a:t>
             </a:r>
           </a:p>
         </p:txBody>
@@ -6466,58 +11196,14 @@
       </p:sp>
       <p:sp>
         <p:nvSpPr>
-          <p:cNvPr id="6" name="Rounded Rectangle 5"/>
+          <p:cNvPr id="6" name="Oval 5"/>
           <p:cNvSpPr/>
           <p:nvPr/>
         </p:nvSpPr>
         <p:spPr>
           <a:xfrm>
-            <a:off x="548640" y="1600200"/>
-            <a:ext cx="5410047" cy="2148840"/>
-          </a:xfrm>
-          <a:prstGeom prst="roundRect">
-            <a:avLst>
-              <a:gd name="adj" fmla="val 6000"/>
-            </a:avLst>
-          </a:prstGeom>
-          <a:solidFill>
-            <a:srgbClr val="EAF3FF"/>
-          </a:solidFill>
-          <a:ln>
-            <a:noFill/>
-          </a:ln>
-          <a:effectLst/>
-        </p:spPr>
-        <p:style>
-          <a:lnRef idx="1">
-            <a:schemeClr val="accent1"/>
-          </a:lnRef>
-          <a:fillRef idx="3">
-            <a:schemeClr val="accent1"/>
-          </a:fillRef>
-          <a:effectRef idx="2">
-            <a:schemeClr val="accent1"/>
-          </a:effectRef>
-          <a:fontRef idx="minor">
-            <a:schemeClr val="lt1"/>
-          </a:fontRef>
-        </p:style>
-        <p:txBody>
-          <a:bodyPr rtlCol="0" anchor="ctr"/>
-          <a:lstStyle/>
-          <a:p/>
-        </p:txBody>
-      </p:sp>
-      <p:sp>
-        <p:nvSpPr>
-          <p:cNvPr id="7" name="Oval 6"/>
-          <p:cNvSpPr/>
-          <p:nvPr/>
-        </p:nvSpPr>
-        <p:spPr>
-          <a:xfrm>
-            <a:off x="777240" y="1828800"/>
-            <a:ext cx="457200" cy="457200"/>
+            <a:off x="548640" y="1691640"/>
+            <a:ext cx="502920" cy="502920"/>
           </a:xfrm>
           <a:prstGeom prst="ellipse">
             <a:avLst/>
@@ -6550,7 +11236,7 @@
           <a:p>
             <a:pPr algn="ctr"/>
             <a:r>
-              <a:rPr sz="1500" b="1">
+              <a:rPr sz="1600" b="1">
                 <a:solidFill>
                   <a:srgbClr val="202122"/>
                 </a:solidFill>
@@ -6563,124 +11249,47 @@
       </p:sp>
       <p:sp>
         <p:nvSpPr>
-          <p:cNvPr id="8" name="TextBox 7"/>
-          <p:cNvSpPr txBox="1"/>
-          <p:nvPr/>
-        </p:nvSpPr>
-        <p:spPr>
-          <a:xfrm>
-            <a:off x="1371600" y="1801368"/>
-            <a:ext cx="4404207" cy="512064"/>
-          </a:xfrm>
-          <a:prstGeom prst="rect">
-            <a:avLst/>
-          </a:prstGeom>
-          <a:noFill/>
-        </p:spPr>
-        <p:txBody>
-          <a:bodyPr wrap="square" anchor="ctr" lIns="0" rIns="0" tIns="0" bIns="0"/>
+          <p:cNvPr id="7" name="TextBox 6"/>
+          <p:cNvSpPr txBox="1"/>
+          <p:nvPr/>
+        </p:nvSpPr>
+        <p:spPr>
+          <a:xfrm>
+            <a:off x="1371600" y="1645920"/>
+            <a:ext cx="10271455" cy="1188720"/>
+          </a:xfrm>
+          <a:prstGeom prst="rect">
+            <a:avLst/>
+          </a:prstGeom>
+          <a:noFill/>
+        </p:spPr>
+        <p:txBody>
+          <a:bodyPr wrap="square" anchor="t" lIns="0" rIns="0" tIns="0" bIns="0"/>
           <a:lstStyle/>
           <a:p>
             <a:pPr algn="l"/>
             <a:r>
-              <a:rPr sz="1900" b="1" i="0">
-                <a:solidFill>
-                  <a:srgbClr val="03306E"/>
-                </a:solidFill>
-                <a:latin typeface="Calibri"/>
-              </a:rPr>
-              <a:t>Measured in dB</a:t>
-            </a:r>
-          </a:p>
-        </p:txBody>
-      </p:sp>
-      <p:sp>
-        <p:nvSpPr>
-          <p:cNvPr id="9" name="TextBox 8"/>
-          <p:cNvSpPr txBox="1"/>
-          <p:nvPr/>
-        </p:nvSpPr>
-        <p:spPr>
-          <a:xfrm>
-            <a:off x="777240" y="2468880"/>
-            <a:ext cx="4952847" cy="1143000"/>
-          </a:xfrm>
-          <a:prstGeom prst="rect">
-            <a:avLst/>
-          </a:prstGeom>
-          <a:noFill/>
-        </p:spPr>
-        <p:txBody>
-          <a:bodyPr wrap="square" anchor="t" lIns="0" rIns="0" tIns="0" bIns="0"/>
-          <a:lstStyle/>
-          <a:p>
-            <a:pPr algn="l"/>
-            <a:r>
-              <a:rPr sz="2000" b="0" i="0">
+              <a:rPr sz="2400" b="0" i="0">
                 <a:solidFill>
                   <a:srgbClr val="202122"/>
                 </a:solidFill>
                 <a:latin typeface="Calibri"/>
               </a:rPr>
-              <a:t>Loss of signal strength along the cable.</a:t>
-            </a:r>
-          </a:p>
-        </p:txBody>
-      </p:sp>
-      <p:sp>
-        <p:nvSpPr>
-          <p:cNvPr id="10" name="Rounded Rectangle 9"/>
+              <a:t>What does CSMA/CD do when a collision happens?</a:t>
+            </a:r>
+          </a:p>
+        </p:txBody>
+      </p:sp>
+      <p:sp>
+        <p:nvSpPr>
+          <p:cNvPr id="8" name="Oval 7"/>
           <p:cNvSpPr/>
           <p:nvPr/>
         </p:nvSpPr>
         <p:spPr>
           <a:xfrm>
-            <a:off x="6233007" y="1600200"/>
-            <a:ext cx="5410047" cy="2148840"/>
-          </a:xfrm>
-          <a:prstGeom prst="roundRect">
-            <a:avLst>
-              <a:gd name="adj" fmla="val 6000"/>
-            </a:avLst>
-          </a:prstGeom>
-          <a:solidFill>
-            <a:srgbClr val="EAF3FF"/>
-          </a:solidFill>
-          <a:ln>
-            <a:noFill/>
-          </a:ln>
-          <a:effectLst/>
-        </p:spPr>
-        <p:style>
-          <a:lnRef idx="1">
-            <a:schemeClr val="accent1"/>
-          </a:lnRef>
-          <a:fillRef idx="3">
-            <a:schemeClr val="accent1"/>
-          </a:fillRef>
-          <a:effectRef idx="2">
-            <a:schemeClr val="accent1"/>
-          </a:effectRef>
-          <a:fontRef idx="minor">
-            <a:schemeClr val="lt1"/>
-          </a:fontRef>
-        </p:style>
-        <p:txBody>
-          <a:bodyPr rtlCol="0" anchor="ctr"/>
-          <a:lstStyle/>
-          <a:p/>
-        </p:txBody>
-      </p:sp>
-      <p:sp>
-        <p:nvSpPr>
-          <p:cNvPr id="11" name="Oval 10"/>
-          <p:cNvSpPr/>
-          <p:nvPr/>
-        </p:nvSpPr>
-        <p:spPr>
-          <a:xfrm>
-            <a:off x="6461607" y="1828800"/>
-            <a:ext cx="457200" cy="457200"/>
+            <a:off x="548640" y="3108960"/>
+            <a:ext cx="502920" cy="502920"/>
           </a:xfrm>
           <a:prstGeom prst="ellipse">
             <a:avLst/>
@@ -6713,7 +11322,7 @@
           <a:p>
             <a:pPr algn="ctr"/>
             <a:r>
-              <a:rPr sz="1500" b="1">
+              <a:rPr sz="1600" b="1">
                 <a:solidFill>
                   <a:srgbClr val="202122"/>
                 </a:solidFill>
@@ -6726,124 +11335,47 @@
       </p:sp>
       <p:sp>
         <p:nvSpPr>
-          <p:cNvPr id="12" name="TextBox 11"/>
-          <p:cNvSpPr txBox="1"/>
-          <p:nvPr/>
-        </p:nvSpPr>
-        <p:spPr>
-          <a:xfrm>
-            <a:off x="7055967" y="1801368"/>
-            <a:ext cx="4404207" cy="512064"/>
-          </a:xfrm>
-          <a:prstGeom prst="rect">
-            <a:avLst/>
-          </a:prstGeom>
-          <a:noFill/>
-        </p:spPr>
-        <p:txBody>
-          <a:bodyPr wrap="square" anchor="ctr" lIns="0" rIns="0" tIns="0" bIns="0"/>
+          <p:cNvPr id="9" name="TextBox 8"/>
+          <p:cNvSpPr txBox="1"/>
+          <p:nvPr/>
+        </p:nvSpPr>
+        <p:spPr>
+          <a:xfrm>
+            <a:off x="1371600" y="3063240"/>
+            <a:ext cx="10271455" cy="1188720"/>
+          </a:xfrm>
+          <a:prstGeom prst="rect">
+            <a:avLst/>
+          </a:prstGeom>
+          <a:noFill/>
+        </p:spPr>
+        <p:txBody>
+          <a:bodyPr wrap="square" anchor="t" lIns="0" rIns="0" tIns="0" bIns="0"/>
           <a:lstStyle/>
           <a:p>
             <a:pPr algn="l"/>
             <a:r>
-              <a:rPr sz="1900" b="1" i="0">
-                <a:solidFill>
-                  <a:srgbClr val="03306E"/>
-                </a:solidFill>
-                <a:latin typeface="Calibri"/>
-              </a:rPr>
-              <a:t>Absorption</a:t>
-            </a:r>
-          </a:p>
-        </p:txBody>
-      </p:sp>
-      <p:sp>
-        <p:nvSpPr>
-          <p:cNvPr id="13" name="TextBox 12"/>
-          <p:cNvSpPr txBox="1"/>
-          <p:nvPr/>
-        </p:nvSpPr>
-        <p:spPr>
-          <a:xfrm>
-            <a:off x="6461607" y="2468880"/>
-            <a:ext cx="4952847" cy="1143000"/>
-          </a:xfrm>
-          <a:prstGeom prst="rect">
-            <a:avLst/>
-          </a:prstGeom>
-          <a:noFill/>
-        </p:spPr>
-        <p:txBody>
-          <a:bodyPr wrap="square" anchor="t" lIns="0" rIns="0" tIns="0" bIns="0"/>
-          <a:lstStyle/>
-          <a:p>
-            <a:pPr algn="l"/>
-            <a:r>
-              <a:rPr sz="2000" b="0" i="0">
+              <a:rPr sz="2400" b="0" i="0">
                 <a:solidFill>
                   <a:srgbClr val="202122"/>
                 </a:solidFill>
                 <a:latin typeface="Calibri"/>
               </a:rPr>
-              <a:t>Light absorbed by particles in the glass; worse over distance.</a:t>
-            </a:r>
-          </a:p>
-        </p:txBody>
-      </p:sp>
-      <p:sp>
-        <p:nvSpPr>
-          <p:cNvPr id="14" name="Rounded Rectangle 13"/>
+              <a:t>Which access method does Wi-Fi use?</a:t>
+            </a:r>
+          </a:p>
+        </p:txBody>
+      </p:sp>
+      <p:sp>
+        <p:nvSpPr>
+          <p:cNvPr id="10" name="Oval 9"/>
           <p:cNvSpPr/>
           <p:nvPr/>
         </p:nvSpPr>
         <p:spPr>
           <a:xfrm>
-            <a:off x="548640" y="4023360"/>
-            <a:ext cx="5410047" cy="2148840"/>
-          </a:xfrm>
-          <a:prstGeom prst="roundRect">
-            <a:avLst>
-              <a:gd name="adj" fmla="val 6000"/>
-            </a:avLst>
-          </a:prstGeom>
-          <a:solidFill>
-            <a:srgbClr val="EAF3FF"/>
-          </a:solidFill>
-          <a:ln>
-            <a:noFill/>
-          </a:ln>
-          <a:effectLst/>
-        </p:spPr>
-        <p:style>
-          <a:lnRef idx="1">
-            <a:schemeClr val="accent1"/>
-          </a:lnRef>
-          <a:fillRef idx="3">
-            <a:schemeClr val="accent1"/>
-          </a:fillRef>
-          <a:effectRef idx="2">
-            <a:schemeClr val="accent1"/>
-          </a:effectRef>
-          <a:fontRef idx="minor">
-            <a:schemeClr val="lt1"/>
-          </a:fontRef>
-        </p:style>
-        <p:txBody>
-          <a:bodyPr rtlCol="0" anchor="ctr"/>
-          <a:lstStyle/>
-          <a:p/>
-        </p:txBody>
-      </p:sp>
-      <p:sp>
-        <p:nvSpPr>
-          <p:cNvPr id="15" name="Oval 14"/>
-          <p:cNvSpPr/>
-          <p:nvPr/>
-        </p:nvSpPr>
-        <p:spPr>
-          <a:xfrm>
-            <a:off x="777240" y="4251960"/>
-            <a:ext cx="457200" cy="457200"/>
+            <a:off x="548640" y="4526280"/>
+            <a:ext cx="502920" cy="502920"/>
           </a:xfrm>
           <a:prstGeom prst="ellipse">
             <a:avLst/>
@@ -6876,7 +11408,7 @@
           <a:p>
             <a:pPr algn="ctr"/>
             <a:r>
-              <a:rPr sz="1500" b="1">
+              <a:rPr sz="1600" b="1">
                 <a:solidFill>
                   <a:srgbClr val="202122"/>
                 </a:solidFill>
@@ -6889,47 +11421,47 @@
       </p:sp>
       <p:sp>
         <p:nvSpPr>
-          <p:cNvPr id="16" name="TextBox 15"/>
-          <p:cNvSpPr txBox="1"/>
-          <p:nvPr/>
-        </p:nvSpPr>
-        <p:spPr>
-          <a:xfrm>
-            <a:off x="1371600" y="4224528"/>
-            <a:ext cx="4404207" cy="512064"/>
-          </a:xfrm>
-          <a:prstGeom prst="rect">
-            <a:avLst/>
-          </a:prstGeom>
-          <a:noFill/>
-        </p:spPr>
-        <p:txBody>
-          <a:bodyPr wrap="square" anchor="ctr" lIns="0" rIns="0" tIns="0" bIns="0"/>
+          <p:cNvPr id="11" name="TextBox 10"/>
+          <p:cNvSpPr txBox="1"/>
+          <p:nvPr/>
+        </p:nvSpPr>
+        <p:spPr>
+          <a:xfrm>
+            <a:off x="1371600" y="4480560"/>
+            <a:ext cx="10271455" cy="1188720"/>
+          </a:xfrm>
+          <a:prstGeom prst="rect">
+            <a:avLst/>
+          </a:prstGeom>
+          <a:noFill/>
+        </p:spPr>
+        <p:txBody>
+          <a:bodyPr wrap="square" anchor="t" lIns="0" rIns="0" tIns="0" bIns="0"/>
           <a:lstStyle/>
           <a:p>
             <a:pPr algn="l"/>
             <a:r>
-              <a:rPr sz="1900" b="1" i="0">
-                <a:solidFill>
-                  <a:srgbClr val="03306E"/>
-                </a:solidFill>
-                <a:latin typeface="Calibri"/>
-              </a:rPr>
-              <a:t>Scattering</a:t>
-            </a:r>
-          </a:p>
-        </p:txBody>
-      </p:sp>
-      <p:sp>
-        <p:nvSpPr>
-          <p:cNvPr id="17" name="TextBox 16"/>
-          <p:cNvSpPr txBox="1"/>
-          <p:nvPr/>
-        </p:nvSpPr>
-        <p:spPr>
-          <a:xfrm>
-            <a:off x="777240" y="4892040"/>
-            <a:ext cx="4952847" cy="1143000"/>
+              <a:rPr sz="2400" b="0" i="0">
+                <a:solidFill>
+                  <a:srgbClr val="202122"/>
+                </a:solidFill>
+                <a:latin typeface="Calibri"/>
+              </a:rPr>
+              <a:t>What do sequence numbers do?</a:t>
+            </a:r>
+          </a:p>
+        </p:txBody>
+      </p:sp>
+      <p:sp>
+        <p:nvSpPr>
+          <p:cNvPr id="12" name="TextBox 11"/>
+          <p:cNvSpPr txBox="1"/>
+          <p:nvPr/>
+        </p:nvSpPr>
+        <p:spPr>
+          <a:xfrm>
+            <a:off x="548640" y="5852160"/>
+            <a:ext cx="11094415" cy="365760"/>
           </a:xfrm>
           <a:prstGeom prst="rect">
             <a:avLst/>
@@ -6942,176 +11474,13 @@
           <a:p>
             <a:pPr algn="l"/>
             <a:r>
-              <a:rPr sz="2000" b="0" i="0">
-                <a:solidFill>
-                  <a:srgbClr val="202122"/>
-                </a:solidFill>
-                <a:latin typeface="Calibri"/>
-              </a:rPr>
-              <a:t>Light hits particles and is lost into the cladding.</a:t>
-            </a:r>
-          </a:p>
-        </p:txBody>
-      </p:sp>
-      <p:sp>
-        <p:nvSpPr>
-          <p:cNvPr id="18" name="Rounded Rectangle 17"/>
-          <p:cNvSpPr/>
-          <p:nvPr/>
-        </p:nvSpPr>
-        <p:spPr>
-          <a:xfrm>
-            <a:off x="6233007" y="4023360"/>
-            <a:ext cx="5410047" cy="2148840"/>
-          </a:xfrm>
-          <a:prstGeom prst="roundRect">
-            <a:avLst>
-              <a:gd name="adj" fmla="val 6000"/>
-            </a:avLst>
-          </a:prstGeom>
-          <a:solidFill>
-            <a:srgbClr val="EAF3FF"/>
-          </a:solidFill>
-          <a:ln>
-            <a:noFill/>
-          </a:ln>
-          <a:effectLst/>
-        </p:spPr>
-        <p:style>
-          <a:lnRef idx="1">
-            <a:schemeClr val="accent1"/>
-          </a:lnRef>
-          <a:fillRef idx="3">
-            <a:schemeClr val="accent1"/>
-          </a:fillRef>
-          <a:effectRef idx="2">
-            <a:schemeClr val="accent1"/>
-          </a:effectRef>
-          <a:fontRef idx="minor">
-            <a:schemeClr val="lt1"/>
-          </a:fontRef>
-        </p:style>
-        <p:txBody>
-          <a:bodyPr rtlCol="0" anchor="ctr"/>
-          <a:lstStyle/>
-          <a:p/>
-        </p:txBody>
-      </p:sp>
-      <p:sp>
-        <p:nvSpPr>
-          <p:cNvPr id="19" name="Oval 18"/>
-          <p:cNvSpPr/>
-          <p:nvPr/>
-        </p:nvSpPr>
-        <p:spPr>
-          <a:xfrm>
-            <a:off x="6461607" y="4251960"/>
-            <a:ext cx="457200" cy="457200"/>
-          </a:xfrm>
-          <a:prstGeom prst="ellipse">
-            <a:avLst/>
-          </a:prstGeom>
-          <a:solidFill>
-            <a:srgbClr val="F2B705"/>
-          </a:solidFill>
-          <a:ln>
-            <a:noFill/>
-          </a:ln>
-          <a:effectLst/>
-        </p:spPr>
-        <p:style>
-          <a:lnRef idx="1">
-            <a:schemeClr val="accent1"/>
-          </a:lnRef>
-          <a:fillRef idx="3">
-            <a:schemeClr val="accent1"/>
-          </a:fillRef>
-          <a:effectRef idx="2">
-            <a:schemeClr val="accent1"/>
-          </a:effectRef>
-          <a:fontRef idx="minor">
-            <a:schemeClr val="lt1"/>
-          </a:fontRef>
-        </p:style>
-        <p:txBody>
-          <a:bodyPr rtlCol="0" anchor="ctr" lIns="0" rIns="0" tIns="0" bIns="0"/>
-          <a:lstStyle/>
-          <a:p>
-            <a:pPr algn="ctr"/>
-            <a:r>
-              <a:rPr sz="1500" b="1">
-                <a:solidFill>
-                  <a:srgbClr val="202122"/>
-                </a:solidFill>
-                <a:latin typeface="Calibri"/>
-              </a:rPr>
-              <a:t>4</a:t>
-            </a:r>
-          </a:p>
-        </p:txBody>
-      </p:sp>
-      <p:sp>
-        <p:nvSpPr>
-          <p:cNvPr id="20" name="TextBox 19"/>
-          <p:cNvSpPr txBox="1"/>
-          <p:nvPr/>
-        </p:nvSpPr>
-        <p:spPr>
-          <a:xfrm>
-            <a:off x="7055967" y="4224528"/>
-            <a:ext cx="4404207" cy="512064"/>
-          </a:xfrm>
-          <a:prstGeom prst="rect">
-            <a:avLst/>
-          </a:prstGeom>
-          <a:noFill/>
-        </p:spPr>
-        <p:txBody>
-          <a:bodyPr wrap="square" anchor="ctr" lIns="0" rIns="0" tIns="0" bIns="0"/>
-          <a:lstStyle/>
-          <a:p>
-            <a:pPr algn="l"/>
-            <a:r>
-              <a:rPr sz="1900" b="1" i="0">
-                <a:solidFill>
-                  <a:srgbClr val="03306E"/>
-                </a:solidFill>
-                <a:latin typeface="Calibri"/>
-              </a:rPr>
-              <a:t>Bending</a:t>
-            </a:r>
-          </a:p>
-        </p:txBody>
-      </p:sp>
-      <p:sp>
-        <p:nvSpPr>
-          <p:cNvPr id="21" name="TextBox 20"/>
-          <p:cNvSpPr txBox="1"/>
-          <p:nvPr/>
-        </p:nvSpPr>
-        <p:spPr>
-          <a:xfrm>
-            <a:off x="6461607" y="4892040"/>
-            <a:ext cx="4952847" cy="1143000"/>
-          </a:xfrm>
-          <a:prstGeom prst="rect">
-            <a:avLst/>
-          </a:prstGeom>
-          <a:noFill/>
-        </p:spPr>
-        <p:txBody>
-          <a:bodyPr wrap="square" anchor="t" lIns="0" rIns="0" tIns="0" bIns="0"/>
-          <a:lstStyle/>
-          <a:p>
-            <a:pPr algn="l"/>
-            <a:r>
-              <a:rPr sz="2000" b="0" i="0">
-                <a:solidFill>
-                  <a:srgbClr val="202122"/>
-                </a:solidFill>
-                <a:latin typeface="Calibri"/>
-              </a:rPr>
-              <a:t>Macrobends and microbends let light escape.</a:t>
+              <a:rPr sz="1300" b="0" i="1">
+                <a:solidFill>
+                  <a:srgbClr val="54595D"/>
+                </a:solidFill>
+                <a:latin typeface="Calibri"/>
+              </a:rPr>
+              <a:t>Answer on mini whiteboards or in your book. Answers are in the speaker notes.</a:t>
             </a:r>
           </a:p>
         </p:txBody>
@@ -7203,7 +11572,7 @@
                 </a:solidFill>
                 <a:latin typeface="Cambria"/>
               </a:rPr>
-              <a:t>Ohm's law and copper cabling</a:t>
+              <a:t>How fibre carries light</a:t>
             </a:r>
           </a:p>
         </p:txBody>
@@ -7282,8 +11651,8 @@
         </p:nvSpPr>
         <p:spPr>
           <a:xfrm>
-            <a:off x="548640" y="1600200"/>
-            <a:ext cx="6675120" cy="4572000"/>
+            <a:off x="548640" y="1554480"/>
+            <a:ext cx="6720840" cy="4617720"/>
           </a:xfrm>
           <a:prstGeom prst="rect">
             <a:avLst/>
@@ -7296,96 +11665,51 @@
           </a:bodyPr>
           <a:lstStyle/>
           <a:p>
-            <a:pPr marL="274320" indent="-274320">
+            <a:pPr>
               <a:spcAft>
-                <a:spcPts val="1080"/>
+                <a:spcPts val="1200"/>
               </a:spcAft>
-              <a:buClr>
-                <a:srgbClr val="0645AD"/>
-              </a:buClr>
-              <a:buFont typeface="Arial"/>
-              <a:buChar char="•"/>
             </a:pPr>
             <a:r>
-              <a:rPr sz="2400" b="1">
+              <a:rPr sz="2000" b="0">
                 <a:solidFill>
                   <a:srgbClr val="202122"/>
                 </a:solidFill>
                 <a:latin typeface="Calibri"/>
               </a:rPr>
-              <a:t>V = I x R:</a:t>
-            </a:r>
-            <a:r>
-              <a:rPr sz="2400" b="0">
+              <a:t>Fibre optic cable has a glass core surrounded by cladding with a slightly different refractive index.</a:t>
+            </a:r>
+          </a:p>
+          <a:p>
+            <a:pPr>
+              <a:spcAft>
+                <a:spcPts val="1200"/>
+              </a:spcAft>
+            </a:pPr>
+            <a:r>
+              <a:rPr sz="2000" b="0">
                 <a:solidFill>
                   <a:srgbClr val="202122"/>
                 </a:solidFill>
                 <a:latin typeface="Calibri"/>
               </a:rPr>
-              <a:t> voltage equals current times resistance.</a:t>
-            </a:r>
-          </a:p>
-          <a:p>
-            <a:pPr marL="274320" indent="-274320">
+              <a:t>Light entering the core at a shallow enough angle hits the boundary with the cladding and reflects back inside instead of escaping. This total internal reflection keeps the light bouncing along the core for kilometres.</a:t>
+            </a:r>
+          </a:p>
+          <a:p>
+            <a:pPr>
               <a:spcAft>
-                <a:spcPts val="1080"/>
+                <a:spcPts val="1200"/>
               </a:spcAft>
-              <a:buClr>
-                <a:srgbClr val="0645AD"/>
-              </a:buClr>
-              <a:buFont typeface="Arial"/>
-              <a:buChar char="•"/>
             </a:pPr>
             <a:r>
-              <a:rPr sz="2400" b="0">
+              <a:rPr sz="2000" b="0">
                 <a:solidFill>
                   <a:srgbClr val="202122"/>
                 </a:solidFill>
                 <a:latin typeface="Calibri"/>
               </a:rPr>
-              <a:t>More voltage gives more current.</a:t>
-            </a:r>
-          </a:p>
-          <a:p>
-            <a:pPr marL="274320" indent="-274320">
-              <a:spcAft>
-                <a:spcPts val="1080"/>
-              </a:spcAft>
-              <a:buClr>
-                <a:srgbClr val="0645AD"/>
-              </a:buClr>
-              <a:buFont typeface="Arial"/>
-              <a:buChar char="•"/>
-            </a:pPr>
-            <a:r>
-              <a:rPr sz="2400" b="0">
-                <a:solidFill>
-                  <a:srgbClr val="202122"/>
-                </a:solidFill>
-                <a:latin typeface="Calibri"/>
-              </a:rPr>
-              <a:t>More resistance gives less current.</a:t>
-            </a:r>
-          </a:p>
-          <a:p>
-            <a:pPr marL="274320" indent="-274320">
-              <a:spcAft>
-                <a:spcPts val="1080"/>
-              </a:spcAft>
-              <a:buClr>
-                <a:srgbClr val="0645AD"/>
-              </a:buClr>
-              <a:buFont typeface="Arial"/>
-              <a:buChar char="•"/>
-            </a:pPr>
-            <a:r>
-              <a:rPr sz="2400" b="0">
-                <a:solidFill>
-                  <a:srgbClr val="202122"/>
-                </a:solidFill>
-                <a:latin typeface="Calibri"/>
-              </a:rPr>
-              <a:t>Resistance rises with cable length, signal frequency and smaller cable size.</a:t>
+              <a:t>Single-mode fibre has a very narrow core, so light travels in essentially one path. It goes much further and is used for long links. Multi-mode fibre has a wider core carrying many light paths; they arrive at slightly different times, which limits distance, so it's used within buildings.</a:t>
             </a:r>
           </a:p>
         </p:txBody>
@@ -7398,8 +11722,8 @@
         </p:nvSpPr>
         <p:spPr>
           <a:xfrm>
-            <a:off x="7772400" y="1600200"/>
-            <a:ext cx="3867912" cy="4434840"/>
+            <a:off x="7772400" y="1554480"/>
+            <a:ext cx="3867912" cy="4526280"/>
           </a:xfrm>
           <a:prstGeom prst="roundRect">
             <a:avLst>
@@ -7442,7 +11766,7 @@
         </p:nvSpPr>
         <p:spPr>
           <a:xfrm>
-            <a:off x="8046720" y="1874519"/>
+            <a:off x="8046720" y="1828800"/>
             <a:ext cx="548640" cy="548640"/>
           </a:xfrm>
           <a:prstGeom prst="ellipse">
@@ -7476,13 +11800,13 @@
           <a:p>
             <a:pPr algn="ctr"/>
             <a:r>
-              <a:rPr sz="2000" b="1">
+              <a:rPr sz="1300" b="1">
                 <a:solidFill>
                   <a:srgbClr val="202122"/>
                 </a:solidFill>
                 <a:latin typeface="Calibri"/>
               </a:rPr>
-              <a:t>!</a:t>
+              <a:t>e.g.</a:t>
             </a:r>
           </a:p>
         </p:txBody>
@@ -7495,7 +11819,7 @@
         </p:nvSpPr>
         <p:spPr>
           <a:xfrm>
-            <a:off x="8046720" y="2606040"/>
+            <a:off x="8046720" y="2560320"/>
             <a:ext cx="3291840" cy="365760"/>
           </a:xfrm>
           <a:prstGeom prst="rect">
@@ -7515,7 +11839,7 @@
                 </a:solidFill>
                 <a:latin typeface="Calibri"/>
               </a:rPr>
-              <a:t>KEY IDEA</a:t>
+              <a:t>EXAMPLE</a:t>
             </a:r>
           </a:p>
         </p:txBody>
@@ -7528,8 +11852,8 @@
         </p:nvSpPr>
         <p:spPr>
           <a:xfrm>
-            <a:off x="8046720" y="3017520"/>
-            <a:ext cx="3291840" cy="2926080"/>
+            <a:off x="8046720" y="2971800"/>
+            <a:ext cx="3291840" cy="2971800"/>
           </a:xfrm>
           <a:prstGeom prst="rect">
             <a:avLst/>
@@ -7542,13 +11866,13 @@
           <a:p>
             <a:pPr algn="l"/>
             <a:r>
-              <a:rPr sz="2200" b="0" i="0">
+              <a:rPr sz="1900" b="0" i="0">
                 <a:solidFill>
                   <a:srgbClr val="FFFFFF"/>
                 </a:solidFill>
                 <a:latin typeface="Cambria"/>
               </a:rPr>
-              <a:t>Resistance is why copper has a maximum length: 90 m permanent link and 100 m total channel.</a:t>
+              <a:t>A campus uses multi-mode (OM4) between floors of one building, and single-mode (OS2) for the 3 km link to another site.</a:t>
             </a:r>
           </a:p>
         </p:txBody>
@@ -7640,7 +11964,7 @@
                 </a:solidFill>
                 <a:latin typeface="Cambria"/>
               </a:rPr>
-              <a:t>Check your understanding</a:t>
+              <a:t>How fibre carries light</a:t>
             </a:r>
           </a:p>
         </p:txBody>
@@ -7713,20 +12037,22 @@
       </p:sp>
       <p:sp>
         <p:nvSpPr>
-          <p:cNvPr id="6" name="Oval 5"/>
+          <p:cNvPr id="6" name="Rounded Rectangle 5"/>
           <p:cNvSpPr/>
           <p:nvPr/>
         </p:nvSpPr>
         <p:spPr>
           <a:xfrm>
-            <a:off x="548640" y="1618488"/>
-            <a:ext cx="411480" cy="411480"/>
-          </a:xfrm>
-          <a:prstGeom prst="ellipse">
-            <a:avLst/>
+            <a:off x="548640" y="1600200"/>
+            <a:ext cx="5364327" cy="640080"/>
+          </a:xfrm>
+          <a:prstGeom prst="roundRect">
+            <a:avLst>
+              <a:gd name="adj" fmla="val 15000"/>
+            </a:avLst>
           </a:prstGeom>
           <a:solidFill>
-            <a:srgbClr val="F2B705"/>
+            <a:srgbClr val="03306E"/>
           </a:solidFill>
           <a:ln>
             <a:noFill/>
@@ -7748,20 +12074,9 @@
           </a:fontRef>
         </p:style>
         <p:txBody>
-          <a:bodyPr rtlCol="0" anchor="ctr" lIns="0" rIns="0" tIns="0" bIns="0"/>
-          <a:lstStyle/>
-          <a:p>
-            <a:pPr algn="ctr"/>
-            <a:r>
-              <a:rPr sz="1400" b="1">
-                <a:solidFill>
-                  <a:srgbClr val="202122"/>
-                </a:solidFill>
-                <a:latin typeface="Calibri"/>
-              </a:rPr>
-              <a:t>1</a:t>
-            </a:r>
-          </a:p>
+          <a:bodyPr rtlCol="0" anchor="ctr"/>
+          <a:lstStyle/>
+          <a:p/>
         </p:txBody>
       </p:sp>
       <p:sp>
@@ -7772,47 +12087,49 @@
         </p:nvSpPr>
         <p:spPr>
           <a:xfrm>
-            <a:off x="1234440" y="1600200"/>
-            <a:ext cx="10408615" cy="791870"/>
-          </a:xfrm>
-          <a:prstGeom prst="rect">
-            <a:avLst/>
-          </a:prstGeom>
-          <a:noFill/>
-        </p:spPr>
-        <p:txBody>
-          <a:bodyPr wrap="square" anchor="t" lIns="0" rIns="0" tIns="0" bIns="0"/>
+            <a:off x="777240" y="1600200"/>
+            <a:ext cx="4907127" cy="640080"/>
+          </a:xfrm>
+          <a:prstGeom prst="rect">
+            <a:avLst/>
+          </a:prstGeom>
+          <a:noFill/>
+        </p:spPr>
+        <p:txBody>
+          <a:bodyPr wrap="square" anchor="ctr" lIns="0" rIns="0" tIns="0" bIns="0"/>
           <a:lstStyle/>
           <a:p>
             <a:pPr algn="l"/>
             <a:r>
-              <a:rPr sz="2200" b="0" i="0">
-                <a:solidFill>
-                  <a:srgbClr val="202122"/>
-                </a:solidFill>
-                <a:latin typeface="Calibri"/>
-              </a:rPr>
-              <a:t>What does CSMA/CD stand for?</a:t>
-            </a:r>
-          </a:p>
-        </p:txBody>
-      </p:sp>
-      <p:sp>
-        <p:nvSpPr>
-          <p:cNvPr id="8" name="Oval 7"/>
+              <a:rPr sz="2000" b="1" i="0">
+                <a:solidFill>
+                  <a:srgbClr val="FFFFFF"/>
+                </a:solidFill>
+                <a:latin typeface="Calibri"/>
+              </a:rPr>
+              <a:t>Total internal reflection</a:t>
+            </a:r>
+          </a:p>
+        </p:txBody>
+      </p:sp>
+      <p:sp>
+        <p:nvSpPr>
+          <p:cNvPr id="8" name="Rounded Rectangle 7"/>
           <p:cNvSpPr/>
           <p:nvPr/>
         </p:nvSpPr>
         <p:spPr>
           <a:xfrm>
-            <a:off x="548640" y="2574950"/>
-            <a:ext cx="411480" cy="411480"/>
-          </a:xfrm>
-          <a:prstGeom prst="ellipse">
-            <a:avLst/>
+            <a:off x="548640" y="2377440"/>
+            <a:ext cx="5364327" cy="3794760"/>
+          </a:xfrm>
+          <a:prstGeom prst="roundRect">
+            <a:avLst>
+              <a:gd name="adj" fmla="val 4000"/>
+            </a:avLst>
           </a:prstGeom>
           <a:solidFill>
-            <a:srgbClr val="F2B705"/>
+            <a:srgbClr val="EAF3FF"/>
           </a:solidFill>
           <a:ln>
             <a:noFill/>
@@ -7834,71 +12151,115 @@
           </a:fontRef>
         </p:style>
         <p:txBody>
-          <a:bodyPr rtlCol="0" anchor="ctr" lIns="0" rIns="0" tIns="0" bIns="0"/>
-          <a:lstStyle/>
-          <a:p>
-            <a:pPr algn="ctr"/>
-            <a:r>
-              <a:rPr sz="1400" b="1">
+          <a:bodyPr rtlCol="0" anchor="ctr"/>
+          <a:lstStyle/>
+          <a:p/>
+        </p:txBody>
+      </p:sp>
+      <p:sp>
+        <p:nvSpPr>
+          <p:cNvPr id="9" name="TextBox 8"/>
+          <p:cNvSpPr txBox="1"/>
+          <p:nvPr/>
+        </p:nvSpPr>
+        <p:spPr>
+          <a:xfrm>
+            <a:off x="822959" y="2606040"/>
+            <a:ext cx="4815687" cy="3337560"/>
+          </a:xfrm>
+          <a:prstGeom prst="rect">
+            <a:avLst/>
+          </a:prstGeom>
+          <a:noFill/>
+        </p:spPr>
+        <p:txBody>
+          <a:bodyPr wrap="square" lIns="0" rIns="0" tIns="0" bIns="0">
+            <a:spAutoFit/>
+          </a:bodyPr>
+          <a:lstStyle/>
+          <a:p>
+            <a:pPr marL="274320" indent="-274320">
+              <a:spcAft>
+                <a:spcPts val="990"/>
+              </a:spcAft>
+              <a:buClr>
+                <a:srgbClr val="0645AD"/>
+              </a:buClr>
+              <a:buFont typeface="Arial"/>
+              <a:buChar char="•"/>
+            </a:pPr>
+            <a:r>
+              <a:rPr sz="2200" b="0">
                 <a:solidFill>
                   <a:srgbClr val="202122"/>
                 </a:solidFill>
                 <a:latin typeface="Calibri"/>
               </a:rPr>
-              <a:t>2</a:t>
-            </a:r>
-          </a:p>
-        </p:txBody>
-      </p:sp>
-      <p:sp>
-        <p:nvSpPr>
-          <p:cNvPr id="9" name="TextBox 8"/>
-          <p:cNvSpPr txBox="1"/>
-          <p:nvPr/>
-        </p:nvSpPr>
-        <p:spPr>
-          <a:xfrm>
-            <a:off x="1234440" y="2556662"/>
-            <a:ext cx="10408615" cy="791870"/>
-          </a:xfrm>
-          <a:prstGeom prst="rect">
-            <a:avLst/>
-          </a:prstGeom>
-          <a:noFill/>
-        </p:spPr>
-        <p:txBody>
-          <a:bodyPr wrap="square" anchor="t" lIns="0" rIns="0" tIns="0" bIns="0"/>
-          <a:lstStyle/>
-          <a:p>
-            <a:pPr algn="l"/>
-            <a:r>
-              <a:rPr sz="2200" b="0" i="0">
+              <a:t>Light travels down the glass core</a:t>
+            </a:r>
+          </a:p>
+          <a:p>
+            <a:pPr marL="274320" indent="-274320">
+              <a:spcAft>
+                <a:spcPts val="990"/>
+              </a:spcAft>
+              <a:buClr>
+                <a:srgbClr val="0645AD"/>
+              </a:buClr>
+              <a:buFont typeface="Arial"/>
+              <a:buChar char="•"/>
+            </a:pPr>
+            <a:r>
+              <a:rPr sz="2200" b="0">
                 <a:solidFill>
                   <a:srgbClr val="202122"/>
                 </a:solidFill>
                 <a:latin typeface="Calibri"/>
               </a:rPr>
-              <a:t>What keeps light inside a fibre core?</a:t>
-            </a:r>
-          </a:p>
-        </p:txBody>
-      </p:sp>
-      <p:sp>
-        <p:nvSpPr>
-          <p:cNvPr id="10" name="Oval 9"/>
+              <a:t>It reflects off the boundary with the cladding</a:t>
+            </a:r>
+          </a:p>
+          <a:p>
+            <a:pPr marL="274320" indent="-274320">
+              <a:spcAft>
+                <a:spcPts val="990"/>
+              </a:spcAft>
+              <a:buClr>
+                <a:srgbClr val="0645AD"/>
+              </a:buClr>
+              <a:buFont typeface="Arial"/>
+              <a:buChar char="•"/>
+            </a:pPr>
+            <a:r>
+              <a:rPr sz="2200" b="0">
+                <a:solidFill>
+                  <a:srgbClr val="202122"/>
+                </a:solidFill>
+                <a:latin typeface="Calibri"/>
+              </a:rPr>
+              <a:t>Refraction principles keep it inside the core</a:t>
+            </a:r>
+          </a:p>
+        </p:txBody>
+      </p:sp>
+      <p:sp>
+        <p:nvSpPr>
+          <p:cNvPr id="10" name="Rounded Rectangle 9"/>
           <p:cNvSpPr/>
           <p:nvPr/>
         </p:nvSpPr>
         <p:spPr>
           <a:xfrm>
-            <a:off x="548640" y="3531412"/>
-            <a:ext cx="411480" cy="411480"/>
-          </a:xfrm>
-          <a:prstGeom prst="ellipse">
-            <a:avLst/>
+            <a:off x="6278727" y="1600200"/>
+            <a:ext cx="5364327" cy="640080"/>
+          </a:xfrm>
+          <a:prstGeom prst="roundRect">
+            <a:avLst>
+              <a:gd name="adj" fmla="val 15000"/>
+            </a:avLst>
           </a:prstGeom>
           <a:solidFill>
-            <a:srgbClr val="F2B705"/>
+            <a:srgbClr val="0645AD"/>
           </a:solidFill>
           <a:ln>
             <a:noFill/>
@@ -7920,20 +12281,9 @@
           </a:fontRef>
         </p:style>
         <p:txBody>
-          <a:bodyPr rtlCol="0" anchor="ctr" lIns="0" rIns="0" tIns="0" bIns="0"/>
-          <a:lstStyle/>
-          <a:p>
-            <a:pPr algn="ctr"/>
-            <a:r>
-              <a:rPr sz="1400" b="1">
-                <a:solidFill>
-                  <a:srgbClr val="202122"/>
-                </a:solidFill>
-                <a:latin typeface="Calibri"/>
-              </a:rPr>
-              <a:t>3</a:t>
-            </a:r>
-          </a:p>
+          <a:bodyPr rtlCol="0" anchor="ctr"/>
+          <a:lstStyle/>
+          <a:p/>
         </p:txBody>
       </p:sp>
       <p:sp>
@@ -7944,47 +12294,49 @@
         </p:nvSpPr>
         <p:spPr>
           <a:xfrm>
-            <a:off x="1234440" y="3513124"/>
-            <a:ext cx="10408615" cy="791870"/>
-          </a:xfrm>
-          <a:prstGeom prst="rect">
-            <a:avLst/>
-          </a:prstGeom>
-          <a:noFill/>
-        </p:spPr>
-        <p:txBody>
-          <a:bodyPr wrap="square" anchor="t" lIns="0" rIns="0" tIns="0" bIns="0"/>
+            <a:off x="6507327" y="1600200"/>
+            <a:ext cx="4907127" cy="640080"/>
+          </a:xfrm>
+          <a:prstGeom prst="rect">
+            <a:avLst/>
+          </a:prstGeom>
+          <a:noFill/>
+        </p:spPr>
+        <p:txBody>
+          <a:bodyPr wrap="square" anchor="ctr" lIns="0" rIns="0" tIns="0" bIns="0"/>
           <a:lstStyle/>
           <a:p>
             <a:pPr algn="l"/>
             <a:r>
-              <a:rPr sz="2200" b="0" i="0">
-                <a:solidFill>
-                  <a:srgbClr val="202122"/>
-                </a:solidFill>
-                <a:latin typeface="Calibri"/>
-              </a:rPr>
-              <a:t>Which fibre type suits long distances?</a:t>
-            </a:r>
-          </a:p>
-        </p:txBody>
-      </p:sp>
-      <p:sp>
-        <p:nvSpPr>
-          <p:cNvPr id="12" name="Oval 11"/>
+              <a:rPr sz="2000" b="1" i="0">
+                <a:solidFill>
+                  <a:srgbClr val="FFFFFF"/>
+                </a:solidFill>
+                <a:latin typeface="Calibri"/>
+              </a:rPr>
+              <a:t>Single-mode and multi-mode</a:t>
+            </a:r>
+          </a:p>
+        </p:txBody>
+      </p:sp>
+      <p:sp>
+        <p:nvSpPr>
+          <p:cNvPr id="12" name="Rounded Rectangle 11"/>
           <p:cNvSpPr/>
           <p:nvPr/>
         </p:nvSpPr>
         <p:spPr>
           <a:xfrm>
-            <a:off x="548640" y="4487875"/>
-            <a:ext cx="411480" cy="411480"/>
-          </a:xfrm>
-          <a:prstGeom prst="ellipse">
-            <a:avLst/>
+            <a:off x="6278727" y="2377440"/>
+            <a:ext cx="5364327" cy="3794760"/>
+          </a:xfrm>
+          <a:prstGeom prst="roundRect">
+            <a:avLst>
+              <a:gd name="adj" fmla="val 4000"/>
+            </a:avLst>
           </a:prstGeom>
           <a:solidFill>
-            <a:srgbClr val="F2B705"/>
+            <a:srgbClr val="EAF3FF"/>
           </a:solidFill>
           <a:ln>
             <a:noFill/>
@@ -8006,137 +12358,90 @@
           </a:fontRef>
         </p:style>
         <p:txBody>
-          <a:bodyPr rtlCol="0" anchor="ctr" lIns="0" rIns="0" tIns="0" bIns="0"/>
-          <a:lstStyle/>
-          <a:p>
-            <a:pPr algn="ctr"/>
-            <a:r>
-              <a:rPr sz="1400" b="1">
+          <a:bodyPr rtlCol="0" anchor="ctr"/>
+          <a:lstStyle/>
+          <a:p/>
+        </p:txBody>
+      </p:sp>
+      <p:sp>
+        <p:nvSpPr>
+          <p:cNvPr id="13" name="TextBox 12"/>
+          <p:cNvSpPr txBox="1"/>
+          <p:nvPr/>
+        </p:nvSpPr>
+        <p:spPr>
+          <a:xfrm>
+            <a:off x="6553047" y="2606040"/>
+            <a:ext cx="4815687" cy="3337560"/>
+          </a:xfrm>
+          <a:prstGeom prst="rect">
+            <a:avLst/>
+          </a:prstGeom>
+          <a:noFill/>
+        </p:spPr>
+        <p:txBody>
+          <a:bodyPr wrap="square" lIns="0" rIns="0" tIns="0" bIns="0">
+            <a:spAutoFit/>
+          </a:bodyPr>
+          <a:lstStyle/>
+          <a:p>
+            <a:pPr marL="274320" indent="-274320">
+              <a:spcAft>
+                <a:spcPts val="990"/>
+              </a:spcAft>
+              <a:buClr>
+                <a:srgbClr val="0645AD"/>
+              </a:buClr>
+              <a:buFont typeface="Arial"/>
+              <a:buChar char="•"/>
+            </a:pPr>
+            <a:r>
+              <a:rPr sz="2200" b="1">
                 <a:solidFill>
                   <a:srgbClr val="202122"/>
                 </a:solidFill>
                 <a:latin typeface="Calibri"/>
               </a:rPr>
-              <a:t>4</a:t>
-            </a:r>
-          </a:p>
-        </p:txBody>
-      </p:sp>
-      <p:sp>
-        <p:nvSpPr>
-          <p:cNvPr id="13" name="TextBox 12"/>
-          <p:cNvSpPr txBox="1"/>
-          <p:nvPr/>
-        </p:nvSpPr>
-        <p:spPr>
-          <a:xfrm>
-            <a:off x="1234440" y="4469587"/>
-            <a:ext cx="10408615" cy="791870"/>
-          </a:xfrm>
-          <a:prstGeom prst="rect">
-            <a:avLst/>
-          </a:prstGeom>
-          <a:noFill/>
-        </p:spPr>
-        <p:txBody>
-          <a:bodyPr wrap="square" anchor="t" lIns="0" rIns="0" tIns="0" bIns="0"/>
-          <a:lstStyle/>
-          <a:p>
-            <a:pPr algn="l"/>
-            <a:r>
-              <a:rPr sz="2200" b="0" i="0">
+              <a:t>Single-mode:</a:t>
+            </a:r>
+            <a:r>
+              <a:rPr sz="2200" b="0">
                 <a:solidFill>
                   <a:srgbClr val="202122"/>
                 </a:solidFill>
                 <a:latin typeface="Calibri"/>
               </a:rPr>
-              <a:t>Name two causes of attenuation.</a:t>
-            </a:r>
-          </a:p>
-        </p:txBody>
-      </p:sp>
-      <p:sp>
-        <p:nvSpPr>
-          <p:cNvPr id="14" name="Oval 13"/>
-          <p:cNvSpPr/>
-          <p:nvPr/>
-        </p:nvSpPr>
-        <p:spPr>
-          <a:xfrm>
-            <a:off x="548640" y="5444337"/>
-            <a:ext cx="411480" cy="411480"/>
-          </a:xfrm>
-          <a:prstGeom prst="ellipse">
-            <a:avLst/>
-          </a:prstGeom>
-          <a:solidFill>
-            <a:srgbClr val="F2B705"/>
-          </a:solidFill>
-          <a:ln>
-            <a:noFill/>
-          </a:ln>
-          <a:effectLst/>
-        </p:spPr>
-        <p:style>
-          <a:lnRef idx="1">
-            <a:schemeClr val="accent1"/>
-          </a:lnRef>
-          <a:fillRef idx="3">
-            <a:schemeClr val="accent1"/>
-          </a:fillRef>
-          <a:effectRef idx="2">
-            <a:schemeClr val="accent1"/>
-          </a:effectRef>
-          <a:fontRef idx="minor">
-            <a:schemeClr val="lt1"/>
-          </a:fontRef>
-        </p:style>
-        <p:txBody>
-          <a:bodyPr rtlCol="0" anchor="ctr" lIns="0" rIns="0" tIns="0" bIns="0"/>
-          <a:lstStyle/>
-          <a:p>
-            <a:pPr algn="ctr"/>
-            <a:r>
-              <a:rPr sz="1400" b="1">
+              <a:t> one ray, narrow core, long distance</a:t>
+            </a:r>
+          </a:p>
+          <a:p>
+            <a:pPr marL="274320" indent="-274320">
+              <a:spcAft>
+                <a:spcPts val="990"/>
+              </a:spcAft>
+              <a:buClr>
+                <a:srgbClr val="0645AD"/>
+              </a:buClr>
+              <a:buFont typeface="Arial"/>
+              <a:buChar char="•"/>
+            </a:pPr>
+            <a:r>
+              <a:rPr sz="2200" b="1">
                 <a:solidFill>
                   <a:srgbClr val="202122"/>
                 </a:solidFill>
                 <a:latin typeface="Calibri"/>
               </a:rPr>
-              <a:t>5</a:t>
-            </a:r>
-          </a:p>
-        </p:txBody>
-      </p:sp>
-      <p:sp>
-        <p:nvSpPr>
-          <p:cNvPr id="15" name="TextBox 14"/>
-          <p:cNvSpPr txBox="1"/>
-          <p:nvPr/>
-        </p:nvSpPr>
-        <p:spPr>
-          <a:xfrm>
-            <a:off x="1234440" y="5426049"/>
-            <a:ext cx="10408615" cy="791870"/>
-          </a:xfrm>
-          <a:prstGeom prst="rect">
-            <a:avLst/>
-          </a:prstGeom>
-          <a:noFill/>
-        </p:spPr>
-        <p:txBody>
-          <a:bodyPr wrap="square" anchor="t" lIns="0" rIns="0" tIns="0" bIns="0"/>
-          <a:lstStyle/>
-          <a:p>
-            <a:pPr algn="l"/>
-            <a:r>
-              <a:rPr sz="2200" b="0" i="0">
+              <a:t>Multi-mode:</a:t>
+            </a:r>
+            <a:r>
+              <a:rPr sz="2200" b="0">
                 <a:solidFill>
                   <a:srgbClr val="202122"/>
                 </a:solidFill>
                 <a:latin typeface="Calibri"/>
               </a:rPr>
-              <a:t>Using V = I x R, what current flows with 10 V and 5 ohms?</a:t>
+              <a:t> many rays, wider core, shorter distance</a:t>
             </a:r>
           </a:p>
         </p:txBody>
@@ -8228,7 +12533,7 @@
                 </a:solidFill>
                 <a:latin typeface="Cambria"/>
               </a:rPr>
-              <a:t>Answers</a:t>
+              <a:t>Quick check: How fibre carries light</a:t>
             </a:r>
           </a:p>
         </p:txBody>
@@ -8307,8 +12612,8 @@
         </p:nvSpPr>
         <p:spPr>
           <a:xfrm>
-            <a:off x="548640" y="1618488"/>
-            <a:ext cx="411480" cy="411480"/>
+            <a:off x="548640" y="1691640"/>
+            <a:ext cx="502920" cy="502920"/>
           </a:xfrm>
           <a:prstGeom prst="ellipse">
             <a:avLst/>
@@ -8341,7 +12646,7 @@
           <a:p>
             <a:pPr algn="ctr"/>
             <a:r>
-              <a:rPr sz="1400" b="1">
+              <a:rPr sz="1600" b="1">
                 <a:solidFill>
                   <a:srgbClr val="202122"/>
                 </a:solidFill>
@@ -8360,8 +12665,8 @@
         </p:nvSpPr>
         <p:spPr>
           <a:xfrm>
-            <a:off x="1234440" y="1600200"/>
-            <a:ext cx="10408615" cy="791870"/>
+            <a:off x="1371600" y="1645920"/>
+            <a:ext cx="10271455" cy="1188720"/>
           </a:xfrm>
           <a:prstGeom prst="rect">
             <a:avLst/>
@@ -8374,24 +12679,13 @@
           <a:p>
             <a:pPr algn="l"/>
             <a:r>
-              <a:rPr sz="1800" b="0" i="0">
-                <a:solidFill>
-                  <a:srgbClr val="54595D"/>
-                </a:solidFill>
-                <a:latin typeface="Calibri"/>
-              </a:rPr>
-              <a:t>What does CSMA/CD stand for?</a:t>
-            </a:r>
-          </a:p>
-          <a:p>
-            <a:r>
-              <a:rPr sz="1800" b="1">
-                <a:solidFill>
-                  <a:srgbClr val="03306E"/>
-                </a:solidFill>
-                <a:latin typeface="Calibri"/>
-              </a:rPr>
-              <a:t>Carrier Sense Multiple Access with Collision Detection.</a:t>
+              <a:rPr sz="2400" b="0" i="0">
+                <a:solidFill>
+                  <a:srgbClr val="202122"/>
+                </a:solidFill>
+                <a:latin typeface="Calibri"/>
+              </a:rPr>
+              <a:t>What keeps light inside a fibre core?</a:t>
             </a:r>
           </a:p>
         </p:txBody>
@@ -8404,8 +12698,8 @@
         </p:nvSpPr>
         <p:spPr>
           <a:xfrm>
-            <a:off x="548640" y="2574950"/>
-            <a:ext cx="411480" cy="411480"/>
+            <a:off x="548640" y="3108960"/>
+            <a:ext cx="502920" cy="502920"/>
           </a:xfrm>
           <a:prstGeom prst="ellipse">
             <a:avLst/>
@@ -8438,7 +12732,7 @@
           <a:p>
             <a:pPr algn="ctr"/>
             <a:r>
-              <a:rPr sz="1400" b="1">
+              <a:rPr sz="1600" b="1">
                 <a:solidFill>
                   <a:srgbClr val="202122"/>
                 </a:solidFill>
@@ -8457,8 +12751,8 @@
         </p:nvSpPr>
         <p:spPr>
           <a:xfrm>
-            <a:off x="1234440" y="2556662"/>
-            <a:ext cx="10408615" cy="791870"/>
+            <a:off x="1371600" y="3063240"/>
+            <a:ext cx="10271455" cy="1188720"/>
           </a:xfrm>
           <a:prstGeom prst="rect">
             <a:avLst/>
@@ -8471,24 +12765,13 @@
           <a:p>
             <a:pPr algn="l"/>
             <a:r>
-              <a:rPr sz="1800" b="0" i="0">
-                <a:solidFill>
-                  <a:srgbClr val="54595D"/>
-                </a:solidFill>
-                <a:latin typeface="Calibri"/>
-              </a:rPr>
-              <a:t>What keeps light inside a fibre core?</a:t>
-            </a:r>
-          </a:p>
-          <a:p>
-            <a:r>
-              <a:rPr sz="1800" b="1">
-                <a:solidFill>
-                  <a:srgbClr val="03306E"/>
-                </a:solidFill>
-                <a:latin typeface="Calibri"/>
-              </a:rPr>
-              <a:t>Total internal reflection.</a:t>
+              <a:rPr sz="2400" b="0" i="0">
+                <a:solidFill>
+                  <a:srgbClr val="202122"/>
+                </a:solidFill>
+                <a:latin typeface="Calibri"/>
+              </a:rPr>
+              <a:t>Which fibre type suits long distances?</a:t>
             </a:r>
           </a:p>
         </p:txBody>
@@ -8501,8 +12784,8 @@
         </p:nvSpPr>
         <p:spPr>
           <a:xfrm>
-            <a:off x="548640" y="3531412"/>
-            <a:ext cx="411480" cy="411480"/>
+            <a:off x="548640" y="4526280"/>
+            <a:ext cx="502920" cy="502920"/>
           </a:xfrm>
           <a:prstGeom prst="ellipse">
             <a:avLst/>
@@ -8535,7 +12818,7 @@
           <a:p>
             <a:pPr algn="ctr"/>
             <a:r>
-              <a:rPr sz="1400" b="1">
+              <a:rPr sz="1600" b="1">
                 <a:solidFill>
                   <a:srgbClr val="202122"/>
                 </a:solidFill>
@@ -8554,8 +12837,8 @@
         </p:nvSpPr>
         <p:spPr>
           <a:xfrm>
-            <a:off x="1234440" y="3513124"/>
-            <a:ext cx="10408615" cy="791870"/>
+            <a:off x="1371600" y="4480560"/>
+            <a:ext cx="10271455" cy="1188720"/>
           </a:xfrm>
           <a:prstGeom prst="rect">
             <a:avLst/>
@@ -8568,218 +12851,46 @@
           <a:p>
             <a:pPr algn="l"/>
             <a:r>
-              <a:rPr sz="1800" b="0" i="0">
+              <a:rPr sz="2400" b="0" i="0">
+                <a:solidFill>
+                  <a:srgbClr val="202122"/>
+                </a:solidFill>
+                <a:latin typeface="Calibri"/>
+              </a:rPr>
+              <a:t>Why is multi-mode limited in distance?</a:t>
+            </a:r>
+          </a:p>
+        </p:txBody>
+      </p:sp>
+      <p:sp>
+        <p:nvSpPr>
+          <p:cNvPr id="12" name="TextBox 11"/>
+          <p:cNvSpPr txBox="1"/>
+          <p:nvPr/>
+        </p:nvSpPr>
+        <p:spPr>
+          <a:xfrm>
+            <a:off x="548640" y="5852160"/>
+            <a:ext cx="11094415" cy="365760"/>
+          </a:xfrm>
+          <a:prstGeom prst="rect">
+            <a:avLst/>
+          </a:prstGeom>
+          <a:noFill/>
+        </p:spPr>
+        <p:txBody>
+          <a:bodyPr wrap="square" anchor="t" lIns="0" rIns="0" tIns="0" bIns="0"/>
+          <a:lstStyle/>
+          <a:p>
+            <a:pPr algn="l"/>
+            <a:r>
+              <a:rPr sz="1300" b="0" i="1">
                 <a:solidFill>
                   <a:srgbClr val="54595D"/>
                 </a:solidFill>
                 <a:latin typeface="Calibri"/>
               </a:rPr>
-              <a:t>Which fibre type suits long distances?</a:t>
-            </a:r>
-          </a:p>
-          <a:p>
-            <a:r>
-              <a:rPr sz="1800" b="1">
-                <a:solidFill>
-                  <a:srgbClr val="03306E"/>
-                </a:solidFill>
-                <a:latin typeface="Calibri"/>
-              </a:rPr>
-              <a:t>Single-mode.</a:t>
-            </a:r>
-          </a:p>
-        </p:txBody>
-      </p:sp>
-      <p:sp>
-        <p:nvSpPr>
-          <p:cNvPr id="12" name="Oval 11"/>
-          <p:cNvSpPr/>
-          <p:nvPr/>
-        </p:nvSpPr>
-        <p:spPr>
-          <a:xfrm>
-            <a:off x="548640" y="4487875"/>
-            <a:ext cx="411480" cy="411480"/>
-          </a:xfrm>
-          <a:prstGeom prst="ellipse">
-            <a:avLst/>
-          </a:prstGeom>
-          <a:solidFill>
-            <a:srgbClr val="F2B705"/>
-          </a:solidFill>
-          <a:ln>
-            <a:noFill/>
-          </a:ln>
-          <a:effectLst/>
-        </p:spPr>
-        <p:style>
-          <a:lnRef idx="1">
-            <a:schemeClr val="accent1"/>
-          </a:lnRef>
-          <a:fillRef idx="3">
-            <a:schemeClr val="accent1"/>
-          </a:fillRef>
-          <a:effectRef idx="2">
-            <a:schemeClr val="accent1"/>
-          </a:effectRef>
-          <a:fontRef idx="minor">
-            <a:schemeClr val="lt1"/>
-          </a:fontRef>
-        </p:style>
-        <p:txBody>
-          <a:bodyPr rtlCol="0" anchor="ctr" lIns="0" rIns="0" tIns="0" bIns="0"/>
-          <a:lstStyle/>
-          <a:p>
-            <a:pPr algn="ctr"/>
-            <a:r>
-              <a:rPr sz="1400" b="1">
-                <a:solidFill>
-                  <a:srgbClr val="202122"/>
-                </a:solidFill>
-                <a:latin typeface="Calibri"/>
-              </a:rPr>
-              <a:t>4</a:t>
-            </a:r>
-          </a:p>
-        </p:txBody>
-      </p:sp>
-      <p:sp>
-        <p:nvSpPr>
-          <p:cNvPr id="13" name="TextBox 12"/>
-          <p:cNvSpPr txBox="1"/>
-          <p:nvPr/>
-        </p:nvSpPr>
-        <p:spPr>
-          <a:xfrm>
-            <a:off x="1234440" y="4469587"/>
-            <a:ext cx="10408615" cy="791870"/>
-          </a:xfrm>
-          <a:prstGeom prst="rect">
-            <a:avLst/>
-          </a:prstGeom>
-          <a:noFill/>
-        </p:spPr>
-        <p:txBody>
-          <a:bodyPr wrap="square" anchor="t" lIns="0" rIns="0" tIns="0" bIns="0"/>
-          <a:lstStyle/>
-          <a:p>
-            <a:pPr algn="l"/>
-            <a:r>
-              <a:rPr sz="1800" b="0" i="0">
-                <a:solidFill>
-                  <a:srgbClr val="54595D"/>
-                </a:solidFill>
-                <a:latin typeface="Calibri"/>
-              </a:rPr>
-              <a:t>Name two causes of attenuation.</a:t>
-            </a:r>
-          </a:p>
-          <a:p>
-            <a:r>
-              <a:rPr sz="1800" b="1">
-                <a:solidFill>
-                  <a:srgbClr val="03306E"/>
-                </a:solidFill>
-                <a:latin typeface="Calibri"/>
-              </a:rPr>
-              <a:t>Any two of: absorption, scattering, macrobending, microbending.</a:t>
-            </a:r>
-          </a:p>
-        </p:txBody>
-      </p:sp>
-      <p:sp>
-        <p:nvSpPr>
-          <p:cNvPr id="14" name="Oval 13"/>
-          <p:cNvSpPr/>
-          <p:nvPr/>
-        </p:nvSpPr>
-        <p:spPr>
-          <a:xfrm>
-            <a:off x="548640" y="5444337"/>
-            <a:ext cx="411480" cy="411480"/>
-          </a:xfrm>
-          <a:prstGeom prst="ellipse">
-            <a:avLst/>
-          </a:prstGeom>
-          <a:solidFill>
-            <a:srgbClr val="F2B705"/>
-          </a:solidFill>
-          <a:ln>
-            <a:noFill/>
-          </a:ln>
-          <a:effectLst/>
-        </p:spPr>
-        <p:style>
-          <a:lnRef idx="1">
-            <a:schemeClr val="accent1"/>
-          </a:lnRef>
-          <a:fillRef idx="3">
-            <a:schemeClr val="accent1"/>
-          </a:fillRef>
-          <a:effectRef idx="2">
-            <a:schemeClr val="accent1"/>
-          </a:effectRef>
-          <a:fontRef idx="minor">
-            <a:schemeClr val="lt1"/>
-          </a:fontRef>
-        </p:style>
-        <p:txBody>
-          <a:bodyPr rtlCol="0" anchor="ctr" lIns="0" rIns="0" tIns="0" bIns="0"/>
-          <a:lstStyle/>
-          <a:p>
-            <a:pPr algn="ctr"/>
-            <a:r>
-              <a:rPr sz="1400" b="1">
-                <a:solidFill>
-                  <a:srgbClr val="202122"/>
-                </a:solidFill>
-                <a:latin typeface="Calibri"/>
-              </a:rPr>
-              <a:t>5</a:t>
-            </a:r>
-          </a:p>
-        </p:txBody>
-      </p:sp>
-      <p:sp>
-        <p:nvSpPr>
-          <p:cNvPr id="15" name="TextBox 14"/>
-          <p:cNvSpPr txBox="1"/>
-          <p:nvPr/>
-        </p:nvSpPr>
-        <p:spPr>
-          <a:xfrm>
-            <a:off x="1234440" y="5426049"/>
-            <a:ext cx="10408615" cy="791870"/>
-          </a:xfrm>
-          <a:prstGeom prst="rect">
-            <a:avLst/>
-          </a:prstGeom>
-          <a:noFill/>
-        </p:spPr>
-        <p:txBody>
-          <a:bodyPr wrap="square" anchor="t" lIns="0" rIns="0" tIns="0" bIns="0"/>
-          <a:lstStyle/>
-          <a:p>
-            <a:pPr algn="l"/>
-            <a:r>
-              <a:rPr sz="1800" b="0" i="0">
-                <a:solidFill>
-                  <a:srgbClr val="54595D"/>
-                </a:solidFill>
-                <a:latin typeface="Calibri"/>
-              </a:rPr>
-              <a:t>Using V = I x R, what current flows with 10 V and 5 ohms?</a:t>
-            </a:r>
-          </a:p>
-          <a:p>
-            <a:r>
-              <a:rPr sz="1800" b="1">
-                <a:solidFill>
-                  <a:srgbClr val="03306E"/>
-                </a:solidFill>
-                <a:latin typeface="Calibri"/>
-              </a:rPr>
-              <a:t>2 amps.</a:t>
+              <a:t>Answer on mini whiteboards or in your book. Answers are in the speaker notes.</a:t>
             </a:r>
           </a:p>
         </p:txBody>
@@ -8871,7 +12982,7 @@
                 </a:solidFill>
                 <a:latin typeface="Cambria"/>
               </a:rPr>
-              <a:t>Activity: Signal loss investigation</a:t>
+              <a:t>Attenuation: losing signal over distance</a:t>
             </a:r>
           </a:p>
         </p:txBody>
@@ -8944,19 +13055,141 @@
       </p:sp>
       <p:sp>
         <p:nvSpPr>
-          <p:cNvPr id="6" name="Rounded Rectangle 5"/>
+          <p:cNvPr id="6" name="TextBox 5"/>
+          <p:cNvSpPr txBox="1"/>
+          <p:nvPr/>
+        </p:nvSpPr>
+        <p:spPr>
+          <a:xfrm>
+            <a:off x="548640" y="1554480"/>
+            <a:ext cx="6720840" cy="4617720"/>
+          </a:xfrm>
+          <a:prstGeom prst="rect">
+            <a:avLst/>
+          </a:prstGeom>
+          <a:noFill/>
+        </p:spPr>
+        <p:txBody>
+          <a:bodyPr wrap="square" lIns="0" rIns="0" tIns="0" bIns="0">
+            <a:spAutoFit/>
+          </a:bodyPr>
+          <a:lstStyle/>
+          <a:p>
+            <a:pPr>
+              <a:spcAft>
+                <a:spcPts val="1260"/>
+              </a:spcAft>
+            </a:pPr>
+            <a:r>
+              <a:rPr sz="2100" b="0">
+                <a:solidFill>
+                  <a:srgbClr val="202122"/>
+                </a:solidFill>
+                <a:latin typeface="Calibri"/>
+              </a:rPr>
+              <a:t>Attenuation is the loss of signal strength as it travels, measured in decibels (dB).</a:t>
+            </a:r>
+          </a:p>
+          <a:p>
+            <a:pPr>
+              <a:spcAft>
+                <a:spcPts val="1260"/>
+              </a:spcAft>
+            </a:pPr>
+            <a:r>
+              <a:rPr sz="2100" b="0">
+                <a:solidFill>
+                  <a:srgbClr val="202122"/>
+                </a:solidFill>
+                <a:latin typeface="Calibri"/>
+              </a:rPr>
+              <a:t>In fibre, absorption happens when impurities in the glass soak up light, getting worse with distance. Scattering happens when light hits tiny particles and is lost into the cladding. Bending the cable too tightly, whether a large macrobend or tiny microbends from pressure, lets light escape.</a:t>
+            </a:r>
+          </a:p>
+          <a:p>
+            <a:pPr>
+              <a:spcAft>
+                <a:spcPts val="1260"/>
+              </a:spcAft>
+            </a:pPr>
+            <a:r>
+              <a:rPr sz="2100" b="1">
+                <a:solidFill>
+                  <a:srgbClr val="202122"/>
+                </a:solidFill>
+                <a:latin typeface="Calibri"/>
+              </a:rPr>
+              <a:t>Poor handling adds more loss:</a:t>
+            </a:r>
+            <a:r>
+              <a:rPr sz="2100" b="0">
+                <a:solidFill>
+                  <a:srgbClr val="202122"/>
+                </a:solidFill>
+                <a:latin typeface="Calibri"/>
+              </a:rPr>
+              <a:t> dirty or damaged connectors can cause an unreliable link or no link at all, and poor-quality cable or connectors add interference. Always clean and inspect fibre ends before connecting.</a:t>
+            </a:r>
+          </a:p>
+        </p:txBody>
+      </p:sp>
+      <p:sp>
+        <p:nvSpPr>
+          <p:cNvPr id="7" name="Rounded Rectangle 6"/>
           <p:cNvSpPr/>
           <p:nvPr/>
         </p:nvSpPr>
         <p:spPr>
           <a:xfrm>
-            <a:off x="548640" y="1508760"/>
-            <a:ext cx="2011680" cy="457200"/>
+            <a:off x="7772400" y="1554480"/>
+            <a:ext cx="3867912" cy="4526280"/>
           </a:xfrm>
           <a:prstGeom prst="roundRect">
             <a:avLst>
-              <a:gd name="adj" fmla="val 50000"/>
+              <a:gd name="adj" fmla="val 8000"/>
             </a:avLst>
+          </a:prstGeom>
+          <a:solidFill>
+            <a:srgbClr val="03306E"/>
+          </a:solidFill>
+          <a:ln>
+            <a:noFill/>
+          </a:ln>
+          <a:effectLst/>
+        </p:spPr>
+        <p:style>
+          <a:lnRef idx="1">
+            <a:schemeClr val="accent1"/>
+          </a:lnRef>
+          <a:fillRef idx="3">
+            <a:schemeClr val="accent1"/>
+          </a:fillRef>
+          <a:effectRef idx="2">
+            <a:schemeClr val="accent1"/>
+          </a:effectRef>
+          <a:fontRef idx="minor">
+            <a:schemeClr val="lt1"/>
+          </a:fontRef>
+        </p:style>
+        <p:txBody>
+          <a:bodyPr rtlCol="0" anchor="ctr"/>
+          <a:lstStyle/>
+          <a:p/>
+        </p:txBody>
+      </p:sp>
+      <p:sp>
+        <p:nvSpPr>
+          <p:cNvPr id="8" name="Oval 7"/>
+          <p:cNvSpPr/>
+          <p:nvPr/>
+        </p:nvSpPr>
+        <p:spPr>
+          <a:xfrm>
+            <a:off x="8046720" y="1828800"/>
+            <a:ext cx="548640" cy="548640"/>
+          </a:xfrm>
+          <a:prstGeom prst="ellipse">
+            <a:avLst/>
           </a:prstGeom>
           <a:solidFill>
             <a:srgbClr val="F2B705"/>
@@ -8981,580 +13214,84 @@
           </a:fontRef>
         </p:style>
         <p:txBody>
-          <a:bodyPr rtlCol="0" anchor="ctr"/>
-          <a:lstStyle/>
-          <a:p/>
-        </p:txBody>
-      </p:sp>
-      <p:sp>
-        <p:nvSpPr>
-          <p:cNvPr id="7" name="TextBox 6"/>
-          <p:cNvSpPr txBox="1"/>
-          <p:nvPr/>
-        </p:nvSpPr>
-        <p:spPr>
-          <a:xfrm>
-            <a:off x="548640" y="1508760"/>
-            <a:ext cx="2011680" cy="457200"/>
-          </a:xfrm>
-          <a:prstGeom prst="rect">
-            <a:avLst/>
-          </a:prstGeom>
-          <a:noFill/>
-        </p:spPr>
-        <p:txBody>
-          <a:bodyPr wrap="square" anchor="ctr" lIns="0" rIns="0" tIns="0" bIns="0"/>
+          <a:bodyPr rtlCol="0" anchor="ctr" lIns="0" rIns="0" tIns="0" bIns="0"/>
           <a:lstStyle/>
           <a:p>
             <a:pPr algn="ctr"/>
             <a:r>
-              <a:rPr sz="1400" b="1" i="0">
+              <a:rPr sz="1300" b="1">
                 <a:solidFill>
                   <a:srgbClr val="202122"/>
                 </a:solidFill>
                 <a:latin typeface="Calibri"/>
               </a:rPr>
-              <a:t>25 minutes</a:t>
-            </a:r>
-          </a:p>
-        </p:txBody>
-      </p:sp>
-      <p:sp>
-        <p:nvSpPr>
-          <p:cNvPr id="8" name="TextBox 7"/>
-          <p:cNvSpPr txBox="1"/>
-          <p:nvPr/>
-        </p:nvSpPr>
-        <p:spPr>
-          <a:xfrm>
-            <a:off x="2743200" y="1508760"/>
-            <a:ext cx="4754880" cy="457200"/>
-          </a:xfrm>
-          <a:prstGeom prst="rect">
-            <a:avLst/>
-          </a:prstGeom>
-          <a:noFill/>
-        </p:spPr>
-        <p:txBody>
-          <a:bodyPr wrap="square" anchor="ctr" lIns="0" rIns="0" tIns="0" bIns="0"/>
+              <a:t>e.g.</a:t>
+            </a:r>
+          </a:p>
+        </p:txBody>
+      </p:sp>
+      <p:sp>
+        <p:nvSpPr>
+          <p:cNvPr id="9" name="TextBox 8"/>
+          <p:cNvSpPr txBox="1"/>
+          <p:nvPr/>
+        </p:nvSpPr>
+        <p:spPr>
+          <a:xfrm>
+            <a:off x="8046720" y="2560320"/>
+            <a:ext cx="3291840" cy="365760"/>
+          </a:xfrm>
+          <a:prstGeom prst="rect">
+            <a:avLst/>
+          </a:prstGeom>
+          <a:noFill/>
+        </p:spPr>
+        <p:txBody>
+          <a:bodyPr wrap="square" anchor="t" lIns="0" rIns="0" tIns="0" bIns="0"/>
           <a:lstStyle/>
           <a:p>
             <a:pPr algn="l"/>
             <a:r>
-              <a:rPr sz="1400" b="0" i="1">
-                <a:solidFill>
-                  <a:srgbClr val="54595D"/>
-                </a:solidFill>
-                <a:latin typeface="Calibri"/>
-              </a:rPr>
-              <a:t>Pairs</a:t>
-            </a:r>
-          </a:p>
-        </p:txBody>
-      </p:sp>
-      <p:sp>
-        <p:nvSpPr>
-          <p:cNvPr id="9" name="Oval 8"/>
-          <p:cNvSpPr/>
-          <p:nvPr/>
-        </p:nvSpPr>
-        <p:spPr>
-          <a:xfrm>
-            <a:off x="548640" y="2482596"/>
-            <a:ext cx="384048" cy="384048"/>
-          </a:xfrm>
-          <a:prstGeom prst="ellipse">
-            <a:avLst/>
-          </a:prstGeom>
-          <a:solidFill>
-            <a:srgbClr val="0645AD"/>
-          </a:solidFill>
-          <a:ln>
-            <a:noFill/>
-          </a:ln>
-          <a:effectLst/>
-        </p:spPr>
-        <p:style>
-          <a:lnRef idx="1">
-            <a:schemeClr val="accent1"/>
-          </a:lnRef>
-          <a:fillRef idx="3">
-            <a:schemeClr val="accent1"/>
-          </a:fillRef>
-          <a:effectRef idx="2">
-            <a:schemeClr val="accent1"/>
-          </a:effectRef>
-          <a:fontRef idx="minor">
-            <a:schemeClr val="lt1"/>
-          </a:fontRef>
-        </p:style>
-        <p:txBody>
-          <a:bodyPr rtlCol="0" anchor="ctr" lIns="0" rIns="0" tIns="0" bIns="0"/>
-          <a:lstStyle/>
-          <a:p>
-            <a:pPr algn="ctr"/>
-            <a:r>
-              <a:rPr sz="1300" b="1">
+              <a:rPr sz="1300" b="1" i="0">
+                <a:solidFill>
+                  <a:srgbClr val="A9C8F0"/>
+                </a:solidFill>
+                <a:latin typeface="Calibri"/>
+              </a:rPr>
+              <a:t>EXAMPLE</a:t>
+            </a:r>
+          </a:p>
+        </p:txBody>
+      </p:sp>
+      <p:sp>
+        <p:nvSpPr>
+          <p:cNvPr id="10" name="TextBox 9"/>
+          <p:cNvSpPr txBox="1"/>
+          <p:nvPr/>
+        </p:nvSpPr>
+        <p:spPr>
+          <a:xfrm>
+            <a:off x="8046720" y="2971800"/>
+            <a:ext cx="3291840" cy="2971800"/>
+          </a:xfrm>
+          <a:prstGeom prst="rect">
+            <a:avLst/>
+          </a:prstGeom>
+          <a:noFill/>
+        </p:spPr>
+        <p:txBody>
+          <a:bodyPr wrap="square" anchor="t" lIns="0" rIns="0" tIns="0" bIns="0"/>
+          <a:lstStyle/>
+          <a:p>
+            <a:pPr algn="l"/>
+            <a:r>
+              <a:rPr sz="1900" b="0" i="0">
                 <a:solidFill>
                   <a:srgbClr val="FFFFFF"/>
                 </a:solidFill>
-                <a:latin typeface="Calibri"/>
-              </a:rPr>
-              <a:t>1</a:t>
-            </a:r>
-          </a:p>
-        </p:txBody>
-      </p:sp>
-      <p:sp>
-        <p:nvSpPr>
-          <p:cNvPr id="10" name="TextBox 9"/>
-          <p:cNvSpPr txBox="1"/>
-          <p:nvPr/>
-        </p:nvSpPr>
-        <p:spPr>
-          <a:xfrm>
-            <a:off x="1143000" y="2240280"/>
-            <a:ext cx="5943600" cy="868680"/>
-          </a:xfrm>
-          <a:prstGeom prst="rect">
-            <a:avLst/>
-          </a:prstGeom>
-          <a:noFill/>
-        </p:spPr>
-        <p:txBody>
-          <a:bodyPr wrap="square" anchor="ctr" lIns="0" rIns="0" tIns="0" bIns="0"/>
-          <a:lstStyle/>
-          <a:p>
-            <a:pPr algn="l"/>
-            <a:r>
-              <a:rPr sz="1700" b="0" i="0">
-                <a:solidFill>
-                  <a:srgbClr val="202122"/>
-                </a:solidFill>
-                <a:latin typeface="Calibri"/>
-              </a:rPr>
-              <a:t>Use the fibre loss figures given by your teacher for three links.</a:t>
-            </a:r>
-          </a:p>
-        </p:txBody>
-      </p:sp>
-      <p:sp>
-        <p:nvSpPr>
-          <p:cNvPr id="11" name="Oval 10"/>
-          <p:cNvSpPr/>
-          <p:nvPr/>
-        </p:nvSpPr>
-        <p:spPr>
-          <a:xfrm>
-            <a:off x="548640" y="3461004"/>
-            <a:ext cx="384048" cy="384048"/>
-          </a:xfrm>
-          <a:prstGeom prst="ellipse">
-            <a:avLst/>
-          </a:prstGeom>
-          <a:solidFill>
-            <a:srgbClr val="0645AD"/>
-          </a:solidFill>
-          <a:ln>
-            <a:noFill/>
-          </a:ln>
-          <a:effectLst/>
-        </p:spPr>
-        <p:style>
-          <a:lnRef idx="1">
-            <a:schemeClr val="accent1"/>
-          </a:lnRef>
-          <a:fillRef idx="3">
-            <a:schemeClr val="accent1"/>
-          </a:fillRef>
-          <a:effectRef idx="2">
-            <a:schemeClr val="accent1"/>
-          </a:effectRef>
-          <a:fontRef idx="minor">
-            <a:schemeClr val="lt1"/>
-          </a:fontRef>
-        </p:style>
-        <p:txBody>
-          <a:bodyPr rtlCol="0" anchor="ctr" lIns="0" rIns="0" tIns="0" bIns="0"/>
-          <a:lstStyle/>
-          <a:p>
-            <a:pPr algn="ctr"/>
-            <a:r>
-              <a:rPr sz="1300" b="1">
-                <a:solidFill>
-                  <a:srgbClr val="FFFFFF"/>
-                </a:solidFill>
-                <a:latin typeface="Calibri"/>
-              </a:rPr>
-              <a:t>2</a:t>
-            </a:r>
-          </a:p>
-        </p:txBody>
-      </p:sp>
-      <p:sp>
-        <p:nvSpPr>
-          <p:cNvPr id="12" name="TextBox 11"/>
-          <p:cNvSpPr txBox="1"/>
-          <p:nvPr/>
-        </p:nvSpPr>
-        <p:spPr>
-          <a:xfrm>
-            <a:off x="1143000" y="3218688"/>
-            <a:ext cx="5943600" cy="868680"/>
-          </a:xfrm>
-          <a:prstGeom prst="rect">
-            <a:avLst/>
-          </a:prstGeom>
-          <a:noFill/>
-        </p:spPr>
-        <p:txBody>
-          <a:bodyPr wrap="square" anchor="ctr" lIns="0" rIns="0" tIns="0" bIns="0"/>
-          <a:lstStyle/>
-          <a:p>
-            <a:pPr algn="l"/>
-            <a:r>
-              <a:rPr sz="1700" b="0" i="0">
-                <a:solidFill>
-                  <a:srgbClr val="202122"/>
-                </a:solidFill>
-                <a:latin typeface="Calibri"/>
-              </a:rPr>
-              <a:t>Identify which link has a fault, and the most likely cause.</a:t>
-            </a:r>
-          </a:p>
-        </p:txBody>
-      </p:sp>
-      <p:sp>
-        <p:nvSpPr>
-          <p:cNvPr id="13" name="Oval 12"/>
-          <p:cNvSpPr/>
-          <p:nvPr/>
-        </p:nvSpPr>
-        <p:spPr>
-          <a:xfrm>
-            <a:off x="548640" y="4439412"/>
-            <a:ext cx="384048" cy="384048"/>
-          </a:xfrm>
-          <a:prstGeom prst="ellipse">
-            <a:avLst/>
-          </a:prstGeom>
-          <a:solidFill>
-            <a:srgbClr val="0645AD"/>
-          </a:solidFill>
-          <a:ln>
-            <a:noFill/>
-          </a:ln>
-          <a:effectLst/>
-        </p:spPr>
-        <p:style>
-          <a:lnRef idx="1">
-            <a:schemeClr val="accent1"/>
-          </a:lnRef>
-          <a:fillRef idx="3">
-            <a:schemeClr val="accent1"/>
-          </a:fillRef>
-          <a:effectRef idx="2">
-            <a:schemeClr val="accent1"/>
-          </a:effectRef>
-          <a:fontRef idx="minor">
-            <a:schemeClr val="lt1"/>
-          </a:fontRef>
-        </p:style>
-        <p:txBody>
-          <a:bodyPr rtlCol="0" anchor="ctr" lIns="0" rIns="0" tIns="0" bIns="0"/>
-          <a:lstStyle/>
-          <a:p>
-            <a:pPr algn="ctr"/>
-            <a:r>
-              <a:rPr sz="1300" b="1">
-                <a:solidFill>
-                  <a:srgbClr val="FFFFFF"/>
-                </a:solidFill>
-                <a:latin typeface="Calibri"/>
-              </a:rPr>
-              <a:t>3</a:t>
-            </a:r>
-          </a:p>
-        </p:txBody>
-      </p:sp>
-      <p:sp>
-        <p:nvSpPr>
-          <p:cNvPr id="14" name="TextBox 13"/>
-          <p:cNvSpPr txBox="1"/>
-          <p:nvPr/>
-        </p:nvSpPr>
-        <p:spPr>
-          <a:xfrm>
-            <a:off x="1143000" y="4197096"/>
-            <a:ext cx="5943600" cy="868680"/>
-          </a:xfrm>
-          <a:prstGeom prst="rect">
-            <a:avLst/>
-          </a:prstGeom>
-          <a:noFill/>
-        </p:spPr>
-        <p:txBody>
-          <a:bodyPr wrap="square" anchor="ctr" lIns="0" rIns="0" tIns="0" bIns="0"/>
-          <a:lstStyle/>
-          <a:p>
-            <a:pPr algn="l"/>
-            <a:r>
-              <a:rPr sz="1700" b="0" i="0">
-                <a:solidFill>
-                  <a:srgbClr val="202122"/>
-                </a:solidFill>
-                <a:latin typeface="Calibri"/>
-              </a:rPr>
-              <a:t>Calculate current for three copper examples using Ohm's law.</a:t>
-            </a:r>
-          </a:p>
-        </p:txBody>
-      </p:sp>
-      <p:sp>
-        <p:nvSpPr>
-          <p:cNvPr id="15" name="Oval 14"/>
-          <p:cNvSpPr/>
-          <p:nvPr/>
-        </p:nvSpPr>
-        <p:spPr>
-          <a:xfrm>
-            <a:off x="548640" y="5417820"/>
-            <a:ext cx="384048" cy="384048"/>
-          </a:xfrm>
-          <a:prstGeom prst="ellipse">
-            <a:avLst/>
-          </a:prstGeom>
-          <a:solidFill>
-            <a:srgbClr val="0645AD"/>
-          </a:solidFill>
-          <a:ln>
-            <a:noFill/>
-          </a:ln>
-          <a:effectLst/>
-        </p:spPr>
-        <p:style>
-          <a:lnRef idx="1">
-            <a:schemeClr val="accent1"/>
-          </a:lnRef>
-          <a:fillRef idx="3">
-            <a:schemeClr val="accent1"/>
-          </a:fillRef>
-          <a:effectRef idx="2">
-            <a:schemeClr val="accent1"/>
-          </a:effectRef>
-          <a:fontRef idx="minor">
-            <a:schemeClr val="lt1"/>
-          </a:fontRef>
-        </p:style>
-        <p:txBody>
-          <a:bodyPr rtlCol="0" anchor="ctr" lIns="0" rIns="0" tIns="0" bIns="0"/>
-          <a:lstStyle/>
-          <a:p>
-            <a:pPr algn="ctr"/>
-            <a:r>
-              <a:rPr sz="1300" b="1">
-                <a:solidFill>
-                  <a:srgbClr val="FFFFFF"/>
-                </a:solidFill>
-                <a:latin typeface="Calibri"/>
-              </a:rPr>
-              <a:t>4</a:t>
-            </a:r>
-          </a:p>
-        </p:txBody>
-      </p:sp>
-      <p:sp>
-        <p:nvSpPr>
-          <p:cNvPr id="16" name="TextBox 15"/>
-          <p:cNvSpPr txBox="1"/>
-          <p:nvPr/>
-        </p:nvSpPr>
-        <p:spPr>
-          <a:xfrm>
-            <a:off x="1143000" y="5175504"/>
-            <a:ext cx="5943600" cy="868680"/>
-          </a:xfrm>
-          <a:prstGeom prst="rect">
-            <a:avLst/>
-          </a:prstGeom>
-          <a:noFill/>
-        </p:spPr>
-        <p:txBody>
-          <a:bodyPr wrap="square" anchor="ctr" lIns="0" rIns="0" tIns="0" bIns="0"/>
-          <a:lstStyle/>
-          <a:p>
-            <a:pPr algn="l"/>
-            <a:r>
-              <a:rPr sz="1700" b="0" i="0">
-                <a:solidFill>
-                  <a:srgbClr val="202122"/>
-                </a:solidFill>
-                <a:latin typeface="Calibri"/>
-              </a:rPr>
-              <a:t>Explain why a 150 m copper run would be a problem.</a:t>
-            </a:r>
-          </a:p>
-        </p:txBody>
-      </p:sp>
-      <p:sp>
-        <p:nvSpPr>
-          <p:cNvPr id="17" name="Rounded Rectangle 16"/>
-          <p:cNvSpPr/>
-          <p:nvPr/>
-        </p:nvSpPr>
-        <p:spPr>
-          <a:xfrm>
-            <a:off x="7772400" y="1508760"/>
-            <a:ext cx="3867912" cy="4572000"/>
-          </a:xfrm>
-          <a:prstGeom prst="roundRect">
-            <a:avLst>
-              <a:gd name="adj" fmla="val 8000"/>
-            </a:avLst>
-          </a:prstGeom>
-          <a:solidFill>
-            <a:srgbClr val="EAF3FF"/>
-          </a:solidFill>
-          <a:ln>
-            <a:noFill/>
-          </a:ln>
-          <a:effectLst/>
-        </p:spPr>
-        <p:style>
-          <a:lnRef idx="1">
-            <a:schemeClr val="accent1"/>
-          </a:lnRef>
-          <a:fillRef idx="3">
-            <a:schemeClr val="accent1"/>
-          </a:fillRef>
-          <a:effectRef idx="2">
-            <a:schemeClr val="accent1"/>
-          </a:effectRef>
-          <a:fontRef idx="minor">
-            <a:schemeClr val="lt1"/>
-          </a:fontRef>
-        </p:style>
-        <p:txBody>
-          <a:bodyPr rtlCol="0" anchor="ctr"/>
-          <a:lstStyle/>
-          <a:p/>
-        </p:txBody>
-      </p:sp>
-      <p:sp>
-        <p:nvSpPr>
-          <p:cNvPr id="18" name="TextBox 17"/>
-          <p:cNvSpPr txBox="1"/>
-          <p:nvPr/>
-        </p:nvSpPr>
-        <p:spPr>
-          <a:xfrm>
-            <a:off x="8046720" y="1737360"/>
-            <a:ext cx="3291840" cy="365760"/>
-          </a:xfrm>
-          <a:prstGeom prst="rect">
-            <a:avLst/>
-          </a:prstGeom>
-          <a:noFill/>
-        </p:spPr>
-        <p:txBody>
-          <a:bodyPr wrap="square" anchor="t" lIns="0" rIns="0" tIns="0" bIns="0"/>
-          <a:lstStyle/>
-          <a:p>
-            <a:pPr algn="l"/>
-            <a:r>
-              <a:rPr sz="1300" b="1" i="0">
-                <a:solidFill>
-                  <a:srgbClr val="0645AD"/>
-                </a:solidFill>
-                <a:latin typeface="Calibri"/>
-              </a:rPr>
-              <a:t>SUCCESS CRITERIA</a:t>
-            </a:r>
-          </a:p>
-        </p:txBody>
-      </p:sp>
-      <p:sp>
-        <p:nvSpPr>
-          <p:cNvPr id="19" name="TextBox 18"/>
-          <p:cNvSpPr txBox="1"/>
-          <p:nvPr/>
-        </p:nvSpPr>
-        <p:spPr>
-          <a:xfrm>
-            <a:off x="8046720" y="2240280"/>
-            <a:ext cx="3337560" cy="3657600"/>
-          </a:xfrm>
-          <a:prstGeom prst="rect">
-            <a:avLst/>
-          </a:prstGeom>
-          <a:noFill/>
-        </p:spPr>
-        <p:txBody>
-          <a:bodyPr wrap="square" lIns="0" rIns="0" tIns="0" bIns="0">
-            <a:spAutoFit/>
-          </a:bodyPr>
-          <a:lstStyle/>
-          <a:p>
-            <a:pPr marL="274320" indent="-274320">
-              <a:spcAft>
-                <a:spcPts val="810"/>
-              </a:spcAft>
-              <a:buClr>
-                <a:srgbClr val="0645AD"/>
-              </a:buClr>
-              <a:buFont typeface="Arial"/>
-              <a:buChar char="•"/>
-            </a:pPr>
-            <a:r>
-              <a:rPr sz="1800" b="0">
-                <a:solidFill>
-                  <a:srgbClr val="202122"/>
-                </a:solidFill>
-                <a:latin typeface="Calibri"/>
-              </a:rPr>
-              <a:t>Faulty link found with evidence</a:t>
-            </a:r>
-          </a:p>
-          <a:p>
-            <a:pPr marL="274320" indent="-274320">
-              <a:spcAft>
-                <a:spcPts val="810"/>
-              </a:spcAft>
-              <a:buClr>
-                <a:srgbClr val="0645AD"/>
-              </a:buClr>
-              <a:buFont typeface="Arial"/>
-              <a:buChar char="•"/>
-            </a:pPr>
-            <a:r>
-              <a:rPr sz="1800" b="0">
-                <a:solidFill>
-                  <a:srgbClr val="202122"/>
-                </a:solidFill>
-                <a:latin typeface="Calibri"/>
-              </a:rPr>
-              <a:t>Calculations correct with units</a:t>
-            </a:r>
-          </a:p>
-          <a:p>
-            <a:pPr marL="274320" indent="-274320">
-              <a:spcAft>
-                <a:spcPts val="810"/>
-              </a:spcAft>
-              <a:buClr>
-                <a:srgbClr val="0645AD"/>
-              </a:buClr>
-              <a:buFont typeface="Arial"/>
-              <a:buChar char="•"/>
-            </a:pPr>
-            <a:r>
-              <a:rPr sz="1800" b="0">
-                <a:solidFill>
-                  <a:srgbClr val="202122"/>
-                </a:solidFill>
-                <a:latin typeface="Calibri"/>
-              </a:rPr>
-              <a:t>Maximum length explained using resistance</a:t>
+                <a:latin typeface="Cambria"/>
+              </a:rPr>
+              <a:t>A new fibre link fails its loss test. An inspection scope shows a fingerprint on one connector; cleaning it brings the loss within limits.</a:t>
             </a:r>
           </a:p>
         </p:txBody>
